--- a/slides/pfx-hpc-slides.pptx
+++ b/slides/pfx-hpc-slides.pptx
@@ -687,7 +687,7 @@
           <a:p>
             <a:r>
               <a:rPr lang="en-US" dirty="0"/>
-              <a:t>The emotional core of the talk. Slow down here. The point is belonging: this powerful thing is for them too.</a:t>
+              <a:t>The emotional core of the talk. Slow down here. The point is access and belonging, not speed records.</a:t>
             </a:r>
             <a:endParaRPr lang="en-US" dirty="0"/>
           </a:p>
@@ -775,7 +775,7 @@
           <a:p>
             <a:r>
               <a:rPr lang="en-US" dirty="0"/>
-              <a:t>Let the numbers land. The last line is the comparison that makes it real for a 17-year-old.</a:t>
+              <a:t>Stick to the specs. The comparison to their own laptop is what makes the scale land, not a ranking.</a:t>
             </a:r>
             <a:endParaRPr lang="en-US" dirty="0"/>
           </a:p>
@@ -1832,7 +1832,7 @@
                 <a:ea typeface="Calibri" pitchFamily="34" charset="-122"/>
                 <a:cs typeface="Calibri" pitchFamily="34" charset="-120"/>
               </a:rPr>
-              <a:t>Writing real code that runs on Frontera, one of the fastest computers on Earth.</a:t>
+              <a:t>Writing real code that runs on Frontera, a research supercomputer at TACC.</a:t>
             </a:r>
             <a:endParaRPr lang="en-US" sz="2000" dirty="0"/>
           </a:p>
@@ -2006,7 +2006,7 @@
                 <a:ea typeface="Calibri" pitchFamily="34" charset="-122"/>
                 <a:cs typeface="Calibri" pitchFamily="34" charset="-120"/>
               </a:rPr>
-              <a:t>What you're about to do, running code across many cores on Frontera, is exactly what computational scientists do every day. You belong in that room.</a:t>
+              <a:t>What you're about to do, running code across many cores on Frontera, is the same kind of work computational scientists do. You belong in that room.</a:t>
             </a:r>
             <a:endParaRPr lang="en-US" sz="2000" dirty="0"/>
           </a:p>
@@ -2119,7 +2119,7 @@
                 <a:ea typeface="Arial" pitchFamily="34" charset="-122"/>
                 <a:cs typeface="Arial" pitchFamily="34" charset="-120"/>
               </a:rPr>
-              <a:t>Right now, you're about to log into one of the fastest computers on Earth.</a:t>
+              <a:t>Today you get time on a research supercomputer.</a:t>
             </a:r>
             <a:endParaRPr lang="en-US" sz="4000" dirty="0"/>
           </a:p>
@@ -2158,7 +2158,7 @@
                 <a:ea typeface="Calibri" pitchFamily="34" charset="-122"/>
                 <a:cs typeface="Calibri" pitchFamily="34" charset="-120"/>
               </a:rPr>
-              <a:t>Not a lab down the hall. A national research supercomputer in Austin, Texas, that scientists compete for time on. Today, you get to use it.</a:t>
+              <a:t>Frontera is a shared research system at the Texas Advanced Computing Center in Austin, Texas. Researchers apply for time on it. This morning, it's yours.</a:t>
             </a:r>
             <a:endParaRPr lang="en-US" sz="1900" dirty="0"/>
           </a:p>
@@ -2307,7 +2307,7 @@
                 <a:ea typeface="Arial" pitchFamily="34" charset="-122"/>
                 <a:cs typeface="Arial" pitchFamily="34" charset="-120"/>
               </a:rPr>
-              <a:t>A machine built for problems too big for any laptop</a:t>
+              <a:t>Frontera by the numbers</a:t>
             </a:r>
             <a:endParaRPr lang="en-US" sz="3200" dirty="0"/>
           </a:p>
@@ -2474,7 +2474,7 @@
                 <a:ea typeface="Arial" pitchFamily="34" charset="-122"/>
                 <a:cs typeface="Arial" pitchFamily="34" charset="-120"/>
               </a:rPr>
-              <a:t>468,000</a:t>
+              <a:t>56</a:t>
             </a:r>
             <a:endParaRPr lang="en-US" sz="4600" dirty="0"/>
           </a:p>
@@ -2513,7 +2513,7 @@
                 <a:ea typeface="Calibri" pitchFamily="34" charset="-122"/>
                 <a:cs typeface="Calibri" pitchFamily="34" charset="-120"/>
               </a:rPr>
-              <a:t>processor cores</a:t>
+              <a:t>cores per node</a:t>
             </a:r>
             <a:endParaRPr lang="en-US" sz="1500" dirty="0"/>
           </a:p>
@@ -2577,7 +2577,7 @@
                 <a:ea typeface="Arial" pitchFamily="34" charset="-122"/>
                 <a:cs typeface="Arial" pitchFamily="34" charset="-120"/>
               </a:rPr>
-              <a:t>#1</a:t>
+              <a:t>468,608</a:t>
             </a:r>
             <a:endParaRPr lang="en-US" sz="4600" dirty="0"/>
           </a:p>
@@ -2616,7 +2616,7 @@
                 <a:ea typeface="Calibri" pitchFamily="34" charset="-122"/>
                 <a:cs typeface="Calibri" pitchFamily="34" charset="-120"/>
               </a:rPr>
-              <a:t>fastest U.S. academic</a:t>
+              <a:t>processor cores</a:t>
             </a:r>
             <a:endParaRPr lang="en-US" sz="1500" dirty="0"/>
           </a:p>
@@ -2633,7 +2633,7 @@
                 <a:ea typeface="Calibri" pitchFamily="34" charset="-122"/>
                 <a:cs typeface="Calibri" pitchFamily="34" charset="-120"/>
               </a:rPr>
-              <a:t>supercomputer at launch</a:t>
+              <a:t>in total</a:t>
             </a:r>
             <a:endParaRPr lang="en-US" sz="1500" dirty="0"/>
           </a:p>
@@ -2697,7 +2697,7 @@
                 <a:ea typeface="Arial" pitchFamily="34" charset="-122"/>
                 <a:cs typeface="Arial" pitchFamily="34" charset="-120"/>
               </a:rPr>
-              <a:t>NSF</a:t>
+              <a:t>192 GB</a:t>
             </a:r>
             <a:endParaRPr lang="en-US" sz="4600" dirty="0"/>
           </a:p>
@@ -2736,63 +2736,46 @@
                 <a:ea typeface="Calibri" pitchFamily="34" charset="-122"/>
                 <a:cs typeface="Calibri" pitchFamily="34" charset="-120"/>
               </a:rPr>
-              <a:t>funded, for open</a:t>
+              <a:t>memory per node</a:t>
             </a:r>
             <a:endParaRPr lang="en-US" sz="1500" dirty="0"/>
           </a:p>
-          <a:p>
-            <a:pPr algn="ctr" indent="0" marL="0">
-              <a:buNone/>
-            </a:pPr>
-            <a:r>
-              <a:rPr lang="en-US" sz="1500" dirty="0">
-                <a:solidFill>
-                  <a:srgbClr val="1A1A1A"/>
+        </p:txBody>
+      </p:sp>
+      <p:sp>
+        <p:nvSpPr>
+          <p:cNvPr id="16" name="Text 14"/>
+          <p:cNvSpPr/>
+          <p:nvPr/>
+        </p:nvSpPr>
+        <p:spPr>
+          <a:xfrm>
+            <a:off x="640080" y="5257800"/>
+            <a:ext cx="10972800" cy="457200"/>
+          </a:xfrm>
+          <a:prstGeom prst="rect">
+            <a:avLst/>
+          </a:prstGeom>
+          <a:noFill/>
+          <a:ln/>
+        </p:spPr>
+        <p:txBody>
+          <a:bodyPr wrap="square" lIns="0" tIns="0" rIns="0" bIns="0" rtlCol="0" anchor="ctr"/>
+          <a:lstStyle/>
+          <a:p>
+            <a:pPr indent="0" marL="0">
+              <a:buNone/>
+            </a:pPr>
+            <a:r>
+              <a:rPr lang="en-US" sz="1800" i="1" dirty="0">
+                <a:solidFill>
+                  <a:srgbClr val="6E6E70"/>
                 </a:solidFill>
                 <a:latin typeface="Calibri" pitchFamily="34" charset="0"/>
                 <a:ea typeface="Calibri" pitchFamily="34" charset="-122"/>
                 <a:cs typeface="Calibri" pitchFamily="34" charset="-120"/>
               </a:rPr>
-              <a:t>scientific research</a:t>
-            </a:r>
-            <a:endParaRPr lang="en-US" sz="1500" dirty="0"/>
-          </a:p>
-        </p:txBody>
-      </p:sp>
-      <p:sp>
-        <p:nvSpPr>
-          <p:cNvPr id="16" name="Text 14"/>
-          <p:cNvSpPr/>
-          <p:nvPr/>
-        </p:nvSpPr>
-        <p:spPr>
-          <a:xfrm>
-            <a:off x="640080" y="5257800"/>
-            <a:ext cx="10972800" cy="457200"/>
-          </a:xfrm>
-          <a:prstGeom prst="rect">
-            <a:avLst/>
-          </a:prstGeom>
-          <a:noFill/>
-          <a:ln/>
-        </p:spPr>
-        <p:txBody>
-          <a:bodyPr wrap="square" lIns="0" tIns="0" rIns="0" bIns="0" rtlCol="0" anchor="ctr"/>
-          <a:lstStyle/>
-          <a:p>
-            <a:pPr indent="0" marL="0">
-              <a:buNone/>
-            </a:pPr>
-            <a:r>
-              <a:rPr lang="en-US" sz="1800" i="1" dirty="0">
-                <a:solidFill>
-                  <a:srgbClr val="6E6E70"/>
-                </a:solidFill>
-                <a:latin typeface="Calibri" pitchFamily="34" charset="0"/>
-                <a:ea typeface="Calibri" pitchFamily="34" charset="-122"/>
-                <a:cs typeface="Calibri" pitchFamily="34" charset="-120"/>
-              </a:rPr>
-              <a:t>Your laptop has maybe 4 to 10 cores. Frontera has almost half a million.</a:t>
+              <a:t>Your laptop has roughly 4 to 10 cores. One Frontera node has 56, and there are 8,368 nodes.</a:t>
             </a:r>
             <a:endParaRPr lang="en-US" sz="1800" dirty="0"/>
           </a:p>
@@ -3044,7 +3027,7 @@
                 <a:ea typeface="Arial" pitchFamily="34" charset="-122"/>
                 <a:cs typeface="Arial" pitchFamily="34" charset="-120"/>
               </a:rPr>
-              <a:t>Predicting hurricanes</a:t>
+              <a:t>Hurricanes and weather</a:t>
             </a:r>
             <a:endParaRPr lang="en-US" sz="2000" dirty="0"/>
           </a:p>
@@ -3083,7 +3066,7 @@
                 <a:ea typeface="Calibri" pitchFamily="34" charset="-122"/>
                 <a:cs typeface="Calibri" pitchFamily="34" charset="-120"/>
               </a:rPr>
-              <a:t>Storm-surge and forecast models that help coastal cities decide when to evacuate.</a:t>
+              <a:t>Storm-surge and weather models that simulate how hurricanes form and move.</a:t>
             </a:r>
             <a:endParaRPr lang="en-US" sz="1500" dirty="0"/>
           </a:p>

--- a/slides/pfx-hpc-slides.pptx
+++ b/slides/pfx-hpc-slides.pptx
@@ -775,7 +775,7 @@
           <a:p>
             <a:r>
               <a:rPr lang="en-US" dirty="0"/>
-              <a:t>Stick to the specs. The comparison to their own laptop is what makes the scale land, not a ranking.</a:t>
+              <a:t>Stick to the specs, and lead with scale: one node, thousands of nodes, 250 reserved for this room. No laptop comparison.</a:t>
             </a:r>
             <a:endParaRPr lang="en-US" dirty="0"/>
           </a:p>
@@ -2775,7 +2775,7 @@
                 <a:ea typeface="Calibri" pitchFamily="34" charset="-122"/>
                 <a:cs typeface="Calibri" pitchFamily="34" charset="-120"/>
               </a:rPr>
-              <a:t>Your laptop has roughly 4 to 10 cores. One Frontera node has 56, and there are 8,368 nodes.</a:t>
+              <a:t>One node has 56 cores. Frontera has 8,368 of them, and 250 are reserved just for this workshop.</a:t>
             </a:r>
             <a:endParaRPr lang="en-US" sz="1800" dirty="0"/>
           </a:p>

--- a/slides/pfx-hpc-slides.pptx
+++ b/slides/pfx-hpc-slides.pptx
@@ -1745,8 +1745,8 @@
         </p:nvSpPr>
         <p:spPr>
           <a:xfrm>
-            <a:off x="640080" y="2103120"/>
-            <a:ext cx="10515600" cy="2377440"/>
+            <a:off x="640080" y="1508760"/>
+            <a:ext cx="10972800" cy="3108960"/>
           </a:xfrm>
           <a:prstGeom prst="rect">
             <a:avLst/>
@@ -1760,12 +1760,12 @@
           <a:p>
             <a:pPr indent="0" marL="0">
               <a:lnSpc>
-                <a:spcPts val="6200"/>
+                <a:spcPts val="4600"/>
               </a:lnSpc>
               <a:buNone/>
             </a:pPr>
             <a:r>
-              <a:rPr lang="en-US" sz="6000" b="1" dirty="0">
+              <a:rPr lang="en-US" sz="4000" b="1" dirty="0">
                 <a:solidFill>
                   <a:srgbClr val="FFFFFF"/>
                 </a:solidFill>
@@ -1773,19 +1773,19 @@
                 <a:ea typeface="Arial" pitchFamily="34" charset="-122"/>
                 <a:cs typeface="Arial" pitchFamily="34" charset="-120"/>
               </a:rPr>
-              <a:t>Intro to Python</a:t>
-            </a:r>
-            <a:endParaRPr lang="en-US" sz="6000" dirty="0"/>
+              <a:t>Unlocking What's Possible</a:t>
+            </a:r>
+            <a:endParaRPr lang="en-US" sz="4000" dirty="0"/>
           </a:p>
           <a:p>
             <a:pPr indent="0" marL="0">
               <a:lnSpc>
-                <a:spcPts val="6200"/>
+                <a:spcPts val="4600"/>
               </a:lnSpc>
               <a:buNone/>
             </a:pPr>
             <a:r>
-              <a:rPr lang="en-US" sz="6000" b="1" dirty="0">
+              <a:rPr lang="en-US" sz="4000" b="1" dirty="0">
                 <a:solidFill>
                   <a:srgbClr val="FFFFFF"/>
                 </a:solidFill>
@@ -1793,9 +1793,29 @@
                 <a:ea typeface="Arial" pitchFamily="34" charset="-122"/>
                 <a:cs typeface="Arial" pitchFamily="34" charset="-120"/>
               </a:rPr>
-              <a:t>&amp; Supercomputing</a:t>
-            </a:r>
-            <a:endParaRPr lang="en-US" sz="6000" dirty="0"/>
+              <a:t>Through Data &amp;</a:t>
+            </a:r>
+            <a:endParaRPr lang="en-US" sz="4000" dirty="0"/>
+          </a:p>
+          <a:p>
+            <a:pPr indent="0" marL="0">
+              <a:lnSpc>
+                <a:spcPts val="4600"/>
+              </a:lnSpc>
+              <a:buNone/>
+            </a:pPr>
+            <a:r>
+              <a:rPr lang="en-US" sz="4000" b="1" dirty="0">
+                <a:solidFill>
+                  <a:srgbClr val="FFFFFF"/>
+                </a:solidFill>
+                <a:latin typeface="Arial" pitchFamily="34" charset="0"/>
+                <a:ea typeface="Arial" pitchFamily="34" charset="-122"/>
+                <a:cs typeface="Arial" pitchFamily="34" charset="-120"/>
+              </a:rPr>
+              <a:t>High-Performance Computing</a:t>
+            </a:r>
+            <a:endParaRPr lang="en-US" sz="4000" dirty="0"/>
           </a:p>
         </p:txBody>
       </p:sp>
@@ -1807,8 +1827,8 @@
         </p:nvSpPr>
         <p:spPr>
           <a:xfrm>
-            <a:off x="640080" y="4526280"/>
-            <a:ext cx="9601200" cy="548640"/>
+            <a:off x="640080" y="4800600"/>
+            <a:ext cx="10058400" cy="548640"/>
           </a:xfrm>
           <a:prstGeom prst="rect">
             <a:avLst/>
@@ -1832,7 +1852,7 @@
                 <a:ea typeface="Calibri" pitchFamily="34" charset="-122"/>
                 <a:cs typeface="Calibri" pitchFamily="34" charset="-120"/>
               </a:rPr>
-              <a:t>Writing real code that runs on Frontera, a research supercomputer at TACC.</a:t>
+              <a:t>A hands-on hour writing Python on Frontera, a research supercomputer at TACC.</a:t>
             </a:r>
             <a:endParaRPr lang="en-US" sz="2000" dirty="0"/>
           </a:p>

--- a/slides/pfx-hpc-slides.pptx
+++ b/slides/pfx-hpc-slides.pptx
@@ -15,9 +15,12 @@
     <p:sldId id="263" r:id="rId9"/>
     <p:sldId id="264" r:id="rId10"/>
     <p:sldId id="265" r:id="rId11"/>
+    <p:sldId id="266" r:id="rId12"/>
+    <p:sldId id="267" r:id="rId13"/>
+    <p:sldId id="268" r:id="rId14"/>
   </p:sldIdLst>
   <p:notesMasterIdLst>
-    <p:notesMasterId r:id="rId12"/>
+    <p:notesMasterId r:id="rId15"/>
   </p:notesMasterIdLst>
   <p:sldSz cx="12191695" cy="6858000"/>
   <p:notesSz cx="6858000" cy="12191695"/>
@@ -599,7 +602,7 @@
           <a:p>
             <a:r>
               <a:rPr lang="en-US" dirty="0"/>
-              <a:t>Land the belonging message, then switch to the browser and open TAP together. This is the transition into the notebook.</a:t>
+              <a:t>Set expectations. It's fast-paced and hands-on. Reassure: you'll do it together, cell by cell.</a:t>
             </a:r>
             <a:endParaRPr lang="en-US" dirty="0"/>
           </a:p>
@@ -623,6 +626,270 @@
             <a:fld id="{F7021451-1387-4CA6-816F-3879F97B5CBC}" type="slidenum">
               <a:rPr lang="en-US"/>
               <a:t>10</a:t>
+            </a:fld>
+            <a:endParaRPr lang="en-US"/>
+          </a:p>
+        </p:txBody>
+      </p:sp>
+    </p:spTree>
+    <p:extLst>
+      <p:ext uri="{BB962C8B-B14F-4D97-AF65-F5344CB8AC3E}">
+        <p14:creationId xmlns:p14="http://schemas.microsoft.com/office/powerpoint/2010/main" val="1024086991"/>
+      </p:ext>
+    </p:extLst>
+  </p:cSld>
+  <p:clrMapOvr>
+    <a:masterClrMapping/>
+  </p:clrMapOvr>
+</p:notes>
+</file>
+
+<file path=ppt/notesSlides/notesSlide11.xml><?xml version="1.0" encoding="utf-8"?>
+<p:notes xmlns:a="http://schemas.openxmlformats.org/drawingml/2006/main" xmlns:r="http://schemas.openxmlformats.org/officeDocument/2006/relationships" xmlns:p="http://schemas.openxmlformats.org/presentationml/2006/main">
+  <p:cSld>
+    <p:spTree>
+      <p:nvGrpSpPr>
+        <p:cNvPr id="1" name=""/>
+        <p:cNvGrpSpPr/>
+        <p:nvPr/>
+      </p:nvGrpSpPr>
+      <p:grpSpPr>
+        <a:xfrm>
+          <a:off x="0" y="0"/>
+          <a:ext cx="0" cy="0"/>
+          <a:chOff x="0" y="0"/>
+          <a:chExt cx="0" cy="0"/>
+        </a:xfrm>
+      </p:grpSpPr>
+      <p:sp>
+        <p:nvSpPr>
+          <p:cNvPr id="2" name="Slide Image Placeholder 1"/>
+          <p:cNvSpPr>
+            <a:spLocks noGrp="1" noRot="1" noChangeAspect="1"/>
+          </p:cNvSpPr>
+          <p:nvPr>
+            <p:ph type="sldImg"/>
+          </p:nvPr>
+        </p:nvSpPr>
+        <p:spPr/>
+      </p:sp>
+      <p:sp>
+        <p:nvSpPr>
+          <p:cNvPr id="3" name="Notes Placeholder 2"/>
+          <p:cNvSpPr>
+            <a:spLocks noGrp="1"/>
+          </p:cNvSpPr>
+          <p:nvPr>
+            <p:ph type="body" idx="1"/>
+          </p:nvPr>
+        </p:nvSpPr>
+        <p:spPr/>
+        <p:txBody>
+          <a:bodyPr/>
+          <a:lstStyle/>
+          <a:p>
+            <a:r>
+              <a:rPr lang="en-US" dirty="0"/>
+              <a:t>This sets up the reveal in the notebook's first cell (hostname). Tell them to watch for it.</a:t>
+            </a:r>
+            <a:endParaRPr lang="en-US" dirty="0"/>
+          </a:p>
+        </p:txBody>
+      </p:sp>
+      <p:sp>
+        <p:nvSpPr>
+          <p:cNvPr id="4" name="Slide Number Placeholder 3"/>
+          <p:cNvSpPr>
+            <a:spLocks noGrp="1"/>
+          </p:cNvSpPr>
+          <p:nvPr>
+            <p:ph type="sldNum" sz="quarter" idx="10"/>
+          </p:nvPr>
+        </p:nvSpPr>
+        <p:spPr/>
+        <p:txBody>
+          <a:bodyPr/>
+          <a:lstStyle/>
+          <a:p>
+            <a:fld id="{F7021451-1387-4CA6-816F-3879F97B5CBC}" type="slidenum">
+              <a:rPr lang="en-US"/>
+              <a:t>11</a:t>
+            </a:fld>
+            <a:endParaRPr lang="en-US"/>
+          </a:p>
+        </p:txBody>
+      </p:sp>
+    </p:spTree>
+    <p:extLst>
+      <p:ext uri="{BB962C8B-B14F-4D97-AF65-F5344CB8AC3E}">
+        <p14:creationId xmlns:p14="http://schemas.microsoft.com/office/powerpoint/2010/main" val="1024086991"/>
+      </p:ext>
+    </p:extLst>
+  </p:cSld>
+  <p:clrMapOvr>
+    <a:masterClrMapping/>
+  </p:clrMapOvr>
+</p:notes>
+</file>
+
+<file path=ppt/notesSlides/notesSlide12.xml><?xml version="1.0" encoding="utf-8"?>
+<p:notes xmlns:a="http://schemas.openxmlformats.org/drawingml/2006/main" xmlns:r="http://schemas.openxmlformats.org/officeDocument/2006/relationships" xmlns:p="http://schemas.openxmlformats.org/presentationml/2006/main">
+  <p:cSld>
+    <p:spTree>
+      <p:nvGrpSpPr>
+        <p:cNvPr id="1" name=""/>
+        <p:cNvGrpSpPr/>
+        <p:nvPr/>
+      </p:nvGrpSpPr>
+      <p:grpSpPr>
+        <a:xfrm>
+          <a:off x="0" y="0"/>
+          <a:ext cx="0" cy="0"/>
+          <a:chOff x="0" y="0"/>
+          <a:chExt cx="0" cy="0"/>
+        </a:xfrm>
+      </p:grpSpPr>
+      <p:sp>
+        <p:nvSpPr>
+          <p:cNvPr id="2" name="Slide Image Placeholder 1"/>
+          <p:cNvSpPr>
+            <a:spLocks noGrp="1" noRot="1" noChangeAspect="1"/>
+          </p:cNvSpPr>
+          <p:nvPr>
+            <p:ph type="sldImg"/>
+          </p:nvPr>
+        </p:nvSpPr>
+        <p:spPr/>
+      </p:sp>
+      <p:sp>
+        <p:nvSpPr>
+          <p:cNvPr id="3" name="Notes Placeholder 2"/>
+          <p:cNvSpPr>
+            <a:spLocks noGrp="1"/>
+          </p:cNvSpPr>
+          <p:nvPr>
+            <p:ph type="body" idx="1"/>
+          </p:nvPr>
+        </p:nvSpPr>
+        <p:spPr/>
+        <p:txBody>
+          <a:bodyPr/>
+          <a:lstStyle/>
+          <a:p>
+            <a:r>
+              <a:rPr lang="en-US" dirty="0"/>
+              <a:t>Lower the stakes. The biggest blocker for beginners is fear of breaking something. Say explicitly: you can't.</a:t>
+            </a:r>
+            <a:endParaRPr lang="en-US" dirty="0"/>
+          </a:p>
+        </p:txBody>
+      </p:sp>
+      <p:sp>
+        <p:nvSpPr>
+          <p:cNvPr id="4" name="Slide Number Placeholder 3"/>
+          <p:cNvSpPr>
+            <a:spLocks noGrp="1"/>
+          </p:cNvSpPr>
+          <p:nvPr>
+            <p:ph type="sldNum" sz="quarter" idx="10"/>
+          </p:nvPr>
+        </p:nvSpPr>
+        <p:spPr/>
+        <p:txBody>
+          <a:bodyPr/>
+          <a:lstStyle/>
+          <a:p>
+            <a:fld id="{F7021451-1387-4CA6-816F-3879F97B5CBC}" type="slidenum">
+              <a:rPr lang="en-US"/>
+              <a:t>12</a:t>
+            </a:fld>
+            <a:endParaRPr lang="en-US"/>
+          </a:p>
+        </p:txBody>
+      </p:sp>
+    </p:spTree>
+    <p:extLst>
+      <p:ext uri="{BB962C8B-B14F-4D97-AF65-F5344CB8AC3E}">
+        <p14:creationId xmlns:p14="http://schemas.microsoft.com/office/powerpoint/2010/main" val="1024086991"/>
+      </p:ext>
+    </p:extLst>
+  </p:cSld>
+  <p:clrMapOvr>
+    <a:masterClrMapping/>
+  </p:clrMapOvr>
+</p:notes>
+</file>
+
+<file path=ppt/notesSlides/notesSlide13.xml><?xml version="1.0" encoding="utf-8"?>
+<p:notes xmlns:a="http://schemas.openxmlformats.org/drawingml/2006/main" xmlns:r="http://schemas.openxmlformats.org/officeDocument/2006/relationships" xmlns:p="http://schemas.openxmlformats.org/presentationml/2006/main">
+  <p:cSld>
+    <p:spTree>
+      <p:nvGrpSpPr>
+        <p:cNvPr id="1" name=""/>
+        <p:cNvGrpSpPr/>
+        <p:nvPr/>
+      </p:nvGrpSpPr>
+      <p:grpSpPr>
+        <a:xfrm>
+          <a:off x="0" y="0"/>
+          <a:ext cx="0" cy="0"/>
+          <a:chOff x="0" y="0"/>
+          <a:chExt cx="0" cy="0"/>
+        </a:xfrm>
+      </p:grpSpPr>
+      <p:sp>
+        <p:nvSpPr>
+          <p:cNvPr id="2" name="Slide Image Placeholder 1"/>
+          <p:cNvSpPr>
+            <a:spLocks noGrp="1" noRot="1" noChangeAspect="1"/>
+          </p:cNvSpPr>
+          <p:nvPr>
+            <p:ph type="sldImg"/>
+          </p:nvPr>
+        </p:nvSpPr>
+        <p:spPr/>
+      </p:sp>
+      <p:sp>
+        <p:nvSpPr>
+          <p:cNvPr id="3" name="Notes Placeholder 2"/>
+          <p:cNvSpPr>
+            <a:spLocks noGrp="1"/>
+          </p:cNvSpPr>
+          <p:nvPr>
+            <p:ph type="body" idx="1"/>
+          </p:nvPr>
+        </p:nvSpPr>
+        <p:spPr/>
+        <p:txBody>
+          <a:bodyPr/>
+          <a:lstStyle/>
+          <a:p>
+            <a:r>
+              <a:rPr lang="en-US" dirty="0"/>
+              <a:t>Land the belonging message, then switch to the browser and open TAP together. This is the transition into the notebook.</a:t>
+            </a:r>
+            <a:endParaRPr lang="en-US" dirty="0"/>
+          </a:p>
+        </p:txBody>
+      </p:sp>
+      <p:sp>
+        <p:nvSpPr>
+          <p:cNvPr id="4" name="Slide Number Placeholder 3"/>
+          <p:cNvSpPr>
+            <a:spLocks noGrp="1"/>
+          </p:cNvSpPr>
+          <p:nvPr>
+            <p:ph type="sldNum" sz="quarter" idx="10"/>
+          </p:nvPr>
+        </p:nvSpPr>
+        <p:spPr/>
+        <p:txBody>
+          <a:bodyPr/>
+          <a:lstStyle/>
+          <a:p>
+            <a:fld id="{F7021451-1387-4CA6-816F-3879F97B5CBC}" type="slidenum">
+              <a:rPr lang="en-US"/>
+              <a:t>13</a:t>
             </a:fld>
             <a:endParaRPr lang="en-US"/>
           </a:p>
@@ -863,7 +1130,7 @@
           <a:p>
             <a:r>
               <a:rPr lang="en-US" dirty="0"/>
-              <a:t>Pick the one or two examples that will excite this particular room. These are all documented real uses of Frontera.</a:t>
+              <a:t>Anchor the three words before the demo. Point at each box: a core is one worker, a node packs 56 of them, the cluster is thousands of nodes.</a:t>
             </a:r>
             <a:endParaRPr lang="en-US" dirty="0"/>
           </a:p>
@@ -951,7 +1218,7 @@
           <a:p>
             <a:r>
               <a:rPr lang="en-US" dirty="0"/>
-              <a:t>This is the concept the notebook's parallel demo pays off. Keep it to one sentence: many cores, at the same time.</a:t>
+              <a:t>Analogy for the rule: the login node is like the waiting room at the doctor's office. Everyone passes through it. Imagine the doctor tried to treat everyone right there in the waiting room at once, no privacy, everything crammed together, nothing done well. That's what running heavy computation on the login node does to everyone sharing it. For real work you go to a private room: a compute node.</a:t>
             </a:r>
             <a:endParaRPr lang="en-US" dirty="0"/>
           </a:p>
@@ -1039,7 +1306,7 @@
           <a:p>
             <a:r>
               <a:rPr lang="en-US" dirty="0"/>
-              <a:t>End on the code line: that's the first thing they'll actually run. Say it out loud as a promise, not a warning.</a:t>
+              <a:t>This is the slide that answers the email questions. A job is just a request handed to the scheduler; the queue is the waiting line. Tie it to what they did: TAP submitted a job for them, and the reservation skipped the line.</a:t>
             </a:r>
             <a:endParaRPr lang="en-US" dirty="0"/>
           </a:p>
@@ -1127,7 +1394,7 @@
           <a:p>
             <a:r>
               <a:rPr lang="en-US" dirty="0"/>
-              <a:t>Set expectations. It's fast-paced and hands-on. Reassure: you'll do it together, cell by cell.</a:t>
+              <a:t>Pick the one or two examples that will excite this particular room. These are all documented real uses of Frontera.</a:t>
             </a:r>
             <a:endParaRPr lang="en-US" dirty="0"/>
           </a:p>
@@ -1215,7 +1482,7 @@
           <a:p>
             <a:r>
               <a:rPr lang="en-US" dirty="0"/>
-              <a:t>This sets up the reveal in the notebook's first cell (hostname). Tell them to watch for it.</a:t>
+              <a:t>This is the concept the notebook's parallel demo pays off. Keep it to one sentence: many cores, at the same time.</a:t>
             </a:r>
             <a:endParaRPr lang="en-US" dirty="0"/>
           </a:p>
@@ -1303,7 +1570,7 @@
           <a:p>
             <a:r>
               <a:rPr lang="en-US" dirty="0"/>
-              <a:t>Lower the stakes. The biggest blocker for beginners is fear of breaking something. Say explicitly: you can't.</a:t>
+              <a:t>End on the code line: that's the first thing they'll actually run. Say it out loud as a promise, not a warning.</a:t>
             </a:r>
             <a:endParaRPr lang="en-US" dirty="0"/>
           </a:p>
@@ -1911,6 +2178,1414 @@
     <p:bg>
       <p:bgPr>
         <a:solidFill>
+          <a:srgbClr val="FFFFFF"/>
+        </a:solidFill>
+      </p:bgPr>
+    </p:bg>
+    <p:spTree>
+      <p:nvGrpSpPr>
+        <p:cNvPr id="1" name=""/>
+        <p:cNvGrpSpPr/>
+        <p:nvPr/>
+      </p:nvGrpSpPr>
+      <p:grpSpPr>
+        <a:xfrm>
+          <a:off x="0" y="0"/>
+          <a:ext cx="0" cy="0"/>
+          <a:chOff x="0" y="0"/>
+          <a:chExt cx="0" cy="0"/>
+        </a:xfrm>
+      </p:grpSpPr>
+      <p:sp>
+        <p:nvSpPr>
+          <p:cNvPr id="2" name="Text 0"/>
+          <p:cNvSpPr/>
+          <p:nvPr/>
+        </p:nvSpPr>
+        <p:spPr>
+          <a:xfrm>
+            <a:off x="640080" y="548640"/>
+            <a:ext cx="5486400" cy="320040"/>
+          </a:xfrm>
+          <a:prstGeom prst="rect">
+            <a:avLst/>
+          </a:prstGeom>
+          <a:noFill/>
+          <a:ln/>
+        </p:spPr>
+        <p:txBody>
+          <a:bodyPr wrap="square" lIns="0" tIns="0" rIns="0" bIns="0" rtlCol="0" anchor="ctr"/>
+          <a:lstStyle/>
+          <a:p>
+            <a:pPr algn="l" indent="0" marL="0">
+              <a:buNone/>
+            </a:pPr>
+            <a:r>
+              <a:rPr lang="en-US" sz="1300" b="1" spc="300" kern="0" dirty="0">
+                <a:solidFill>
+                  <a:srgbClr val="C1A231"/>
+                </a:solidFill>
+                <a:latin typeface="Arial" pitchFamily="34" charset="0"/>
+                <a:ea typeface="Arial" pitchFamily="34" charset="-122"/>
+                <a:cs typeface="Arial" pitchFamily="34" charset="-120"/>
+              </a:rPr>
+              <a:t>THE NEXT HOUR</a:t>
+            </a:r>
+            <a:endParaRPr lang="en-US" sz="1300" dirty="0"/>
+          </a:p>
+        </p:txBody>
+      </p:sp>
+      <p:sp>
+        <p:nvSpPr>
+          <p:cNvPr id="3" name="Text 1"/>
+          <p:cNvSpPr/>
+          <p:nvPr/>
+        </p:nvSpPr>
+        <p:spPr>
+          <a:xfrm>
+            <a:off x="640080" y="868680"/>
+            <a:ext cx="10972800" cy="822960"/>
+          </a:xfrm>
+          <a:prstGeom prst="rect">
+            <a:avLst/>
+          </a:prstGeom>
+          <a:noFill/>
+          <a:ln/>
+        </p:spPr>
+        <p:txBody>
+          <a:bodyPr wrap="square" lIns="0" tIns="0" rIns="0" bIns="0" rtlCol="0" anchor="ctr"/>
+          <a:lstStyle/>
+          <a:p>
+            <a:pPr indent="0" marL="0">
+              <a:buNone/>
+            </a:pPr>
+            <a:r>
+              <a:rPr lang="en-US" sz="3200" b="1" dirty="0">
+                <a:solidFill>
+                  <a:srgbClr val="840028"/>
+                </a:solidFill>
+                <a:latin typeface="Arial" pitchFamily="34" charset="0"/>
+                <a:ea typeface="Arial" pitchFamily="34" charset="-122"/>
+                <a:cs typeface="Arial" pitchFamily="34" charset="-120"/>
+              </a:rPr>
+              <a:t>What you'll do today</a:t>
+            </a:r>
+            <a:endParaRPr lang="en-US" sz="3200" dirty="0"/>
+          </a:p>
+        </p:txBody>
+      </p:sp>
+      <p:sp>
+        <p:nvSpPr>
+          <p:cNvPr id="4" name="Shape 2"/>
+          <p:cNvSpPr/>
+          <p:nvPr/>
+        </p:nvSpPr>
+        <p:spPr>
+          <a:xfrm>
+            <a:off x="640080" y="2286000"/>
+            <a:ext cx="640080" cy="640080"/>
+          </a:xfrm>
+          <a:prstGeom prst="ellipse">
+            <a:avLst/>
+          </a:prstGeom>
+          <a:solidFill>
+            <a:srgbClr val="C1A231"/>
+          </a:solidFill>
+          <a:ln w="12700">
+            <a:solidFill>
+              <a:srgbClr val="C1A231"/>
+            </a:solidFill>
+            <a:prstDash val="solid"/>
+          </a:ln>
+        </p:spPr>
+      </p:sp>
+      <p:sp>
+        <p:nvSpPr>
+          <p:cNvPr id="5" name="Text 3"/>
+          <p:cNvSpPr/>
+          <p:nvPr/>
+        </p:nvSpPr>
+        <p:spPr>
+          <a:xfrm>
+            <a:off x="640080" y="2286000"/>
+            <a:ext cx="640080" cy="640080"/>
+          </a:xfrm>
+          <a:prstGeom prst="rect">
+            <a:avLst/>
+          </a:prstGeom>
+          <a:noFill/>
+          <a:ln/>
+        </p:spPr>
+        <p:txBody>
+          <a:bodyPr wrap="square" lIns="0" tIns="0" rIns="0" bIns="0" rtlCol="0" anchor="ctr"/>
+          <a:lstStyle/>
+          <a:p>
+            <a:pPr algn="ctr" indent="0" marL="0">
+              <a:buNone/>
+            </a:pPr>
+            <a:r>
+              <a:rPr lang="en-US" sz="2600" b="1" dirty="0">
+                <a:solidFill>
+                  <a:srgbClr val="840028"/>
+                </a:solidFill>
+                <a:latin typeface="Arial" pitchFamily="34" charset="0"/>
+                <a:ea typeface="Arial" pitchFamily="34" charset="-122"/>
+                <a:cs typeface="Arial" pitchFamily="34" charset="-120"/>
+              </a:rPr>
+              <a:t>1</a:t>
+            </a:r>
+            <a:endParaRPr lang="en-US" sz="2600" dirty="0"/>
+          </a:p>
+        </p:txBody>
+      </p:sp>
+      <p:sp>
+        <p:nvSpPr>
+          <p:cNvPr id="6" name="Text 4"/>
+          <p:cNvSpPr/>
+          <p:nvPr/>
+        </p:nvSpPr>
+        <p:spPr>
+          <a:xfrm>
+            <a:off x="1554480" y="2267712"/>
+            <a:ext cx="4754880" cy="640080"/>
+          </a:xfrm>
+          <a:prstGeom prst="rect">
+            <a:avLst/>
+          </a:prstGeom>
+          <a:noFill/>
+          <a:ln/>
+        </p:spPr>
+        <p:txBody>
+          <a:bodyPr wrap="square" lIns="0" tIns="0" rIns="0" bIns="0" rtlCol="0" anchor="ctr"/>
+          <a:lstStyle/>
+          <a:p>
+            <a:pPr indent="0" marL="0">
+              <a:buNone/>
+            </a:pPr>
+            <a:r>
+              <a:rPr lang="en-US" sz="2100" b="1" dirty="0">
+                <a:solidFill>
+                  <a:srgbClr val="1A1A1A"/>
+                </a:solidFill>
+                <a:latin typeface="Arial" pitchFamily="34" charset="0"/>
+                <a:ea typeface="Arial" pitchFamily="34" charset="-122"/>
+                <a:cs typeface="Arial" pitchFamily="34" charset="-120"/>
+              </a:rPr>
+              <a:t>Prove where you are</a:t>
+            </a:r>
+            <a:endParaRPr lang="en-US" sz="2100" dirty="0"/>
+          </a:p>
+        </p:txBody>
+      </p:sp>
+      <p:sp>
+        <p:nvSpPr>
+          <p:cNvPr id="7" name="Text 5"/>
+          <p:cNvSpPr/>
+          <p:nvPr/>
+        </p:nvSpPr>
+        <p:spPr>
+          <a:xfrm>
+            <a:off x="6675120" y="2286000"/>
+            <a:ext cx="4846320" cy="640080"/>
+          </a:xfrm>
+          <a:prstGeom prst="rect">
+            <a:avLst/>
+          </a:prstGeom>
+          <a:noFill/>
+          <a:ln/>
+        </p:spPr>
+        <p:txBody>
+          <a:bodyPr wrap="square" lIns="0" tIns="0" rIns="0" bIns="0" rtlCol="0" anchor="ctr"/>
+          <a:lstStyle/>
+          <a:p>
+            <a:pPr indent="0" marL="0">
+              <a:buNone/>
+            </a:pPr>
+            <a:r>
+              <a:rPr lang="en-US" sz="1600" dirty="0">
+                <a:solidFill>
+                  <a:srgbClr val="6E6E70"/>
+                </a:solidFill>
+                <a:latin typeface="Calibri" pitchFamily="34" charset="0"/>
+                <a:ea typeface="Calibri" pitchFamily="34" charset="-122"/>
+                <a:cs typeface="Calibri" pitchFamily="34" charset="-120"/>
+              </a:rPr>
+              <a:t>Run a line of code and see the supercomputer answer back.</a:t>
+            </a:r>
+            <a:endParaRPr lang="en-US" sz="1600" dirty="0"/>
+          </a:p>
+        </p:txBody>
+      </p:sp>
+      <p:sp>
+        <p:nvSpPr>
+          <p:cNvPr id="8" name="Shape 6"/>
+          <p:cNvSpPr/>
+          <p:nvPr/>
+        </p:nvSpPr>
+        <p:spPr>
+          <a:xfrm>
+            <a:off x="640080" y="3337560"/>
+            <a:ext cx="640080" cy="640080"/>
+          </a:xfrm>
+          <a:prstGeom prst="ellipse">
+            <a:avLst/>
+          </a:prstGeom>
+          <a:solidFill>
+            <a:srgbClr val="C1A231"/>
+          </a:solidFill>
+          <a:ln w="12700">
+            <a:solidFill>
+              <a:srgbClr val="C1A231"/>
+            </a:solidFill>
+            <a:prstDash val="solid"/>
+          </a:ln>
+        </p:spPr>
+      </p:sp>
+      <p:sp>
+        <p:nvSpPr>
+          <p:cNvPr id="9" name="Text 7"/>
+          <p:cNvSpPr/>
+          <p:nvPr/>
+        </p:nvSpPr>
+        <p:spPr>
+          <a:xfrm>
+            <a:off x="640080" y="3337560"/>
+            <a:ext cx="640080" cy="640080"/>
+          </a:xfrm>
+          <a:prstGeom prst="rect">
+            <a:avLst/>
+          </a:prstGeom>
+          <a:noFill/>
+          <a:ln/>
+        </p:spPr>
+        <p:txBody>
+          <a:bodyPr wrap="square" lIns="0" tIns="0" rIns="0" bIns="0" rtlCol="0" anchor="ctr"/>
+          <a:lstStyle/>
+          <a:p>
+            <a:pPr algn="ctr" indent="0" marL="0">
+              <a:buNone/>
+            </a:pPr>
+            <a:r>
+              <a:rPr lang="en-US" sz="2600" b="1" dirty="0">
+                <a:solidFill>
+                  <a:srgbClr val="840028"/>
+                </a:solidFill>
+                <a:latin typeface="Arial" pitchFamily="34" charset="0"/>
+                <a:ea typeface="Arial" pitchFamily="34" charset="-122"/>
+                <a:cs typeface="Arial" pitchFamily="34" charset="-120"/>
+              </a:rPr>
+              <a:t>2</a:t>
+            </a:r>
+            <a:endParaRPr lang="en-US" sz="2600" dirty="0"/>
+          </a:p>
+        </p:txBody>
+      </p:sp>
+      <p:sp>
+        <p:nvSpPr>
+          <p:cNvPr id="10" name="Text 8"/>
+          <p:cNvSpPr/>
+          <p:nvPr/>
+        </p:nvSpPr>
+        <p:spPr>
+          <a:xfrm>
+            <a:off x="1554480" y="3319272"/>
+            <a:ext cx="4754880" cy="640080"/>
+          </a:xfrm>
+          <a:prstGeom prst="rect">
+            <a:avLst/>
+          </a:prstGeom>
+          <a:noFill/>
+          <a:ln/>
+        </p:spPr>
+        <p:txBody>
+          <a:bodyPr wrap="square" lIns="0" tIns="0" rIns="0" bIns="0" rtlCol="0" anchor="ctr"/>
+          <a:lstStyle/>
+          <a:p>
+            <a:pPr indent="0" marL="0">
+              <a:buNone/>
+            </a:pPr>
+            <a:r>
+              <a:rPr lang="en-US" sz="2100" b="1" dirty="0">
+                <a:solidFill>
+                  <a:srgbClr val="1A1A1A"/>
+                </a:solidFill>
+                <a:latin typeface="Arial" pitchFamily="34" charset="0"/>
+                <a:ea typeface="Arial" pitchFamily="34" charset="-122"/>
+                <a:cs typeface="Arial" pitchFamily="34" charset="-120"/>
+              </a:rPr>
+              <a:t>Learn core Python</a:t>
+            </a:r>
+            <a:endParaRPr lang="en-US" sz="2100" dirty="0"/>
+          </a:p>
+        </p:txBody>
+      </p:sp>
+      <p:sp>
+        <p:nvSpPr>
+          <p:cNvPr id="11" name="Text 9"/>
+          <p:cNvSpPr/>
+          <p:nvPr/>
+        </p:nvSpPr>
+        <p:spPr>
+          <a:xfrm>
+            <a:off x="6675120" y="3337560"/>
+            <a:ext cx="4846320" cy="640080"/>
+          </a:xfrm>
+          <a:prstGeom prst="rect">
+            <a:avLst/>
+          </a:prstGeom>
+          <a:noFill/>
+          <a:ln/>
+        </p:spPr>
+        <p:txBody>
+          <a:bodyPr wrap="square" lIns="0" tIns="0" rIns="0" bIns="0" rtlCol="0" anchor="ctr"/>
+          <a:lstStyle/>
+          <a:p>
+            <a:pPr indent="0" marL="0">
+              <a:buNone/>
+            </a:pPr>
+            <a:r>
+              <a:rPr lang="en-US" sz="1600" dirty="0">
+                <a:solidFill>
+                  <a:srgbClr val="6E6E70"/>
+                </a:solidFill>
+                <a:latin typeface="Calibri" pitchFamily="34" charset="0"/>
+                <a:ea typeface="Calibri" pitchFamily="34" charset="-122"/>
+                <a:cs typeface="Calibri" pitchFamily="34" charset="-120"/>
+              </a:rPr>
+              <a:t>Variables, math, text, lists, loops, decisions, and functions.</a:t>
+            </a:r>
+            <a:endParaRPr lang="en-US" sz="1600" dirty="0"/>
+          </a:p>
+        </p:txBody>
+      </p:sp>
+      <p:sp>
+        <p:nvSpPr>
+          <p:cNvPr id="12" name="Shape 10"/>
+          <p:cNvSpPr/>
+          <p:nvPr/>
+        </p:nvSpPr>
+        <p:spPr>
+          <a:xfrm>
+            <a:off x="640080" y="4389120"/>
+            <a:ext cx="640080" cy="640080"/>
+          </a:xfrm>
+          <a:prstGeom prst="ellipse">
+            <a:avLst/>
+          </a:prstGeom>
+          <a:solidFill>
+            <a:srgbClr val="C1A231"/>
+          </a:solidFill>
+          <a:ln w="12700">
+            <a:solidFill>
+              <a:srgbClr val="C1A231"/>
+            </a:solidFill>
+            <a:prstDash val="solid"/>
+          </a:ln>
+        </p:spPr>
+      </p:sp>
+      <p:sp>
+        <p:nvSpPr>
+          <p:cNvPr id="13" name="Text 11"/>
+          <p:cNvSpPr/>
+          <p:nvPr/>
+        </p:nvSpPr>
+        <p:spPr>
+          <a:xfrm>
+            <a:off x="640080" y="4389120"/>
+            <a:ext cx="640080" cy="640080"/>
+          </a:xfrm>
+          <a:prstGeom prst="rect">
+            <a:avLst/>
+          </a:prstGeom>
+          <a:noFill/>
+          <a:ln/>
+        </p:spPr>
+        <p:txBody>
+          <a:bodyPr wrap="square" lIns="0" tIns="0" rIns="0" bIns="0" rtlCol="0" anchor="ctr"/>
+          <a:lstStyle/>
+          <a:p>
+            <a:pPr algn="ctr" indent="0" marL="0">
+              <a:buNone/>
+            </a:pPr>
+            <a:r>
+              <a:rPr lang="en-US" sz="2600" b="1" dirty="0">
+                <a:solidFill>
+                  <a:srgbClr val="840028"/>
+                </a:solidFill>
+                <a:latin typeface="Arial" pitchFamily="34" charset="0"/>
+                <a:ea typeface="Arial" pitchFamily="34" charset="-122"/>
+                <a:cs typeface="Arial" pitchFamily="34" charset="-120"/>
+              </a:rPr>
+              <a:t>3</a:t>
+            </a:r>
+            <a:endParaRPr lang="en-US" sz="2600" dirty="0"/>
+          </a:p>
+        </p:txBody>
+      </p:sp>
+      <p:sp>
+        <p:nvSpPr>
+          <p:cNvPr id="14" name="Text 12"/>
+          <p:cNvSpPr/>
+          <p:nvPr/>
+        </p:nvSpPr>
+        <p:spPr>
+          <a:xfrm>
+            <a:off x="1554480" y="4370832"/>
+            <a:ext cx="4754880" cy="640080"/>
+          </a:xfrm>
+          <a:prstGeom prst="rect">
+            <a:avLst/>
+          </a:prstGeom>
+          <a:noFill/>
+          <a:ln/>
+        </p:spPr>
+        <p:txBody>
+          <a:bodyPr wrap="square" lIns="0" tIns="0" rIns="0" bIns="0" rtlCol="0" anchor="ctr"/>
+          <a:lstStyle/>
+          <a:p>
+            <a:pPr indent="0" marL="0">
+              <a:buNone/>
+            </a:pPr>
+            <a:r>
+              <a:rPr lang="en-US" sz="2100" b="1" dirty="0">
+                <a:solidFill>
+                  <a:srgbClr val="1A1A1A"/>
+                </a:solidFill>
+                <a:latin typeface="Arial" pitchFamily="34" charset="0"/>
+                <a:ea typeface="Arial" pitchFamily="34" charset="-122"/>
+                <a:cs typeface="Arial" pitchFamily="34" charset="-120"/>
+              </a:rPr>
+              <a:t>Use many cores at once</a:t>
+            </a:r>
+            <a:endParaRPr lang="en-US" sz="2100" dirty="0"/>
+          </a:p>
+        </p:txBody>
+      </p:sp>
+      <p:sp>
+        <p:nvSpPr>
+          <p:cNvPr id="15" name="Text 13"/>
+          <p:cNvSpPr/>
+          <p:nvPr/>
+        </p:nvSpPr>
+        <p:spPr>
+          <a:xfrm>
+            <a:off x="6675120" y="4389120"/>
+            <a:ext cx="4846320" cy="640080"/>
+          </a:xfrm>
+          <a:prstGeom prst="rect">
+            <a:avLst/>
+          </a:prstGeom>
+          <a:noFill/>
+          <a:ln/>
+        </p:spPr>
+        <p:txBody>
+          <a:bodyPr wrap="square" lIns="0" tIns="0" rIns="0" bIns="0" rtlCol="0" anchor="ctr"/>
+          <a:lstStyle/>
+          <a:p>
+            <a:pPr indent="0" marL="0">
+              <a:buNone/>
+            </a:pPr>
+            <a:r>
+              <a:rPr lang="en-US" sz="1600" dirty="0">
+                <a:solidFill>
+                  <a:srgbClr val="6E6E70"/>
+                </a:solidFill>
+                <a:latin typeface="Calibri" pitchFamily="34" charset="0"/>
+                <a:ea typeface="Calibri" pitchFamily="34" charset="-122"/>
+                <a:cs typeface="Calibri" pitchFamily="34" charset="-120"/>
+              </a:rPr>
+              <a:t>Run a task the slow way, then the fast way, and time the difference.</a:t>
+            </a:r>
+            <a:endParaRPr lang="en-US" sz="1600" dirty="0"/>
+          </a:p>
+        </p:txBody>
+      </p:sp>
+      <p:sp>
+        <p:nvSpPr>
+          <p:cNvPr id="16" name="Shape 14"/>
+          <p:cNvSpPr/>
+          <p:nvPr/>
+        </p:nvSpPr>
+        <p:spPr>
+          <a:xfrm>
+            <a:off x="640080" y="5440680"/>
+            <a:ext cx="640080" cy="640080"/>
+          </a:xfrm>
+          <a:prstGeom prst="ellipse">
+            <a:avLst/>
+          </a:prstGeom>
+          <a:solidFill>
+            <a:srgbClr val="C1A231"/>
+          </a:solidFill>
+          <a:ln w="12700">
+            <a:solidFill>
+              <a:srgbClr val="C1A231"/>
+            </a:solidFill>
+            <a:prstDash val="solid"/>
+          </a:ln>
+        </p:spPr>
+      </p:sp>
+      <p:sp>
+        <p:nvSpPr>
+          <p:cNvPr id="17" name="Text 15"/>
+          <p:cNvSpPr/>
+          <p:nvPr/>
+        </p:nvSpPr>
+        <p:spPr>
+          <a:xfrm>
+            <a:off x="640080" y="5440680"/>
+            <a:ext cx="640080" cy="640080"/>
+          </a:xfrm>
+          <a:prstGeom prst="rect">
+            <a:avLst/>
+          </a:prstGeom>
+          <a:noFill/>
+          <a:ln/>
+        </p:spPr>
+        <p:txBody>
+          <a:bodyPr wrap="square" lIns="0" tIns="0" rIns="0" bIns="0" rtlCol="0" anchor="ctr"/>
+          <a:lstStyle/>
+          <a:p>
+            <a:pPr algn="ctr" indent="0" marL="0">
+              <a:buNone/>
+            </a:pPr>
+            <a:r>
+              <a:rPr lang="en-US" sz="2600" b="1" dirty="0">
+                <a:solidFill>
+                  <a:srgbClr val="840028"/>
+                </a:solidFill>
+                <a:latin typeface="Arial" pitchFamily="34" charset="0"/>
+                <a:ea typeface="Arial" pitchFamily="34" charset="-122"/>
+                <a:cs typeface="Arial" pitchFamily="34" charset="-120"/>
+              </a:rPr>
+              <a:t>4</a:t>
+            </a:r>
+            <a:endParaRPr lang="en-US" sz="2600" dirty="0"/>
+          </a:p>
+        </p:txBody>
+      </p:sp>
+      <p:sp>
+        <p:nvSpPr>
+          <p:cNvPr id="18" name="Text 16"/>
+          <p:cNvSpPr/>
+          <p:nvPr/>
+        </p:nvSpPr>
+        <p:spPr>
+          <a:xfrm>
+            <a:off x="1554480" y="5422392"/>
+            <a:ext cx="4754880" cy="640080"/>
+          </a:xfrm>
+          <a:prstGeom prst="rect">
+            <a:avLst/>
+          </a:prstGeom>
+          <a:noFill/>
+          <a:ln/>
+        </p:spPr>
+        <p:txBody>
+          <a:bodyPr wrap="square" lIns="0" tIns="0" rIns="0" bIns="0" rtlCol="0" anchor="ctr"/>
+          <a:lstStyle/>
+          <a:p>
+            <a:pPr indent="0" marL="0">
+              <a:buNone/>
+            </a:pPr>
+            <a:r>
+              <a:rPr lang="en-US" sz="2100" b="1" dirty="0">
+                <a:solidFill>
+                  <a:srgbClr val="1A1A1A"/>
+                </a:solidFill>
+                <a:latin typeface="Arial" pitchFamily="34" charset="0"/>
+                <a:ea typeface="Arial" pitchFamily="34" charset="-122"/>
+                <a:cs typeface="Arial" pitchFamily="34" charset="-120"/>
+              </a:rPr>
+              <a:t>Meet the ideas of HPC</a:t>
+            </a:r>
+            <a:endParaRPr lang="en-US" sz="2100" dirty="0"/>
+          </a:p>
+        </p:txBody>
+      </p:sp>
+      <p:sp>
+        <p:nvSpPr>
+          <p:cNvPr id="19" name="Text 17"/>
+          <p:cNvSpPr/>
+          <p:nvPr/>
+        </p:nvSpPr>
+        <p:spPr>
+          <a:xfrm>
+            <a:off x="6675120" y="5440680"/>
+            <a:ext cx="4846320" cy="640080"/>
+          </a:xfrm>
+          <a:prstGeom prst="rect">
+            <a:avLst/>
+          </a:prstGeom>
+          <a:noFill/>
+          <a:ln/>
+        </p:spPr>
+        <p:txBody>
+          <a:bodyPr wrap="square" lIns="0" tIns="0" rIns="0" bIns="0" rtlCol="0" anchor="ctr"/>
+          <a:lstStyle/>
+          <a:p>
+            <a:pPr indent="0" marL="0">
+              <a:buNone/>
+            </a:pPr>
+            <a:r>
+              <a:rPr lang="en-US" sz="1600" dirty="0">
+                <a:solidFill>
+                  <a:srgbClr val="6E6E70"/>
+                </a:solidFill>
+                <a:latin typeface="Calibri" pitchFamily="34" charset="0"/>
+                <a:ea typeface="Calibri" pitchFamily="34" charset="-122"/>
+                <a:cs typeface="Calibri" pitchFamily="34" charset="-120"/>
+              </a:rPr>
+              <a:t>Nodes, files, and how big jobs get scheduled.</a:t>
+            </a:r>
+            <a:endParaRPr lang="en-US" sz="1600" dirty="0"/>
+          </a:p>
+        </p:txBody>
+      </p:sp>
+      <p:sp>
+        <p:nvSpPr>
+          <p:cNvPr id="20" name="Text 18"/>
+          <p:cNvSpPr/>
+          <p:nvPr/>
+        </p:nvSpPr>
+        <p:spPr>
+          <a:xfrm>
+            <a:off x="11185855" y="6217920"/>
+            <a:ext cx="548640" cy="365760"/>
+          </a:xfrm>
+          <a:prstGeom prst="rect">
+            <a:avLst/>
+          </a:prstGeom>
+          <a:noFill/>
+          <a:ln/>
+        </p:spPr>
+        <p:txBody>
+          <a:bodyPr wrap="square" lIns="0" tIns="0" rIns="0" bIns="0" rtlCol="0" anchor="ctr"/>
+          <a:lstStyle/>
+          <a:p>
+            <a:pPr algn="r" indent="0" marL="0">
+              <a:buNone/>
+            </a:pPr>
+            <a:r>
+              <a:rPr lang="en-US" sz="1200" dirty="0">
+                <a:solidFill>
+                  <a:srgbClr val="6E6E70"/>
+                </a:solidFill>
+                <a:latin typeface="Arial" pitchFamily="34" charset="0"/>
+                <a:ea typeface="Arial" pitchFamily="34" charset="-122"/>
+                <a:cs typeface="Arial" pitchFamily="34" charset="-120"/>
+              </a:rPr>
+              <a:t>10</a:t>
+            </a:r>
+            <a:endParaRPr lang="en-US" sz="1200" dirty="0"/>
+          </a:p>
+        </p:txBody>
+      </p:sp>
+    </p:spTree>
+  </p:cSld>
+  <p:clrMapOvr>
+    <a:masterClrMapping/>
+  </p:clrMapOvr>
+</p:sld>
+</file>
+
+<file path=ppt/slides/slide11.xml><?xml version="1.0" encoding="utf-8"?>
+<p:sld xmlns:a="http://schemas.openxmlformats.org/drawingml/2006/main" xmlns:r="http://schemas.openxmlformats.org/officeDocument/2006/relationships" xmlns:p="http://schemas.openxmlformats.org/presentationml/2006/main">
+  <p:cSld name="Slide 11">
+    <p:bg>
+      <p:bgPr>
+        <a:solidFill>
+          <a:srgbClr val="840028"/>
+        </a:solidFill>
+      </p:bgPr>
+    </p:bg>
+    <p:spTree>
+      <p:nvGrpSpPr>
+        <p:cNvPr id="1" name=""/>
+        <p:cNvGrpSpPr/>
+        <p:nvPr/>
+      </p:nvGrpSpPr>
+      <p:grpSpPr>
+        <a:xfrm>
+          <a:off x="0" y="0"/>
+          <a:ext cx="0" cy="0"/>
+          <a:chOff x="0" y="0"/>
+          <a:chExt cx="0" cy="0"/>
+        </a:xfrm>
+      </p:grpSpPr>
+      <p:sp>
+        <p:nvSpPr>
+          <p:cNvPr id="2" name="Text 0"/>
+          <p:cNvSpPr/>
+          <p:nvPr/>
+        </p:nvSpPr>
+        <p:spPr>
+          <a:xfrm>
+            <a:off x="640080" y="548640"/>
+            <a:ext cx="5486400" cy="320040"/>
+          </a:xfrm>
+          <a:prstGeom prst="rect">
+            <a:avLst/>
+          </a:prstGeom>
+          <a:noFill/>
+          <a:ln/>
+        </p:spPr>
+        <p:txBody>
+          <a:bodyPr wrap="square" lIns="0" tIns="0" rIns="0" bIns="0" rtlCol="0" anchor="ctr"/>
+          <a:lstStyle/>
+          <a:p>
+            <a:pPr algn="l" indent="0" marL="0">
+              <a:buNone/>
+            </a:pPr>
+            <a:r>
+              <a:rPr lang="en-US" sz="1300" b="1" spc="300" kern="0" dirty="0">
+                <a:solidFill>
+                  <a:srgbClr val="C1A231"/>
+                </a:solidFill>
+                <a:latin typeface="Arial" pitchFamily="34" charset="0"/>
+                <a:ea typeface="Arial" pitchFamily="34" charset="-122"/>
+                <a:cs typeface="Arial" pitchFamily="34" charset="-120"/>
+              </a:rPr>
+              <a:t>HOW THIS WORKS</a:t>
+            </a:r>
+            <a:endParaRPr lang="en-US" sz="1300" dirty="0"/>
+          </a:p>
+        </p:txBody>
+      </p:sp>
+      <p:sp>
+        <p:nvSpPr>
+          <p:cNvPr id="3" name="Text 1"/>
+          <p:cNvSpPr/>
+          <p:nvPr/>
+        </p:nvSpPr>
+        <p:spPr>
+          <a:xfrm>
+            <a:off x="640080" y="1463040"/>
+            <a:ext cx="10972800" cy="1645920"/>
+          </a:xfrm>
+          <a:prstGeom prst="rect">
+            <a:avLst/>
+          </a:prstGeom>
+          <a:noFill/>
+          <a:ln/>
+        </p:spPr>
+        <p:txBody>
+          <a:bodyPr wrap="square" lIns="0" tIns="0" rIns="0" bIns="0" rtlCol="0" anchor="ctr"/>
+          <a:lstStyle/>
+          <a:p>
+            <a:pPr indent="0" marL="0">
+              <a:lnSpc>
+                <a:spcPts val="4600"/>
+              </a:lnSpc>
+              <a:buNone/>
+            </a:pPr>
+            <a:r>
+              <a:rPr lang="en-US" sz="4000" b="1" dirty="0">
+                <a:solidFill>
+                  <a:srgbClr val="FFFFFF"/>
+                </a:solidFill>
+                <a:latin typeface="Arial" pitchFamily="34" charset="0"/>
+                <a:ea typeface="Arial" pitchFamily="34" charset="-122"/>
+                <a:cs typeface="Arial" pitchFamily="34" charset="-120"/>
+              </a:rPr>
+              <a:t>You won't watch a demo.</a:t>
+            </a:r>
+            <a:endParaRPr lang="en-US" sz="4000" dirty="0"/>
+          </a:p>
+          <a:p>
+            <a:pPr indent="0" marL="0">
+              <a:lnSpc>
+                <a:spcPts val="4600"/>
+              </a:lnSpc>
+              <a:buNone/>
+            </a:pPr>
+            <a:r>
+              <a:rPr lang="en-US" sz="4000" b="1" dirty="0">
+                <a:solidFill>
+                  <a:srgbClr val="FFFFFF"/>
+                </a:solidFill>
+                <a:latin typeface="Arial" pitchFamily="34" charset="0"/>
+                <a:ea typeface="Arial" pitchFamily="34" charset="-122"/>
+                <a:cs typeface="Arial" pitchFamily="34" charset="-120"/>
+              </a:rPr>
+              <a:t>You'll be on the machine.</a:t>
+            </a:r>
+            <a:endParaRPr lang="en-US" sz="4000" dirty="0"/>
+          </a:p>
+        </p:txBody>
+      </p:sp>
+      <p:sp>
+        <p:nvSpPr>
+          <p:cNvPr id="4" name="Text 2"/>
+          <p:cNvSpPr/>
+          <p:nvPr/>
+        </p:nvSpPr>
+        <p:spPr>
+          <a:xfrm>
+            <a:off x="640080" y="3383280"/>
+            <a:ext cx="10515600" cy="1005840"/>
+          </a:xfrm>
+          <a:prstGeom prst="rect">
+            <a:avLst/>
+          </a:prstGeom>
+          <a:noFill/>
+          <a:ln/>
+        </p:spPr>
+        <p:txBody>
+          <a:bodyPr wrap="square" lIns="0" tIns="0" rIns="0" bIns="0" rtlCol="0" anchor="ctr"/>
+          <a:lstStyle/>
+          <a:p>
+            <a:pPr indent="0" marL="0">
+              <a:buNone/>
+            </a:pPr>
+            <a:r>
+              <a:rPr lang="en-US" sz="2000" dirty="0">
+                <a:solidFill>
+                  <a:srgbClr val="F0E4E8"/>
+                </a:solidFill>
+                <a:latin typeface="Calibri" pitchFamily="34" charset="0"/>
+                <a:ea typeface="Calibri" pitchFamily="34" charset="-122"/>
+                <a:cs typeface="Calibri" pitchFamily="34" charset="-120"/>
+              </a:rPr>
+              <a:t>We use the TACC Analysis Portal (TAP) to open a Jupyter notebook</a:t>
+            </a:r>
+            <a:endParaRPr lang="en-US" sz="2000" dirty="0"/>
+          </a:p>
+          <a:p>
+            <a:pPr indent="0" marL="0">
+              <a:buNone/>
+            </a:pPr>
+            <a:r>
+              <a:rPr lang="en-US" sz="2000" dirty="0">
+                <a:solidFill>
+                  <a:srgbClr val="F0E4E8"/>
+                </a:solidFill>
+                <a:latin typeface="Calibri" pitchFamily="34" charset="0"/>
+                <a:ea typeface="Calibri" pitchFamily="34" charset="-122"/>
+                <a:cs typeface="Calibri" pitchFamily="34" charset="-120"/>
+              </a:rPr>
+              <a:t>directly on a Frontera compute node, right in your web browser.</a:t>
+            </a:r>
+            <a:endParaRPr lang="en-US" sz="2000" dirty="0"/>
+          </a:p>
+        </p:txBody>
+      </p:sp>
+      <p:sp>
+        <p:nvSpPr>
+          <p:cNvPr id="5" name="Shape 3"/>
+          <p:cNvSpPr/>
+          <p:nvPr/>
+        </p:nvSpPr>
+        <p:spPr>
+          <a:xfrm>
+            <a:off x="640080" y="4663440"/>
+            <a:ext cx="10881360" cy="1280160"/>
+          </a:xfrm>
+          <a:prstGeom prst="rect">
+            <a:avLst/>
+          </a:prstGeom>
+          <a:solidFill>
+            <a:srgbClr val="5A001C"/>
+          </a:solidFill>
+          <a:ln w="19050">
+            <a:solidFill>
+              <a:srgbClr val="C1A231"/>
+            </a:solidFill>
+            <a:prstDash val="solid"/>
+          </a:ln>
+        </p:spPr>
+      </p:sp>
+      <p:sp>
+        <p:nvSpPr>
+          <p:cNvPr id="6" name="Text 4"/>
+          <p:cNvSpPr/>
+          <p:nvPr/>
+        </p:nvSpPr>
+        <p:spPr>
+          <a:xfrm>
+            <a:off x="960120" y="4800600"/>
+            <a:ext cx="10241280" cy="1005840"/>
+          </a:xfrm>
+          <a:prstGeom prst="rect">
+            <a:avLst/>
+          </a:prstGeom>
+          <a:noFill/>
+          <a:ln/>
+        </p:spPr>
+        <p:txBody>
+          <a:bodyPr wrap="square" lIns="0" tIns="0" rIns="0" bIns="0" rtlCol="0" anchor="ctr"/>
+          <a:lstStyle/>
+          <a:p>
+            <a:pPr indent="0" marL="0">
+              <a:buNone/>
+            </a:pPr>
+            <a:r>
+              <a:rPr lang="en-US" sz="1800" i="1" dirty="0">
+                <a:solidFill>
+                  <a:srgbClr val="C1A231"/>
+                </a:solidFill>
+                <a:latin typeface="Calibri" pitchFamily="34" charset="0"/>
+                <a:ea typeface="Calibri" pitchFamily="34" charset="-122"/>
+                <a:cs typeface="Calibri" pitchFamily="34" charset="-120"/>
+              </a:rPr>
+              <a:t>The notebook that opens is a real job running on Frontera. When it prints the computer's name, that machine is physically in Austin, Texas, and you're using it.</a:t>
+            </a:r>
+            <a:endParaRPr lang="en-US" sz="1800" dirty="0"/>
+          </a:p>
+        </p:txBody>
+      </p:sp>
+      <p:sp>
+        <p:nvSpPr>
+          <p:cNvPr id="7" name="Text 5"/>
+          <p:cNvSpPr/>
+          <p:nvPr/>
+        </p:nvSpPr>
+        <p:spPr>
+          <a:xfrm>
+            <a:off x="11185855" y="6217920"/>
+            <a:ext cx="548640" cy="365760"/>
+          </a:xfrm>
+          <a:prstGeom prst="rect">
+            <a:avLst/>
+          </a:prstGeom>
+          <a:noFill/>
+          <a:ln/>
+        </p:spPr>
+        <p:txBody>
+          <a:bodyPr wrap="square" lIns="0" tIns="0" rIns="0" bIns="0" rtlCol="0" anchor="ctr"/>
+          <a:lstStyle/>
+          <a:p>
+            <a:pPr algn="r" indent="0" marL="0">
+              <a:buNone/>
+            </a:pPr>
+            <a:r>
+              <a:rPr lang="en-US" sz="1200" dirty="0">
+                <a:solidFill>
+                  <a:srgbClr val="6E6E70"/>
+                </a:solidFill>
+                <a:latin typeface="Arial" pitchFamily="34" charset="0"/>
+                <a:ea typeface="Arial" pitchFamily="34" charset="-122"/>
+                <a:cs typeface="Arial" pitchFamily="34" charset="-120"/>
+              </a:rPr>
+              <a:t>11</a:t>
+            </a:r>
+            <a:endParaRPr lang="en-US" sz="1200" dirty="0"/>
+          </a:p>
+        </p:txBody>
+      </p:sp>
+    </p:spTree>
+  </p:cSld>
+  <p:clrMapOvr>
+    <a:masterClrMapping/>
+  </p:clrMapOvr>
+</p:sld>
+</file>
+
+<file path=ppt/slides/slide12.xml><?xml version="1.0" encoding="utf-8"?>
+<p:sld xmlns:a="http://schemas.openxmlformats.org/drawingml/2006/main" xmlns:r="http://schemas.openxmlformats.org/officeDocument/2006/relationships" xmlns:p="http://schemas.openxmlformats.org/presentationml/2006/main">
+  <p:cSld name="Slide 12">
+    <p:bg>
+      <p:bgPr>
+        <a:solidFill>
+          <a:srgbClr val="FFFFFF"/>
+        </a:solidFill>
+      </p:bgPr>
+    </p:bg>
+    <p:spTree>
+      <p:nvGrpSpPr>
+        <p:cNvPr id="1" name=""/>
+        <p:cNvGrpSpPr/>
+        <p:nvPr/>
+      </p:nvGrpSpPr>
+      <p:grpSpPr>
+        <a:xfrm>
+          <a:off x="0" y="0"/>
+          <a:ext cx="0" cy="0"/>
+          <a:chOff x="0" y="0"/>
+          <a:chExt cx="0" cy="0"/>
+        </a:xfrm>
+      </p:grpSpPr>
+      <p:sp>
+        <p:nvSpPr>
+          <p:cNvPr id="2" name="Text 0"/>
+          <p:cNvSpPr/>
+          <p:nvPr/>
+        </p:nvSpPr>
+        <p:spPr>
+          <a:xfrm>
+            <a:off x="640080" y="548640"/>
+            <a:ext cx="5486400" cy="320040"/>
+          </a:xfrm>
+          <a:prstGeom prst="rect">
+            <a:avLst/>
+          </a:prstGeom>
+          <a:noFill/>
+          <a:ln/>
+        </p:spPr>
+        <p:txBody>
+          <a:bodyPr wrap="square" lIns="0" tIns="0" rIns="0" bIns="0" rtlCol="0" anchor="ctr"/>
+          <a:lstStyle/>
+          <a:p>
+            <a:pPr algn="l" indent="0" marL="0">
+              <a:buNone/>
+            </a:pPr>
+            <a:r>
+              <a:rPr lang="en-US" sz="1300" b="1" spc="300" kern="0" dirty="0">
+                <a:solidFill>
+                  <a:srgbClr val="C1A231"/>
+                </a:solidFill>
+                <a:latin typeface="Arial" pitchFamily="34" charset="0"/>
+                <a:ea typeface="Arial" pitchFamily="34" charset="-122"/>
+                <a:cs typeface="Arial" pitchFamily="34" charset="-120"/>
+              </a:rPr>
+              <a:t>GROUND RULES</a:t>
+            </a:r>
+            <a:endParaRPr lang="en-US" sz="1300" dirty="0"/>
+          </a:p>
+        </p:txBody>
+      </p:sp>
+      <p:sp>
+        <p:nvSpPr>
+          <p:cNvPr id="3" name="Text 1"/>
+          <p:cNvSpPr/>
+          <p:nvPr/>
+        </p:nvSpPr>
+        <p:spPr>
+          <a:xfrm>
+            <a:off x="640080" y="868680"/>
+            <a:ext cx="10972800" cy="822960"/>
+          </a:xfrm>
+          <a:prstGeom prst="rect">
+            <a:avLst/>
+          </a:prstGeom>
+          <a:noFill/>
+          <a:ln/>
+        </p:spPr>
+        <p:txBody>
+          <a:bodyPr wrap="square" lIns="0" tIns="0" rIns="0" bIns="0" rtlCol="0" anchor="ctr"/>
+          <a:lstStyle/>
+          <a:p>
+            <a:pPr indent="0" marL="0">
+              <a:buNone/>
+            </a:pPr>
+            <a:r>
+              <a:rPr lang="en-US" sz="3200" b="1" dirty="0">
+                <a:solidFill>
+                  <a:srgbClr val="840028"/>
+                </a:solidFill>
+                <a:latin typeface="Arial" pitchFamily="34" charset="0"/>
+                <a:ea typeface="Arial" pitchFamily="34" charset="-122"/>
+                <a:cs typeface="Arial" pitchFamily="34" charset="-120"/>
+              </a:rPr>
+              <a:t>Running the notebook</a:t>
+            </a:r>
+            <a:endParaRPr lang="en-US" sz="3200" dirty="0"/>
+          </a:p>
+        </p:txBody>
+      </p:sp>
+      <p:sp>
+        <p:nvSpPr>
+          <p:cNvPr id="4" name="Shape 2"/>
+          <p:cNvSpPr/>
+          <p:nvPr/>
+        </p:nvSpPr>
+        <p:spPr>
+          <a:xfrm>
+            <a:off x="640080" y="2286000"/>
+            <a:ext cx="4754880" cy="1463040"/>
+          </a:xfrm>
+          <a:prstGeom prst="roundRect">
+            <a:avLst>
+              <a:gd name="adj" fmla="val 7500"/>
+            </a:avLst>
+          </a:prstGeom>
+          <a:solidFill>
+            <a:srgbClr val="EFEDEA"/>
+          </a:solidFill>
+          <a:ln w="19050">
+            <a:solidFill>
+              <a:srgbClr val="840028"/>
+            </a:solidFill>
+            <a:prstDash val="solid"/>
+          </a:ln>
+        </p:spPr>
+      </p:sp>
+      <p:sp>
+        <p:nvSpPr>
+          <p:cNvPr id="5" name="Text 3"/>
+          <p:cNvSpPr/>
+          <p:nvPr/>
+        </p:nvSpPr>
+        <p:spPr>
+          <a:xfrm>
+            <a:off x="640080" y="2286000"/>
+            <a:ext cx="4754880" cy="1463040"/>
+          </a:xfrm>
+          <a:prstGeom prst="rect">
+            <a:avLst/>
+          </a:prstGeom>
+          <a:noFill/>
+          <a:ln/>
+        </p:spPr>
+        <p:txBody>
+          <a:bodyPr wrap="square" lIns="0" tIns="0" rIns="0" bIns="0" rtlCol="0" anchor="ctr"/>
+          <a:lstStyle/>
+          <a:p>
+            <a:pPr algn="ctr" indent="0" marL="0">
+              <a:buNone/>
+            </a:pPr>
+            <a:r>
+              <a:rPr lang="en-US" sz="3400" b="1" dirty="0">
+                <a:solidFill>
+                  <a:srgbClr val="840028"/>
+                </a:solidFill>
+                <a:latin typeface="Arial" pitchFamily="34" charset="0"/>
+                <a:ea typeface="Arial" pitchFamily="34" charset="-122"/>
+                <a:cs typeface="Arial" pitchFamily="34" charset="-120"/>
+              </a:rPr>
+              <a:t>Shift + Enter</a:t>
+            </a:r>
+            <a:endParaRPr lang="en-US" sz="3400" dirty="0"/>
+          </a:p>
+        </p:txBody>
+      </p:sp>
+      <p:sp>
+        <p:nvSpPr>
+          <p:cNvPr id="6" name="Text 4"/>
+          <p:cNvSpPr/>
+          <p:nvPr/>
+        </p:nvSpPr>
+        <p:spPr>
+          <a:xfrm>
+            <a:off x="640080" y="3840480"/>
+            <a:ext cx="4754880" cy="457200"/>
+          </a:xfrm>
+          <a:prstGeom prst="rect">
+            <a:avLst/>
+          </a:prstGeom>
+          <a:noFill/>
+          <a:ln/>
+        </p:spPr>
+        <p:txBody>
+          <a:bodyPr wrap="square" lIns="0" tIns="0" rIns="0" bIns="0" rtlCol="0" anchor="ctr"/>
+          <a:lstStyle/>
+          <a:p>
+            <a:pPr algn="ctr" indent="0" marL="0">
+              <a:buNone/>
+            </a:pPr>
+            <a:r>
+              <a:rPr lang="en-US" sz="1600" dirty="0">
+                <a:solidFill>
+                  <a:srgbClr val="6E6E70"/>
+                </a:solidFill>
+                <a:latin typeface="Calibri" pitchFamily="34" charset="0"/>
+                <a:ea typeface="Calibri" pitchFamily="34" charset="-122"/>
+                <a:cs typeface="Calibri" pitchFamily="34" charset="-120"/>
+              </a:rPr>
+              <a:t>runs the cell you're in</a:t>
+            </a:r>
+            <a:endParaRPr lang="en-US" sz="1600" dirty="0"/>
+          </a:p>
+        </p:txBody>
+      </p:sp>
+      <p:sp>
+        <p:nvSpPr>
+          <p:cNvPr id="7" name="Text 5"/>
+          <p:cNvSpPr/>
+          <p:nvPr/>
+        </p:nvSpPr>
+        <p:spPr>
+          <a:xfrm>
+            <a:off x="5852160" y="2286000"/>
+            <a:ext cx="5669280" cy="2377440"/>
+          </a:xfrm>
+          <a:prstGeom prst="rect">
+            <a:avLst/>
+          </a:prstGeom>
+          <a:noFill/>
+          <a:ln/>
+        </p:spPr>
+        <p:txBody>
+          <a:bodyPr wrap="square" lIns="0" tIns="0" rIns="0" bIns="0" rtlCol="0" anchor="ctr"/>
+          <a:lstStyle/>
+          <a:p>
+            <a:pPr marL="342900" indent="-342900">
+              <a:spcAft>
+                <a:spcPts val="1000"/>
+              </a:spcAft>
+              <a:buSzPct val="100000"/>
+              <a:buChar char="•"/>
+            </a:pPr>
+            <a:r>
+              <a:rPr lang="en-US" sz="1800" dirty="0">
+                <a:solidFill>
+                  <a:srgbClr val="1A1A1A"/>
+                </a:solidFill>
+                <a:latin typeface="Calibri" pitchFamily="34" charset="0"/>
+                <a:ea typeface="Calibri" pitchFamily="34" charset="-122"/>
+                <a:cs typeface="Calibri" pitchFamily="34" charset="-120"/>
+              </a:rPr>
+              <a:t>Run the cells in order, top to bottom.</a:t>
+            </a:r>
+            <a:endParaRPr lang="en-US" sz="1800" dirty="0"/>
+          </a:p>
+          <a:p>
+            <a:pPr marL="342900" indent="-342900">
+              <a:spcAft>
+                <a:spcPts val="1000"/>
+              </a:spcAft>
+              <a:buSzPct val="100000"/>
+              <a:buChar char="•"/>
+            </a:pPr>
+            <a:r>
+              <a:rPr lang="en-US" sz="1800" dirty="0">
+                <a:solidFill>
+                  <a:srgbClr val="1A1A1A"/>
+                </a:solidFill>
+                <a:latin typeface="Calibri" pitchFamily="34" charset="0"/>
+                <a:ea typeface="Calibri" pitchFamily="34" charset="-122"/>
+                <a:cs typeface="Calibri" pitchFamily="34" charset="-120"/>
+              </a:rPr>
+              <a:t>Change the values. Make them yours.</a:t>
+            </a:r>
+            <a:endParaRPr lang="en-US" sz="1800" dirty="0"/>
+          </a:p>
+          <a:p>
+            <a:pPr marL="342900" indent="-342900">
+              <a:spcAft>
+                <a:spcPts val="1000"/>
+              </a:spcAft>
+              <a:buSzPct val="100000"/>
+              <a:buChar char="•"/>
+            </a:pPr>
+            <a:r>
+              <a:rPr lang="en-US" sz="1800" dirty="0">
+                <a:solidFill>
+                  <a:srgbClr val="1A1A1A"/>
+                </a:solidFill>
+                <a:latin typeface="Calibri" pitchFamily="34" charset="0"/>
+                <a:ea typeface="Calibri" pitchFamily="34" charset="-122"/>
+                <a:cs typeface="Calibri" pitchFamily="34" charset="-120"/>
+              </a:rPr>
+              <a:t>If something breaks, just re-run it. Nothing you do can harm the computer.</a:t>
+            </a:r>
+            <a:endParaRPr lang="en-US" sz="1800" dirty="0"/>
+          </a:p>
+          <a:p>
+            <a:pPr marL="342900" indent="-342900">
+              <a:spcAft>
+                <a:spcPts val="1000"/>
+              </a:spcAft>
+              <a:buSzPct val="100000"/>
+              <a:buChar char="•"/>
+            </a:pPr>
+            <a:r>
+              <a:rPr lang="en-US" sz="1800" dirty="0">
+                <a:solidFill>
+                  <a:srgbClr val="1A1A1A"/>
+                </a:solidFill>
+                <a:latin typeface="Calibri" pitchFamily="34" charset="0"/>
+                <a:ea typeface="Calibri" pitchFamily="34" charset="-122"/>
+                <a:cs typeface="Calibri" pitchFamily="34" charset="-120"/>
+              </a:rPr>
+              <a:t>Ask questions the moment you're stuck.</a:t>
+            </a:r>
+            <a:endParaRPr lang="en-US" sz="1800" dirty="0"/>
+          </a:p>
+        </p:txBody>
+      </p:sp>
+      <p:sp>
+        <p:nvSpPr>
+          <p:cNvPr id="8" name="Text 6"/>
+          <p:cNvSpPr/>
+          <p:nvPr/>
+        </p:nvSpPr>
+        <p:spPr>
+          <a:xfrm>
+            <a:off x="640080" y="5120640"/>
+            <a:ext cx="10972800" cy="548640"/>
+          </a:xfrm>
+          <a:prstGeom prst="rect">
+            <a:avLst/>
+          </a:prstGeom>
+          <a:noFill/>
+          <a:ln/>
+        </p:spPr>
+        <p:txBody>
+          <a:bodyPr wrap="square" lIns="0" tIns="0" rIns="0" bIns="0" rtlCol="0" anchor="ctr"/>
+          <a:lstStyle/>
+          <a:p>
+            <a:pPr indent="0" marL="0">
+              <a:buNone/>
+            </a:pPr>
+            <a:r>
+              <a:rPr lang="en-US" sz="1800" i="1" dirty="0">
+                <a:solidFill>
+                  <a:srgbClr val="840028"/>
+                </a:solidFill>
+                <a:latin typeface="Calibri" pitchFamily="34" charset="0"/>
+                <a:ea typeface="Calibri" pitchFamily="34" charset="-122"/>
+                <a:cs typeface="Calibri" pitchFamily="34" charset="-120"/>
+              </a:rPr>
+              <a:t>Breaking things and fixing them is how you learn to code.</a:t>
+            </a:r>
+            <a:endParaRPr lang="en-US" sz="1800" dirty="0"/>
+          </a:p>
+        </p:txBody>
+      </p:sp>
+      <p:sp>
+        <p:nvSpPr>
+          <p:cNvPr id="9" name="Text 7"/>
+          <p:cNvSpPr/>
+          <p:nvPr/>
+        </p:nvSpPr>
+        <p:spPr>
+          <a:xfrm>
+            <a:off x="11185855" y="6217920"/>
+            <a:ext cx="548640" cy="365760"/>
+          </a:xfrm>
+          <a:prstGeom prst="rect">
+            <a:avLst/>
+          </a:prstGeom>
+          <a:noFill/>
+          <a:ln/>
+        </p:spPr>
+        <p:txBody>
+          <a:bodyPr wrap="square" lIns="0" tIns="0" rIns="0" bIns="0" rtlCol="0" anchor="ctr"/>
+          <a:lstStyle/>
+          <a:p>
+            <a:pPr algn="r" indent="0" marL="0">
+              <a:buNone/>
+            </a:pPr>
+            <a:r>
+              <a:rPr lang="en-US" sz="1200" dirty="0">
+                <a:solidFill>
+                  <a:srgbClr val="6E6E70"/>
+                </a:solidFill>
+                <a:latin typeface="Arial" pitchFamily="34" charset="0"/>
+                <a:ea typeface="Arial" pitchFamily="34" charset="-122"/>
+                <a:cs typeface="Arial" pitchFamily="34" charset="-120"/>
+              </a:rPr>
+              <a:t>12</a:t>
+            </a:r>
+            <a:endParaRPr lang="en-US" sz="1200" dirty="0"/>
+          </a:p>
+        </p:txBody>
+      </p:sp>
+    </p:spTree>
+  </p:cSld>
+  <p:clrMapOvr>
+    <a:masterClrMapping/>
+  </p:clrMapOvr>
+</p:sld>
+</file>
+
+<file path=ppt/slides/slide13.xml><?xml version="1.0" encoding="utf-8"?>
+<p:sld xmlns:a="http://schemas.openxmlformats.org/drawingml/2006/main" xmlns:r="http://schemas.openxmlformats.org/officeDocument/2006/relationships" xmlns:p="http://schemas.openxmlformats.org/presentationml/2006/main">
+  <p:cSld name="Slide 13">
+    <p:bg>
+      <p:bgPr>
+        <a:solidFill>
           <a:srgbClr val="840028"/>
         </a:solidFill>
       </p:bgPr>
@@ -2905,7 +4580,7 @@
                 <a:ea typeface="Arial" pitchFamily="34" charset="-122"/>
                 <a:cs typeface="Arial" pitchFamily="34" charset="-120"/>
               </a:rPr>
-              <a:t>REAL SCIENCE</a:t>
+              <a:t>THE BASICS</a:t>
             </a:r>
             <a:endParaRPr lang="en-US" sz="1300" dirty="0"/>
           </a:p>
@@ -2944,7 +4619,7 @@
                 <a:ea typeface="Arial" pitchFamily="34" charset="-122"/>
                 <a:cs typeface="Arial" pitchFamily="34" charset="-120"/>
               </a:rPr>
-              <a:t>What researchers actually run on it</a:t>
+              <a:t>The words we'll use</a:t>
             </a:r>
             <a:endParaRPr lang="en-US" sz="3200" dirty="0"/>
           </a:p>
@@ -2958,18 +4633,18 @@
         </p:nvSpPr>
         <p:spPr>
           <a:xfrm>
-            <a:off x="640080" y="2286000"/>
-            <a:ext cx="548640" cy="548640"/>
-          </a:xfrm>
-          <a:prstGeom prst="ellipse">
-            <a:avLst/>
-          </a:prstGeom>
-          <a:solidFill>
-            <a:srgbClr val="840028"/>
-          </a:solidFill>
-          <a:ln w="12700">
-            <a:solidFill>
-              <a:srgbClr val="840028"/>
+            <a:off x="640080" y="2103120"/>
+            <a:ext cx="3429000" cy="3154680"/>
+          </a:xfrm>
+          <a:prstGeom prst="rect">
+            <a:avLst/>
+          </a:prstGeom>
+          <a:solidFill>
+            <a:srgbClr val="EFEDEA"/>
+          </a:solidFill>
+          <a:ln w="12700">
+            <a:solidFill>
+              <a:srgbClr val="EFEDEA"/>
             </a:solidFill>
             <a:prstDash val="solid"/>
           </a:ln>
@@ -2983,8 +4658,8 @@
         </p:nvSpPr>
         <p:spPr>
           <a:xfrm>
-            <a:off x="640080" y="2286000"/>
-            <a:ext cx="548640" cy="548640"/>
+            <a:off x="640080" y="2267712"/>
+            <a:ext cx="3429000" cy="457200"/>
           </a:xfrm>
           <a:prstGeom prst="rect">
             <a:avLst/>
@@ -3000,30 +4675,55 @@
               <a:buNone/>
             </a:pPr>
             <a:r>
-              <a:rPr lang="en-US" sz="2200" b="1" dirty="0">
-                <a:solidFill>
-                  <a:srgbClr val="C1A231"/>
+              <a:rPr lang="en-US" sz="2000" b="1" dirty="0">
+                <a:solidFill>
+                  <a:srgbClr val="840028"/>
                 </a:solidFill>
                 <a:latin typeface="Arial" pitchFamily="34" charset="0"/>
                 <a:ea typeface="Arial" pitchFamily="34" charset="-122"/>
                 <a:cs typeface="Arial" pitchFamily="34" charset="-120"/>
               </a:rPr>
-              <a:t>1</a:t>
-            </a:r>
-            <a:endParaRPr lang="en-US" sz="2200" dirty="0"/>
-          </a:p>
-        </p:txBody>
-      </p:sp>
-      <p:sp>
-        <p:nvSpPr>
-          <p:cNvPr id="6" name="Text 4"/>
-          <p:cNvSpPr/>
-          <p:nvPr/>
-        </p:nvSpPr>
-        <p:spPr>
-          <a:xfrm>
-            <a:off x="1417320" y="2240280"/>
-            <a:ext cx="4572000" cy="457200"/>
+              <a:t>CORE</a:t>
+            </a:r>
+            <a:endParaRPr lang="en-US" sz="2000" dirty="0"/>
+          </a:p>
+        </p:txBody>
+      </p:sp>
+      <p:sp>
+        <p:nvSpPr>
+          <p:cNvPr id="6" name="Shape 4"/>
+          <p:cNvSpPr/>
+          <p:nvPr/>
+        </p:nvSpPr>
+        <p:spPr>
+          <a:xfrm>
+            <a:off x="4572000" y="2103120"/>
+            <a:ext cx="3429000" cy="3154680"/>
+          </a:xfrm>
+          <a:prstGeom prst="rect">
+            <a:avLst/>
+          </a:prstGeom>
+          <a:solidFill>
+            <a:srgbClr val="EFEDEA"/>
+          </a:solidFill>
+          <a:ln w="12700">
+            <a:solidFill>
+              <a:srgbClr val="EFEDEA"/>
+            </a:solidFill>
+            <a:prstDash val="solid"/>
+          </a:ln>
+        </p:spPr>
+      </p:sp>
+      <p:sp>
+        <p:nvSpPr>
+          <p:cNvPr id="7" name="Text 5"/>
+          <p:cNvSpPr/>
+          <p:nvPr/>
+        </p:nvSpPr>
+        <p:spPr>
+          <a:xfrm>
+            <a:off x="4572000" y="2267712"/>
+            <a:ext cx="3429000" cy="457200"/>
           </a:xfrm>
           <a:prstGeom prst="rect">
             <a:avLst/>
@@ -3035,19 +4735,19 @@
           <a:bodyPr wrap="square" lIns="0" tIns="0" rIns="0" bIns="0" rtlCol="0" anchor="ctr"/>
           <a:lstStyle/>
           <a:p>
-            <a:pPr indent="0" marL="0">
+            <a:pPr algn="ctr" indent="0" marL="0">
               <a:buNone/>
             </a:pPr>
             <a:r>
               <a:rPr lang="en-US" sz="2000" b="1" dirty="0">
                 <a:solidFill>
-                  <a:srgbClr val="1A1A1A"/>
+                  <a:srgbClr val="840028"/>
                 </a:solidFill>
                 <a:latin typeface="Arial" pitchFamily="34" charset="0"/>
                 <a:ea typeface="Arial" pitchFamily="34" charset="-122"/>
                 <a:cs typeface="Arial" pitchFamily="34" charset="-120"/>
               </a:rPr>
-              <a:t>Hurricanes and weather</a:t>
+              <a:t>NODE</a:t>
             </a:r>
             <a:endParaRPr lang="en-US" sz="2000" dirty="0"/>
           </a:p>
@@ -3055,14 +4755,1653 @@
       </p:sp>
       <p:sp>
         <p:nvSpPr>
-          <p:cNvPr id="7" name="Text 5"/>
-          <p:cNvSpPr/>
-          <p:nvPr/>
-        </p:nvSpPr>
-        <p:spPr>
-          <a:xfrm>
-            <a:off x="1417320" y="2724912"/>
-            <a:ext cx="4617720" cy="1188720"/>
+          <p:cNvPr id="8" name="Shape 6"/>
+          <p:cNvSpPr/>
+          <p:nvPr/>
+        </p:nvSpPr>
+        <p:spPr>
+          <a:xfrm>
+            <a:off x="8503920" y="2103120"/>
+            <a:ext cx="3429000" cy="3154680"/>
+          </a:xfrm>
+          <a:prstGeom prst="rect">
+            <a:avLst/>
+          </a:prstGeom>
+          <a:solidFill>
+            <a:srgbClr val="EFEDEA"/>
+          </a:solidFill>
+          <a:ln w="12700">
+            <a:solidFill>
+              <a:srgbClr val="EFEDEA"/>
+            </a:solidFill>
+            <a:prstDash val="solid"/>
+          </a:ln>
+        </p:spPr>
+      </p:sp>
+      <p:sp>
+        <p:nvSpPr>
+          <p:cNvPr id="9" name="Text 7"/>
+          <p:cNvSpPr/>
+          <p:nvPr/>
+        </p:nvSpPr>
+        <p:spPr>
+          <a:xfrm>
+            <a:off x="8503920" y="2267712"/>
+            <a:ext cx="3429000" cy="457200"/>
+          </a:xfrm>
+          <a:prstGeom prst="rect">
+            <a:avLst/>
+          </a:prstGeom>
+          <a:noFill/>
+          <a:ln/>
+        </p:spPr>
+        <p:txBody>
+          <a:bodyPr wrap="square" lIns="0" tIns="0" rIns="0" bIns="0" rtlCol="0" anchor="ctr"/>
+          <a:lstStyle/>
+          <a:p>
+            <a:pPr algn="ctr" indent="0" marL="0">
+              <a:buNone/>
+            </a:pPr>
+            <a:r>
+              <a:rPr lang="en-US" sz="2000" b="1" dirty="0">
+                <a:solidFill>
+                  <a:srgbClr val="840028"/>
+                </a:solidFill>
+                <a:latin typeface="Arial" pitchFamily="34" charset="0"/>
+                <a:ea typeface="Arial" pitchFamily="34" charset="-122"/>
+                <a:cs typeface="Arial" pitchFamily="34" charset="-120"/>
+              </a:rPr>
+              <a:t>CLUSTER</a:t>
+            </a:r>
+            <a:endParaRPr lang="en-US" sz="2000" dirty="0"/>
+          </a:p>
+        </p:txBody>
+      </p:sp>
+      <p:sp>
+        <p:nvSpPr>
+          <p:cNvPr id="10" name="Shape 8"/>
+          <p:cNvSpPr/>
+          <p:nvPr/>
+        </p:nvSpPr>
+        <p:spPr>
+          <a:xfrm>
+            <a:off x="2061972" y="2971800"/>
+            <a:ext cx="585216" cy="585216"/>
+          </a:xfrm>
+          <a:prstGeom prst="ellipse">
+            <a:avLst/>
+          </a:prstGeom>
+          <a:solidFill>
+            <a:srgbClr val="840028"/>
+          </a:solidFill>
+          <a:ln w="12700">
+            <a:solidFill>
+              <a:srgbClr val="840028"/>
+            </a:solidFill>
+            <a:prstDash val="solid"/>
+          </a:ln>
+        </p:spPr>
+      </p:sp>
+      <p:sp>
+        <p:nvSpPr>
+          <p:cNvPr id="11" name="Shape 9"/>
+          <p:cNvSpPr/>
+          <p:nvPr/>
+        </p:nvSpPr>
+        <p:spPr>
+          <a:xfrm>
+            <a:off x="5628132" y="2788920"/>
+            <a:ext cx="100584" cy="100584"/>
+          </a:xfrm>
+          <a:prstGeom prst="ellipse">
+            <a:avLst/>
+          </a:prstGeom>
+          <a:solidFill>
+            <a:srgbClr val="840028"/>
+          </a:solidFill>
+          <a:ln w="12700">
+            <a:solidFill>
+              <a:srgbClr val="840028"/>
+            </a:solidFill>
+            <a:prstDash val="solid"/>
+          </a:ln>
+        </p:spPr>
+      </p:sp>
+      <p:sp>
+        <p:nvSpPr>
+          <p:cNvPr id="12" name="Shape 10"/>
+          <p:cNvSpPr/>
+          <p:nvPr/>
+        </p:nvSpPr>
+        <p:spPr>
+          <a:xfrm>
+            <a:off x="5801868" y="2788920"/>
+            <a:ext cx="100584" cy="100584"/>
+          </a:xfrm>
+          <a:prstGeom prst="ellipse">
+            <a:avLst/>
+          </a:prstGeom>
+          <a:solidFill>
+            <a:srgbClr val="840028"/>
+          </a:solidFill>
+          <a:ln w="12700">
+            <a:solidFill>
+              <a:srgbClr val="840028"/>
+            </a:solidFill>
+            <a:prstDash val="solid"/>
+          </a:ln>
+        </p:spPr>
+      </p:sp>
+      <p:sp>
+        <p:nvSpPr>
+          <p:cNvPr id="13" name="Shape 11"/>
+          <p:cNvSpPr/>
+          <p:nvPr/>
+        </p:nvSpPr>
+        <p:spPr>
+          <a:xfrm>
+            <a:off x="5975604" y="2788920"/>
+            <a:ext cx="100584" cy="100584"/>
+          </a:xfrm>
+          <a:prstGeom prst="ellipse">
+            <a:avLst/>
+          </a:prstGeom>
+          <a:solidFill>
+            <a:srgbClr val="840028"/>
+          </a:solidFill>
+          <a:ln w="12700">
+            <a:solidFill>
+              <a:srgbClr val="840028"/>
+            </a:solidFill>
+            <a:prstDash val="solid"/>
+          </a:ln>
+        </p:spPr>
+      </p:sp>
+      <p:sp>
+        <p:nvSpPr>
+          <p:cNvPr id="14" name="Shape 12"/>
+          <p:cNvSpPr/>
+          <p:nvPr/>
+        </p:nvSpPr>
+        <p:spPr>
+          <a:xfrm>
+            <a:off x="6149340" y="2788920"/>
+            <a:ext cx="100584" cy="100584"/>
+          </a:xfrm>
+          <a:prstGeom prst="ellipse">
+            <a:avLst/>
+          </a:prstGeom>
+          <a:solidFill>
+            <a:srgbClr val="840028"/>
+          </a:solidFill>
+          <a:ln w="12700">
+            <a:solidFill>
+              <a:srgbClr val="840028"/>
+            </a:solidFill>
+            <a:prstDash val="solid"/>
+          </a:ln>
+        </p:spPr>
+      </p:sp>
+      <p:sp>
+        <p:nvSpPr>
+          <p:cNvPr id="15" name="Shape 13"/>
+          <p:cNvSpPr/>
+          <p:nvPr/>
+        </p:nvSpPr>
+        <p:spPr>
+          <a:xfrm>
+            <a:off x="6323076" y="2788920"/>
+            <a:ext cx="100584" cy="100584"/>
+          </a:xfrm>
+          <a:prstGeom prst="ellipse">
+            <a:avLst/>
+          </a:prstGeom>
+          <a:solidFill>
+            <a:srgbClr val="840028"/>
+          </a:solidFill>
+          <a:ln w="12700">
+            <a:solidFill>
+              <a:srgbClr val="840028"/>
+            </a:solidFill>
+            <a:prstDash val="solid"/>
+          </a:ln>
+        </p:spPr>
+      </p:sp>
+      <p:sp>
+        <p:nvSpPr>
+          <p:cNvPr id="16" name="Shape 14"/>
+          <p:cNvSpPr/>
+          <p:nvPr/>
+        </p:nvSpPr>
+        <p:spPr>
+          <a:xfrm>
+            <a:off x="6496812" y="2788920"/>
+            <a:ext cx="100584" cy="100584"/>
+          </a:xfrm>
+          <a:prstGeom prst="ellipse">
+            <a:avLst/>
+          </a:prstGeom>
+          <a:solidFill>
+            <a:srgbClr val="840028"/>
+          </a:solidFill>
+          <a:ln w="12700">
+            <a:solidFill>
+              <a:srgbClr val="840028"/>
+            </a:solidFill>
+            <a:prstDash val="solid"/>
+          </a:ln>
+        </p:spPr>
+      </p:sp>
+      <p:sp>
+        <p:nvSpPr>
+          <p:cNvPr id="17" name="Shape 15"/>
+          <p:cNvSpPr/>
+          <p:nvPr/>
+        </p:nvSpPr>
+        <p:spPr>
+          <a:xfrm>
+            <a:off x="6670548" y="2788920"/>
+            <a:ext cx="100584" cy="100584"/>
+          </a:xfrm>
+          <a:prstGeom prst="ellipse">
+            <a:avLst/>
+          </a:prstGeom>
+          <a:solidFill>
+            <a:srgbClr val="840028"/>
+          </a:solidFill>
+          <a:ln w="12700">
+            <a:solidFill>
+              <a:srgbClr val="840028"/>
+            </a:solidFill>
+            <a:prstDash val="solid"/>
+          </a:ln>
+        </p:spPr>
+      </p:sp>
+      <p:sp>
+        <p:nvSpPr>
+          <p:cNvPr id="18" name="Shape 16"/>
+          <p:cNvSpPr/>
+          <p:nvPr/>
+        </p:nvSpPr>
+        <p:spPr>
+          <a:xfrm>
+            <a:off x="6844284" y="2788920"/>
+            <a:ext cx="100584" cy="100584"/>
+          </a:xfrm>
+          <a:prstGeom prst="ellipse">
+            <a:avLst/>
+          </a:prstGeom>
+          <a:solidFill>
+            <a:srgbClr val="840028"/>
+          </a:solidFill>
+          <a:ln w="12700">
+            <a:solidFill>
+              <a:srgbClr val="840028"/>
+            </a:solidFill>
+            <a:prstDash val="solid"/>
+          </a:ln>
+        </p:spPr>
+      </p:sp>
+      <p:sp>
+        <p:nvSpPr>
+          <p:cNvPr id="19" name="Shape 17"/>
+          <p:cNvSpPr/>
+          <p:nvPr/>
+        </p:nvSpPr>
+        <p:spPr>
+          <a:xfrm>
+            <a:off x="5628132" y="2962656"/>
+            <a:ext cx="100584" cy="100584"/>
+          </a:xfrm>
+          <a:prstGeom prst="ellipse">
+            <a:avLst/>
+          </a:prstGeom>
+          <a:solidFill>
+            <a:srgbClr val="840028"/>
+          </a:solidFill>
+          <a:ln w="12700">
+            <a:solidFill>
+              <a:srgbClr val="840028"/>
+            </a:solidFill>
+            <a:prstDash val="solid"/>
+          </a:ln>
+        </p:spPr>
+      </p:sp>
+      <p:sp>
+        <p:nvSpPr>
+          <p:cNvPr id="20" name="Shape 18"/>
+          <p:cNvSpPr/>
+          <p:nvPr/>
+        </p:nvSpPr>
+        <p:spPr>
+          <a:xfrm>
+            <a:off x="5801868" y="2962656"/>
+            <a:ext cx="100584" cy="100584"/>
+          </a:xfrm>
+          <a:prstGeom prst="ellipse">
+            <a:avLst/>
+          </a:prstGeom>
+          <a:solidFill>
+            <a:srgbClr val="840028"/>
+          </a:solidFill>
+          <a:ln w="12700">
+            <a:solidFill>
+              <a:srgbClr val="840028"/>
+            </a:solidFill>
+            <a:prstDash val="solid"/>
+          </a:ln>
+        </p:spPr>
+      </p:sp>
+      <p:sp>
+        <p:nvSpPr>
+          <p:cNvPr id="21" name="Shape 19"/>
+          <p:cNvSpPr/>
+          <p:nvPr/>
+        </p:nvSpPr>
+        <p:spPr>
+          <a:xfrm>
+            <a:off x="5975604" y="2962656"/>
+            <a:ext cx="100584" cy="100584"/>
+          </a:xfrm>
+          <a:prstGeom prst="ellipse">
+            <a:avLst/>
+          </a:prstGeom>
+          <a:solidFill>
+            <a:srgbClr val="840028"/>
+          </a:solidFill>
+          <a:ln w="12700">
+            <a:solidFill>
+              <a:srgbClr val="840028"/>
+            </a:solidFill>
+            <a:prstDash val="solid"/>
+          </a:ln>
+        </p:spPr>
+      </p:sp>
+      <p:sp>
+        <p:nvSpPr>
+          <p:cNvPr id="22" name="Shape 20"/>
+          <p:cNvSpPr/>
+          <p:nvPr/>
+        </p:nvSpPr>
+        <p:spPr>
+          <a:xfrm>
+            <a:off x="6149340" y="2962656"/>
+            <a:ext cx="100584" cy="100584"/>
+          </a:xfrm>
+          <a:prstGeom prst="ellipse">
+            <a:avLst/>
+          </a:prstGeom>
+          <a:solidFill>
+            <a:srgbClr val="840028"/>
+          </a:solidFill>
+          <a:ln w="12700">
+            <a:solidFill>
+              <a:srgbClr val="840028"/>
+            </a:solidFill>
+            <a:prstDash val="solid"/>
+          </a:ln>
+        </p:spPr>
+      </p:sp>
+      <p:sp>
+        <p:nvSpPr>
+          <p:cNvPr id="23" name="Shape 21"/>
+          <p:cNvSpPr/>
+          <p:nvPr/>
+        </p:nvSpPr>
+        <p:spPr>
+          <a:xfrm>
+            <a:off x="6323076" y="2962656"/>
+            <a:ext cx="100584" cy="100584"/>
+          </a:xfrm>
+          <a:prstGeom prst="ellipse">
+            <a:avLst/>
+          </a:prstGeom>
+          <a:solidFill>
+            <a:srgbClr val="840028"/>
+          </a:solidFill>
+          <a:ln w="12700">
+            <a:solidFill>
+              <a:srgbClr val="840028"/>
+            </a:solidFill>
+            <a:prstDash val="solid"/>
+          </a:ln>
+        </p:spPr>
+      </p:sp>
+      <p:sp>
+        <p:nvSpPr>
+          <p:cNvPr id="24" name="Shape 22"/>
+          <p:cNvSpPr/>
+          <p:nvPr/>
+        </p:nvSpPr>
+        <p:spPr>
+          <a:xfrm>
+            <a:off x="6496812" y="2962656"/>
+            <a:ext cx="100584" cy="100584"/>
+          </a:xfrm>
+          <a:prstGeom prst="ellipse">
+            <a:avLst/>
+          </a:prstGeom>
+          <a:solidFill>
+            <a:srgbClr val="840028"/>
+          </a:solidFill>
+          <a:ln w="12700">
+            <a:solidFill>
+              <a:srgbClr val="840028"/>
+            </a:solidFill>
+            <a:prstDash val="solid"/>
+          </a:ln>
+        </p:spPr>
+      </p:sp>
+      <p:sp>
+        <p:nvSpPr>
+          <p:cNvPr id="25" name="Shape 23"/>
+          <p:cNvSpPr/>
+          <p:nvPr/>
+        </p:nvSpPr>
+        <p:spPr>
+          <a:xfrm>
+            <a:off x="6670548" y="2962656"/>
+            <a:ext cx="100584" cy="100584"/>
+          </a:xfrm>
+          <a:prstGeom prst="ellipse">
+            <a:avLst/>
+          </a:prstGeom>
+          <a:solidFill>
+            <a:srgbClr val="840028"/>
+          </a:solidFill>
+          <a:ln w="12700">
+            <a:solidFill>
+              <a:srgbClr val="840028"/>
+            </a:solidFill>
+            <a:prstDash val="solid"/>
+          </a:ln>
+        </p:spPr>
+      </p:sp>
+      <p:sp>
+        <p:nvSpPr>
+          <p:cNvPr id="26" name="Shape 24"/>
+          <p:cNvSpPr/>
+          <p:nvPr/>
+        </p:nvSpPr>
+        <p:spPr>
+          <a:xfrm>
+            <a:off x="6844284" y="2962656"/>
+            <a:ext cx="100584" cy="100584"/>
+          </a:xfrm>
+          <a:prstGeom prst="ellipse">
+            <a:avLst/>
+          </a:prstGeom>
+          <a:solidFill>
+            <a:srgbClr val="840028"/>
+          </a:solidFill>
+          <a:ln w="12700">
+            <a:solidFill>
+              <a:srgbClr val="840028"/>
+            </a:solidFill>
+            <a:prstDash val="solid"/>
+          </a:ln>
+        </p:spPr>
+      </p:sp>
+      <p:sp>
+        <p:nvSpPr>
+          <p:cNvPr id="27" name="Shape 25"/>
+          <p:cNvSpPr/>
+          <p:nvPr/>
+        </p:nvSpPr>
+        <p:spPr>
+          <a:xfrm>
+            <a:off x="5628132" y="3136392"/>
+            <a:ext cx="100584" cy="100584"/>
+          </a:xfrm>
+          <a:prstGeom prst="ellipse">
+            <a:avLst/>
+          </a:prstGeom>
+          <a:solidFill>
+            <a:srgbClr val="840028"/>
+          </a:solidFill>
+          <a:ln w="12700">
+            <a:solidFill>
+              <a:srgbClr val="840028"/>
+            </a:solidFill>
+            <a:prstDash val="solid"/>
+          </a:ln>
+        </p:spPr>
+      </p:sp>
+      <p:sp>
+        <p:nvSpPr>
+          <p:cNvPr id="28" name="Shape 26"/>
+          <p:cNvSpPr/>
+          <p:nvPr/>
+        </p:nvSpPr>
+        <p:spPr>
+          <a:xfrm>
+            <a:off x="5801868" y="3136392"/>
+            <a:ext cx="100584" cy="100584"/>
+          </a:xfrm>
+          <a:prstGeom prst="ellipse">
+            <a:avLst/>
+          </a:prstGeom>
+          <a:solidFill>
+            <a:srgbClr val="840028"/>
+          </a:solidFill>
+          <a:ln w="12700">
+            <a:solidFill>
+              <a:srgbClr val="840028"/>
+            </a:solidFill>
+            <a:prstDash val="solid"/>
+          </a:ln>
+        </p:spPr>
+      </p:sp>
+      <p:sp>
+        <p:nvSpPr>
+          <p:cNvPr id="29" name="Shape 27"/>
+          <p:cNvSpPr/>
+          <p:nvPr/>
+        </p:nvSpPr>
+        <p:spPr>
+          <a:xfrm>
+            <a:off x="5975604" y="3136392"/>
+            <a:ext cx="100584" cy="100584"/>
+          </a:xfrm>
+          <a:prstGeom prst="ellipse">
+            <a:avLst/>
+          </a:prstGeom>
+          <a:solidFill>
+            <a:srgbClr val="840028"/>
+          </a:solidFill>
+          <a:ln w="12700">
+            <a:solidFill>
+              <a:srgbClr val="840028"/>
+            </a:solidFill>
+            <a:prstDash val="solid"/>
+          </a:ln>
+        </p:spPr>
+      </p:sp>
+      <p:sp>
+        <p:nvSpPr>
+          <p:cNvPr id="30" name="Shape 28"/>
+          <p:cNvSpPr/>
+          <p:nvPr/>
+        </p:nvSpPr>
+        <p:spPr>
+          <a:xfrm>
+            <a:off x="6149340" y="3136392"/>
+            <a:ext cx="100584" cy="100584"/>
+          </a:xfrm>
+          <a:prstGeom prst="ellipse">
+            <a:avLst/>
+          </a:prstGeom>
+          <a:solidFill>
+            <a:srgbClr val="840028"/>
+          </a:solidFill>
+          <a:ln w="12700">
+            <a:solidFill>
+              <a:srgbClr val="840028"/>
+            </a:solidFill>
+            <a:prstDash val="solid"/>
+          </a:ln>
+        </p:spPr>
+      </p:sp>
+      <p:sp>
+        <p:nvSpPr>
+          <p:cNvPr id="31" name="Shape 29"/>
+          <p:cNvSpPr/>
+          <p:nvPr/>
+        </p:nvSpPr>
+        <p:spPr>
+          <a:xfrm>
+            <a:off x="6323076" y="3136392"/>
+            <a:ext cx="100584" cy="100584"/>
+          </a:xfrm>
+          <a:prstGeom prst="ellipse">
+            <a:avLst/>
+          </a:prstGeom>
+          <a:solidFill>
+            <a:srgbClr val="840028"/>
+          </a:solidFill>
+          <a:ln w="12700">
+            <a:solidFill>
+              <a:srgbClr val="840028"/>
+            </a:solidFill>
+            <a:prstDash val="solid"/>
+          </a:ln>
+        </p:spPr>
+      </p:sp>
+      <p:sp>
+        <p:nvSpPr>
+          <p:cNvPr id="32" name="Shape 30"/>
+          <p:cNvSpPr/>
+          <p:nvPr/>
+        </p:nvSpPr>
+        <p:spPr>
+          <a:xfrm>
+            <a:off x="6496812" y="3136392"/>
+            <a:ext cx="100584" cy="100584"/>
+          </a:xfrm>
+          <a:prstGeom prst="ellipse">
+            <a:avLst/>
+          </a:prstGeom>
+          <a:solidFill>
+            <a:srgbClr val="840028"/>
+          </a:solidFill>
+          <a:ln w="12700">
+            <a:solidFill>
+              <a:srgbClr val="840028"/>
+            </a:solidFill>
+            <a:prstDash val="solid"/>
+          </a:ln>
+        </p:spPr>
+      </p:sp>
+      <p:sp>
+        <p:nvSpPr>
+          <p:cNvPr id="33" name="Shape 31"/>
+          <p:cNvSpPr/>
+          <p:nvPr/>
+        </p:nvSpPr>
+        <p:spPr>
+          <a:xfrm>
+            <a:off x="6670548" y="3136392"/>
+            <a:ext cx="100584" cy="100584"/>
+          </a:xfrm>
+          <a:prstGeom prst="ellipse">
+            <a:avLst/>
+          </a:prstGeom>
+          <a:solidFill>
+            <a:srgbClr val="840028"/>
+          </a:solidFill>
+          <a:ln w="12700">
+            <a:solidFill>
+              <a:srgbClr val="840028"/>
+            </a:solidFill>
+            <a:prstDash val="solid"/>
+          </a:ln>
+        </p:spPr>
+      </p:sp>
+      <p:sp>
+        <p:nvSpPr>
+          <p:cNvPr id="34" name="Shape 32"/>
+          <p:cNvSpPr/>
+          <p:nvPr/>
+        </p:nvSpPr>
+        <p:spPr>
+          <a:xfrm>
+            <a:off x="6844284" y="3136392"/>
+            <a:ext cx="100584" cy="100584"/>
+          </a:xfrm>
+          <a:prstGeom prst="ellipse">
+            <a:avLst/>
+          </a:prstGeom>
+          <a:solidFill>
+            <a:srgbClr val="840028"/>
+          </a:solidFill>
+          <a:ln w="12700">
+            <a:solidFill>
+              <a:srgbClr val="840028"/>
+            </a:solidFill>
+            <a:prstDash val="solid"/>
+          </a:ln>
+        </p:spPr>
+      </p:sp>
+      <p:sp>
+        <p:nvSpPr>
+          <p:cNvPr id="35" name="Shape 33"/>
+          <p:cNvSpPr/>
+          <p:nvPr/>
+        </p:nvSpPr>
+        <p:spPr>
+          <a:xfrm>
+            <a:off x="5628132" y="3310128"/>
+            <a:ext cx="100584" cy="100584"/>
+          </a:xfrm>
+          <a:prstGeom prst="ellipse">
+            <a:avLst/>
+          </a:prstGeom>
+          <a:solidFill>
+            <a:srgbClr val="840028"/>
+          </a:solidFill>
+          <a:ln w="12700">
+            <a:solidFill>
+              <a:srgbClr val="840028"/>
+            </a:solidFill>
+            <a:prstDash val="solid"/>
+          </a:ln>
+        </p:spPr>
+      </p:sp>
+      <p:sp>
+        <p:nvSpPr>
+          <p:cNvPr id="36" name="Shape 34"/>
+          <p:cNvSpPr/>
+          <p:nvPr/>
+        </p:nvSpPr>
+        <p:spPr>
+          <a:xfrm>
+            <a:off x="5801868" y="3310128"/>
+            <a:ext cx="100584" cy="100584"/>
+          </a:xfrm>
+          <a:prstGeom prst="ellipse">
+            <a:avLst/>
+          </a:prstGeom>
+          <a:solidFill>
+            <a:srgbClr val="840028"/>
+          </a:solidFill>
+          <a:ln w="12700">
+            <a:solidFill>
+              <a:srgbClr val="840028"/>
+            </a:solidFill>
+            <a:prstDash val="solid"/>
+          </a:ln>
+        </p:spPr>
+      </p:sp>
+      <p:sp>
+        <p:nvSpPr>
+          <p:cNvPr id="37" name="Shape 35"/>
+          <p:cNvSpPr/>
+          <p:nvPr/>
+        </p:nvSpPr>
+        <p:spPr>
+          <a:xfrm>
+            <a:off x="5975604" y="3310128"/>
+            <a:ext cx="100584" cy="100584"/>
+          </a:xfrm>
+          <a:prstGeom prst="ellipse">
+            <a:avLst/>
+          </a:prstGeom>
+          <a:solidFill>
+            <a:srgbClr val="840028"/>
+          </a:solidFill>
+          <a:ln w="12700">
+            <a:solidFill>
+              <a:srgbClr val="840028"/>
+            </a:solidFill>
+            <a:prstDash val="solid"/>
+          </a:ln>
+        </p:spPr>
+      </p:sp>
+      <p:sp>
+        <p:nvSpPr>
+          <p:cNvPr id="38" name="Shape 36"/>
+          <p:cNvSpPr/>
+          <p:nvPr/>
+        </p:nvSpPr>
+        <p:spPr>
+          <a:xfrm>
+            <a:off x="6149340" y="3310128"/>
+            <a:ext cx="100584" cy="100584"/>
+          </a:xfrm>
+          <a:prstGeom prst="ellipse">
+            <a:avLst/>
+          </a:prstGeom>
+          <a:solidFill>
+            <a:srgbClr val="840028"/>
+          </a:solidFill>
+          <a:ln w="12700">
+            <a:solidFill>
+              <a:srgbClr val="840028"/>
+            </a:solidFill>
+            <a:prstDash val="solid"/>
+          </a:ln>
+        </p:spPr>
+      </p:sp>
+      <p:sp>
+        <p:nvSpPr>
+          <p:cNvPr id="39" name="Shape 37"/>
+          <p:cNvSpPr/>
+          <p:nvPr/>
+        </p:nvSpPr>
+        <p:spPr>
+          <a:xfrm>
+            <a:off x="6323076" y="3310128"/>
+            <a:ext cx="100584" cy="100584"/>
+          </a:xfrm>
+          <a:prstGeom prst="ellipse">
+            <a:avLst/>
+          </a:prstGeom>
+          <a:solidFill>
+            <a:srgbClr val="840028"/>
+          </a:solidFill>
+          <a:ln w="12700">
+            <a:solidFill>
+              <a:srgbClr val="840028"/>
+            </a:solidFill>
+            <a:prstDash val="solid"/>
+          </a:ln>
+        </p:spPr>
+      </p:sp>
+      <p:sp>
+        <p:nvSpPr>
+          <p:cNvPr id="40" name="Shape 38"/>
+          <p:cNvSpPr/>
+          <p:nvPr/>
+        </p:nvSpPr>
+        <p:spPr>
+          <a:xfrm>
+            <a:off x="6496812" y="3310128"/>
+            <a:ext cx="100584" cy="100584"/>
+          </a:xfrm>
+          <a:prstGeom prst="ellipse">
+            <a:avLst/>
+          </a:prstGeom>
+          <a:solidFill>
+            <a:srgbClr val="840028"/>
+          </a:solidFill>
+          <a:ln w="12700">
+            <a:solidFill>
+              <a:srgbClr val="840028"/>
+            </a:solidFill>
+            <a:prstDash val="solid"/>
+          </a:ln>
+        </p:spPr>
+      </p:sp>
+      <p:sp>
+        <p:nvSpPr>
+          <p:cNvPr id="41" name="Shape 39"/>
+          <p:cNvSpPr/>
+          <p:nvPr/>
+        </p:nvSpPr>
+        <p:spPr>
+          <a:xfrm>
+            <a:off x="6670548" y="3310128"/>
+            <a:ext cx="100584" cy="100584"/>
+          </a:xfrm>
+          <a:prstGeom prst="ellipse">
+            <a:avLst/>
+          </a:prstGeom>
+          <a:solidFill>
+            <a:srgbClr val="840028"/>
+          </a:solidFill>
+          <a:ln w="12700">
+            <a:solidFill>
+              <a:srgbClr val="840028"/>
+            </a:solidFill>
+            <a:prstDash val="solid"/>
+          </a:ln>
+        </p:spPr>
+      </p:sp>
+      <p:sp>
+        <p:nvSpPr>
+          <p:cNvPr id="42" name="Shape 40"/>
+          <p:cNvSpPr/>
+          <p:nvPr/>
+        </p:nvSpPr>
+        <p:spPr>
+          <a:xfrm>
+            <a:off x="6844284" y="3310128"/>
+            <a:ext cx="100584" cy="100584"/>
+          </a:xfrm>
+          <a:prstGeom prst="ellipse">
+            <a:avLst/>
+          </a:prstGeom>
+          <a:solidFill>
+            <a:srgbClr val="840028"/>
+          </a:solidFill>
+          <a:ln w="12700">
+            <a:solidFill>
+              <a:srgbClr val="840028"/>
+            </a:solidFill>
+            <a:prstDash val="solid"/>
+          </a:ln>
+        </p:spPr>
+      </p:sp>
+      <p:sp>
+        <p:nvSpPr>
+          <p:cNvPr id="43" name="Shape 41"/>
+          <p:cNvSpPr/>
+          <p:nvPr/>
+        </p:nvSpPr>
+        <p:spPr>
+          <a:xfrm>
+            <a:off x="5628132" y="3483864"/>
+            <a:ext cx="100584" cy="100584"/>
+          </a:xfrm>
+          <a:prstGeom prst="ellipse">
+            <a:avLst/>
+          </a:prstGeom>
+          <a:solidFill>
+            <a:srgbClr val="840028"/>
+          </a:solidFill>
+          <a:ln w="12700">
+            <a:solidFill>
+              <a:srgbClr val="840028"/>
+            </a:solidFill>
+            <a:prstDash val="solid"/>
+          </a:ln>
+        </p:spPr>
+      </p:sp>
+      <p:sp>
+        <p:nvSpPr>
+          <p:cNvPr id="44" name="Shape 42"/>
+          <p:cNvSpPr/>
+          <p:nvPr/>
+        </p:nvSpPr>
+        <p:spPr>
+          <a:xfrm>
+            <a:off x="5801868" y="3483864"/>
+            <a:ext cx="100584" cy="100584"/>
+          </a:xfrm>
+          <a:prstGeom prst="ellipse">
+            <a:avLst/>
+          </a:prstGeom>
+          <a:solidFill>
+            <a:srgbClr val="840028"/>
+          </a:solidFill>
+          <a:ln w="12700">
+            <a:solidFill>
+              <a:srgbClr val="840028"/>
+            </a:solidFill>
+            <a:prstDash val="solid"/>
+          </a:ln>
+        </p:spPr>
+      </p:sp>
+      <p:sp>
+        <p:nvSpPr>
+          <p:cNvPr id="45" name="Shape 43"/>
+          <p:cNvSpPr/>
+          <p:nvPr/>
+        </p:nvSpPr>
+        <p:spPr>
+          <a:xfrm>
+            <a:off x="5975604" y="3483864"/>
+            <a:ext cx="100584" cy="100584"/>
+          </a:xfrm>
+          <a:prstGeom prst="ellipse">
+            <a:avLst/>
+          </a:prstGeom>
+          <a:solidFill>
+            <a:srgbClr val="840028"/>
+          </a:solidFill>
+          <a:ln w="12700">
+            <a:solidFill>
+              <a:srgbClr val="840028"/>
+            </a:solidFill>
+            <a:prstDash val="solid"/>
+          </a:ln>
+        </p:spPr>
+      </p:sp>
+      <p:sp>
+        <p:nvSpPr>
+          <p:cNvPr id="46" name="Shape 44"/>
+          <p:cNvSpPr/>
+          <p:nvPr/>
+        </p:nvSpPr>
+        <p:spPr>
+          <a:xfrm>
+            <a:off x="6149340" y="3483864"/>
+            <a:ext cx="100584" cy="100584"/>
+          </a:xfrm>
+          <a:prstGeom prst="ellipse">
+            <a:avLst/>
+          </a:prstGeom>
+          <a:solidFill>
+            <a:srgbClr val="840028"/>
+          </a:solidFill>
+          <a:ln w="12700">
+            <a:solidFill>
+              <a:srgbClr val="840028"/>
+            </a:solidFill>
+            <a:prstDash val="solid"/>
+          </a:ln>
+        </p:spPr>
+      </p:sp>
+      <p:sp>
+        <p:nvSpPr>
+          <p:cNvPr id="47" name="Shape 45"/>
+          <p:cNvSpPr/>
+          <p:nvPr/>
+        </p:nvSpPr>
+        <p:spPr>
+          <a:xfrm>
+            <a:off x="6323076" y="3483864"/>
+            <a:ext cx="100584" cy="100584"/>
+          </a:xfrm>
+          <a:prstGeom prst="ellipse">
+            <a:avLst/>
+          </a:prstGeom>
+          <a:solidFill>
+            <a:srgbClr val="840028"/>
+          </a:solidFill>
+          <a:ln w="12700">
+            <a:solidFill>
+              <a:srgbClr val="840028"/>
+            </a:solidFill>
+            <a:prstDash val="solid"/>
+          </a:ln>
+        </p:spPr>
+      </p:sp>
+      <p:sp>
+        <p:nvSpPr>
+          <p:cNvPr id="48" name="Shape 46"/>
+          <p:cNvSpPr/>
+          <p:nvPr/>
+        </p:nvSpPr>
+        <p:spPr>
+          <a:xfrm>
+            <a:off x="6496812" y="3483864"/>
+            <a:ext cx="100584" cy="100584"/>
+          </a:xfrm>
+          <a:prstGeom prst="ellipse">
+            <a:avLst/>
+          </a:prstGeom>
+          <a:solidFill>
+            <a:srgbClr val="840028"/>
+          </a:solidFill>
+          <a:ln w="12700">
+            <a:solidFill>
+              <a:srgbClr val="840028"/>
+            </a:solidFill>
+            <a:prstDash val="solid"/>
+          </a:ln>
+        </p:spPr>
+      </p:sp>
+      <p:sp>
+        <p:nvSpPr>
+          <p:cNvPr id="49" name="Shape 47"/>
+          <p:cNvSpPr/>
+          <p:nvPr/>
+        </p:nvSpPr>
+        <p:spPr>
+          <a:xfrm>
+            <a:off x="6670548" y="3483864"/>
+            <a:ext cx="100584" cy="100584"/>
+          </a:xfrm>
+          <a:prstGeom prst="ellipse">
+            <a:avLst/>
+          </a:prstGeom>
+          <a:solidFill>
+            <a:srgbClr val="840028"/>
+          </a:solidFill>
+          <a:ln w="12700">
+            <a:solidFill>
+              <a:srgbClr val="840028"/>
+            </a:solidFill>
+            <a:prstDash val="solid"/>
+          </a:ln>
+        </p:spPr>
+      </p:sp>
+      <p:sp>
+        <p:nvSpPr>
+          <p:cNvPr id="50" name="Shape 48"/>
+          <p:cNvSpPr/>
+          <p:nvPr/>
+        </p:nvSpPr>
+        <p:spPr>
+          <a:xfrm>
+            <a:off x="6844284" y="3483864"/>
+            <a:ext cx="100584" cy="100584"/>
+          </a:xfrm>
+          <a:prstGeom prst="ellipse">
+            <a:avLst/>
+          </a:prstGeom>
+          <a:solidFill>
+            <a:srgbClr val="840028"/>
+          </a:solidFill>
+          <a:ln w="12700">
+            <a:solidFill>
+              <a:srgbClr val="840028"/>
+            </a:solidFill>
+            <a:prstDash val="solid"/>
+          </a:ln>
+        </p:spPr>
+      </p:sp>
+      <p:sp>
+        <p:nvSpPr>
+          <p:cNvPr id="51" name="Shape 49"/>
+          <p:cNvSpPr/>
+          <p:nvPr/>
+        </p:nvSpPr>
+        <p:spPr>
+          <a:xfrm>
+            <a:off x="5628132" y="3657600"/>
+            <a:ext cx="100584" cy="100584"/>
+          </a:xfrm>
+          <a:prstGeom prst="ellipse">
+            <a:avLst/>
+          </a:prstGeom>
+          <a:solidFill>
+            <a:srgbClr val="840028"/>
+          </a:solidFill>
+          <a:ln w="12700">
+            <a:solidFill>
+              <a:srgbClr val="840028"/>
+            </a:solidFill>
+            <a:prstDash val="solid"/>
+          </a:ln>
+        </p:spPr>
+      </p:sp>
+      <p:sp>
+        <p:nvSpPr>
+          <p:cNvPr id="52" name="Shape 50"/>
+          <p:cNvSpPr/>
+          <p:nvPr/>
+        </p:nvSpPr>
+        <p:spPr>
+          <a:xfrm>
+            <a:off x="5801868" y="3657600"/>
+            <a:ext cx="100584" cy="100584"/>
+          </a:xfrm>
+          <a:prstGeom prst="ellipse">
+            <a:avLst/>
+          </a:prstGeom>
+          <a:solidFill>
+            <a:srgbClr val="840028"/>
+          </a:solidFill>
+          <a:ln w="12700">
+            <a:solidFill>
+              <a:srgbClr val="840028"/>
+            </a:solidFill>
+            <a:prstDash val="solid"/>
+          </a:ln>
+        </p:spPr>
+      </p:sp>
+      <p:sp>
+        <p:nvSpPr>
+          <p:cNvPr id="53" name="Shape 51"/>
+          <p:cNvSpPr/>
+          <p:nvPr/>
+        </p:nvSpPr>
+        <p:spPr>
+          <a:xfrm>
+            <a:off x="5975604" y="3657600"/>
+            <a:ext cx="100584" cy="100584"/>
+          </a:xfrm>
+          <a:prstGeom prst="ellipse">
+            <a:avLst/>
+          </a:prstGeom>
+          <a:solidFill>
+            <a:srgbClr val="840028"/>
+          </a:solidFill>
+          <a:ln w="12700">
+            <a:solidFill>
+              <a:srgbClr val="840028"/>
+            </a:solidFill>
+            <a:prstDash val="solid"/>
+          </a:ln>
+        </p:spPr>
+      </p:sp>
+      <p:sp>
+        <p:nvSpPr>
+          <p:cNvPr id="54" name="Shape 52"/>
+          <p:cNvSpPr/>
+          <p:nvPr/>
+        </p:nvSpPr>
+        <p:spPr>
+          <a:xfrm>
+            <a:off x="6149340" y="3657600"/>
+            <a:ext cx="100584" cy="100584"/>
+          </a:xfrm>
+          <a:prstGeom prst="ellipse">
+            <a:avLst/>
+          </a:prstGeom>
+          <a:solidFill>
+            <a:srgbClr val="840028"/>
+          </a:solidFill>
+          <a:ln w="12700">
+            <a:solidFill>
+              <a:srgbClr val="840028"/>
+            </a:solidFill>
+            <a:prstDash val="solid"/>
+          </a:ln>
+        </p:spPr>
+      </p:sp>
+      <p:sp>
+        <p:nvSpPr>
+          <p:cNvPr id="55" name="Shape 53"/>
+          <p:cNvSpPr/>
+          <p:nvPr/>
+        </p:nvSpPr>
+        <p:spPr>
+          <a:xfrm>
+            <a:off x="6323076" y="3657600"/>
+            <a:ext cx="100584" cy="100584"/>
+          </a:xfrm>
+          <a:prstGeom prst="ellipse">
+            <a:avLst/>
+          </a:prstGeom>
+          <a:solidFill>
+            <a:srgbClr val="840028"/>
+          </a:solidFill>
+          <a:ln w="12700">
+            <a:solidFill>
+              <a:srgbClr val="840028"/>
+            </a:solidFill>
+            <a:prstDash val="solid"/>
+          </a:ln>
+        </p:spPr>
+      </p:sp>
+      <p:sp>
+        <p:nvSpPr>
+          <p:cNvPr id="56" name="Shape 54"/>
+          <p:cNvSpPr/>
+          <p:nvPr/>
+        </p:nvSpPr>
+        <p:spPr>
+          <a:xfrm>
+            <a:off x="6496812" y="3657600"/>
+            <a:ext cx="100584" cy="100584"/>
+          </a:xfrm>
+          <a:prstGeom prst="ellipse">
+            <a:avLst/>
+          </a:prstGeom>
+          <a:solidFill>
+            <a:srgbClr val="840028"/>
+          </a:solidFill>
+          <a:ln w="12700">
+            <a:solidFill>
+              <a:srgbClr val="840028"/>
+            </a:solidFill>
+            <a:prstDash val="solid"/>
+          </a:ln>
+        </p:spPr>
+      </p:sp>
+      <p:sp>
+        <p:nvSpPr>
+          <p:cNvPr id="57" name="Shape 55"/>
+          <p:cNvSpPr/>
+          <p:nvPr/>
+        </p:nvSpPr>
+        <p:spPr>
+          <a:xfrm>
+            <a:off x="6670548" y="3657600"/>
+            <a:ext cx="100584" cy="100584"/>
+          </a:xfrm>
+          <a:prstGeom prst="ellipse">
+            <a:avLst/>
+          </a:prstGeom>
+          <a:solidFill>
+            <a:srgbClr val="840028"/>
+          </a:solidFill>
+          <a:ln w="12700">
+            <a:solidFill>
+              <a:srgbClr val="840028"/>
+            </a:solidFill>
+            <a:prstDash val="solid"/>
+          </a:ln>
+        </p:spPr>
+      </p:sp>
+      <p:sp>
+        <p:nvSpPr>
+          <p:cNvPr id="58" name="Shape 56"/>
+          <p:cNvSpPr/>
+          <p:nvPr/>
+        </p:nvSpPr>
+        <p:spPr>
+          <a:xfrm>
+            <a:off x="6844284" y="3657600"/>
+            <a:ext cx="100584" cy="100584"/>
+          </a:xfrm>
+          <a:prstGeom prst="ellipse">
+            <a:avLst/>
+          </a:prstGeom>
+          <a:solidFill>
+            <a:srgbClr val="840028"/>
+          </a:solidFill>
+          <a:ln w="12700">
+            <a:solidFill>
+              <a:srgbClr val="840028"/>
+            </a:solidFill>
+            <a:prstDash val="solid"/>
+          </a:ln>
+        </p:spPr>
+      </p:sp>
+      <p:sp>
+        <p:nvSpPr>
+          <p:cNvPr id="59" name="Shape 57"/>
+          <p:cNvSpPr/>
+          <p:nvPr/>
+        </p:nvSpPr>
+        <p:spPr>
+          <a:xfrm>
+            <a:off x="5628132" y="3831336"/>
+            <a:ext cx="100584" cy="100584"/>
+          </a:xfrm>
+          <a:prstGeom prst="ellipse">
+            <a:avLst/>
+          </a:prstGeom>
+          <a:solidFill>
+            <a:srgbClr val="840028"/>
+          </a:solidFill>
+          <a:ln w="12700">
+            <a:solidFill>
+              <a:srgbClr val="840028"/>
+            </a:solidFill>
+            <a:prstDash val="solid"/>
+          </a:ln>
+        </p:spPr>
+      </p:sp>
+      <p:sp>
+        <p:nvSpPr>
+          <p:cNvPr id="60" name="Shape 58"/>
+          <p:cNvSpPr/>
+          <p:nvPr/>
+        </p:nvSpPr>
+        <p:spPr>
+          <a:xfrm>
+            <a:off x="5801868" y="3831336"/>
+            <a:ext cx="100584" cy="100584"/>
+          </a:xfrm>
+          <a:prstGeom prst="ellipse">
+            <a:avLst/>
+          </a:prstGeom>
+          <a:solidFill>
+            <a:srgbClr val="840028"/>
+          </a:solidFill>
+          <a:ln w="12700">
+            <a:solidFill>
+              <a:srgbClr val="840028"/>
+            </a:solidFill>
+            <a:prstDash val="solid"/>
+          </a:ln>
+        </p:spPr>
+      </p:sp>
+      <p:sp>
+        <p:nvSpPr>
+          <p:cNvPr id="61" name="Shape 59"/>
+          <p:cNvSpPr/>
+          <p:nvPr/>
+        </p:nvSpPr>
+        <p:spPr>
+          <a:xfrm>
+            <a:off x="5975604" y="3831336"/>
+            <a:ext cx="100584" cy="100584"/>
+          </a:xfrm>
+          <a:prstGeom prst="ellipse">
+            <a:avLst/>
+          </a:prstGeom>
+          <a:solidFill>
+            <a:srgbClr val="840028"/>
+          </a:solidFill>
+          <a:ln w="12700">
+            <a:solidFill>
+              <a:srgbClr val="840028"/>
+            </a:solidFill>
+            <a:prstDash val="solid"/>
+          </a:ln>
+        </p:spPr>
+      </p:sp>
+      <p:sp>
+        <p:nvSpPr>
+          <p:cNvPr id="62" name="Shape 60"/>
+          <p:cNvSpPr/>
+          <p:nvPr/>
+        </p:nvSpPr>
+        <p:spPr>
+          <a:xfrm>
+            <a:off x="6149340" y="3831336"/>
+            <a:ext cx="100584" cy="100584"/>
+          </a:xfrm>
+          <a:prstGeom prst="ellipse">
+            <a:avLst/>
+          </a:prstGeom>
+          <a:solidFill>
+            <a:srgbClr val="840028"/>
+          </a:solidFill>
+          <a:ln w="12700">
+            <a:solidFill>
+              <a:srgbClr val="840028"/>
+            </a:solidFill>
+            <a:prstDash val="solid"/>
+          </a:ln>
+        </p:spPr>
+      </p:sp>
+      <p:sp>
+        <p:nvSpPr>
+          <p:cNvPr id="63" name="Shape 61"/>
+          <p:cNvSpPr/>
+          <p:nvPr/>
+        </p:nvSpPr>
+        <p:spPr>
+          <a:xfrm>
+            <a:off x="6323076" y="3831336"/>
+            <a:ext cx="100584" cy="100584"/>
+          </a:xfrm>
+          <a:prstGeom prst="ellipse">
+            <a:avLst/>
+          </a:prstGeom>
+          <a:solidFill>
+            <a:srgbClr val="840028"/>
+          </a:solidFill>
+          <a:ln w="12700">
+            <a:solidFill>
+              <a:srgbClr val="840028"/>
+            </a:solidFill>
+            <a:prstDash val="solid"/>
+          </a:ln>
+        </p:spPr>
+      </p:sp>
+      <p:sp>
+        <p:nvSpPr>
+          <p:cNvPr id="64" name="Shape 62"/>
+          <p:cNvSpPr/>
+          <p:nvPr/>
+        </p:nvSpPr>
+        <p:spPr>
+          <a:xfrm>
+            <a:off x="6496812" y="3831336"/>
+            <a:ext cx="100584" cy="100584"/>
+          </a:xfrm>
+          <a:prstGeom prst="ellipse">
+            <a:avLst/>
+          </a:prstGeom>
+          <a:solidFill>
+            <a:srgbClr val="840028"/>
+          </a:solidFill>
+          <a:ln w="12700">
+            <a:solidFill>
+              <a:srgbClr val="840028"/>
+            </a:solidFill>
+            <a:prstDash val="solid"/>
+          </a:ln>
+        </p:spPr>
+      </p:sp>
+      <p:sp>
+        <p:nvSpPr>
+          <p:cNvPr id="65" name="Shape 63"/>
+          <p:cNvSpPr/>
+          <p:nvPr/>
+        </p:nvSpPr>
+        <p:spPr>
+          <a:xfrm>
+            <a:off x="6670548" y="3831336"/>
+            <a:ext cx="100584" cy="100584"/>
+          </a:xfrm>
+          <a:prstGeom prst="ellipse">
+            <a:avLst/>
+          </a:prstGeom>
+          <a:solidFill>
+            <a:srgbClr val="840028"/>
+          </a:solidFill>
+          <a:ln w="12700">
+            <a:solidFill>
+              <a:srgbClr val="840028"/>
+            </a:solidFill>
+            <a:prstDash val="solid"/>
+          </a:ln>
+        </p:spPr>
+      </p:sp>
+      <p:sp>
+        <p:nvSpPr>
+          <p:cNvPr id="66" name="Shape 64"/>
+          <p:cNvSpPr/>
+          <p:nvPr/>
+        </p:nvSpPr>
+        <p:spPr>
+          <a:xfrm>
+            <a:off x="6844284" y="3831336"/>
+            <a:ext cx="100584" cy="100584"/>
+          </a:xfrm>
+          <a:prstGeom prst="ellipse">
+            <a:avLst/>
+          </a:prstGeom>
+          <a:solidFill>
+            <a:srgbClr val="840028"/>
+          </a:solidFill>
+          <a:ln w="12700">
+            <a:solidFill>
+              <a:srgbClr val="840028"/>
+            </a:solidFill>
+            <a:prstDash val="solid"/>
+          </a:ln>
+        </p:spPr>
+      </p:sp>
+      <p:sp>
+        <p:nvSpPr>
+          <p:cNvPr id="67" name="Shape 65"/>
+          <p:cNvSpPr/>
+          <p:nvPr/>
+        </p:nvSpPr>
+        <p:spPr>
+          <a:xfrm>
+            <a:off x="9281160" y="2834640"/>
+            <a:ext cx="1874520" cy="137160"/>
+          </a:xfrm>
+          <a:prstGeom prst="rect">
+            <a:avLst/>
+          </a:prstGeom>
+          <a:solidFill>
+            <a:srgbClr val="840028"/>
+          </a:solidFill>
+          <a:ln w="12700">
+            <a:solidFill>
+              <a:srgbClr val="FFFFFF"/>
+            </a:solidFill>
+            <a:prstDash val="solid"/>
+          </a:ln>
+        </p:spPr>
+      </p:sp>
+      <p:sp>
+        <p:nvSpPr>
+          <p:cNvPr id="68" name="Shape 66"/>
+          <p:cNvSpPr/>
+          <p:nvPr/>
+        </p:nvSpPr>
+        <p:spPr>
+          <a:xfrm>
+            <a:off x="9281160" y="3017520"/>
+            <a:ext cx="1874520" cy="137160"/>
+          </a:xfrm>
+          <a:prstGeom prst="rect">
+            <a:avLst/>
+          </a:prstGeom>
+          <a:solidFill>
+            <a:srgbClr val="840028"/>
+          </a:solidFill>
+          <a:ln w="12700">
+            <a:solidFill>
+              <a:srgbClr val="FFFFFF"/>
+            </a:solidFill>
+            <a:prstDash val="solid"/>
+          </a:ln>
+        </p:spPr>
+      </p:sp>
+      <p:sp>
+        <p:nvSpPr>
+          <p:cNvPr id="69" name="Shape 67"/>
+          <p:cNvSpPr/>
+          <p:nvPr/>
+        </p:nvSpPr>
+        <p:spPr>
+          <a:xfrm>
+            <a:off x="9281160" y="3200400"/>
+            <a:ext cx="1874520" cy="137160"/>
+          </a:xfrm>
+          <a:prstGeom prst="rect">
+            <a:avLst/>
+          </a:prstGeom>
+          <a:solidFill>
+            <a:srgbClr val="840028"/>
+          </a:solidFill>
+          <a:ln w="12700">
+            <a:solidFill>
+              <a:srgbClr val="FFFFFF"/>
+            </a:solidFill>
+            <a:prstDash val="solid"/>
+          </a:ln>
+        </p:spPr>
+      </p:sp>
+      <p:sp>
+        <p:nvSpPr>
+          <p:cNvPr id="70" name="Shape 68"/>
+          <p:cNvSpPr/>
+          <p:nvPr/>
+        </p:nvSpPr>
+        <p:spPr>
+          <a:xfrm>
+            <a:off x="9281160" y="3383280"/>
+            <a:ext cx="1874520" cy="137160"/>
+          </a:xfrm>
+          <a:prstGeom prst="rect">
+            <a:avLst/>
+          </a:prstGeom>
+          <a:solidFill>
+            <a:srgbClr val="840028"/>
+          </a:solidFill>
+          <a:ln w="12700">
+            <a:solidFill>
+              <a:srgbClr val="FFFFFF"/>
+            </a:solidFill>
+            <a:prstDash val="solid"/>
+          </a:ln>
+        </p:spPr>
+      </p:sp>
+      <p:sp>
+        <p:nvSpPr>
+          <p:cNvPr id="71" name="Shape 69"/>
+          <p:cNvSpPr/>
+          <p:nvPr/>
+        </p:nvSpPr>
+        <p:spPr>
+          <a:xfrm>
+            <a:off x="9281160" y="3566160"/>
+            <a:ext cx="1874520" cy="137160"/>
+          </a:xfrm>
+          <a:prstGeom prst="rect">
+            <a:avLst/>
+          </a:prstGeom>
+          <a:solidFill>
+            <a:srgbClr val="840028"/>
+          </a:solidFill>
+          <a:ln w="12700">
+            <a:solidFill>
+              <a:srgbClr val="FFFFFF"/>
+            </a:solidFill>
+            <a:prstDash val="solid"/>
+          </a:ln>
+        </p:spPr>
+      </p:sp>
+      <p:sp>
+        <p:nvSpPr>
+          <p:cNvPr id="72" name="Shape 70"/>
+          <p:cNvSpPr/>
+          <p:nvPr/>
+        </p:nvSpPr>
+        <p:spPr>
+          <a:xfrm>
+            <a:off x="9281160" y="3749040"/>
+            <a:ext cx="1874520" cy="137160"/>
+          </a:xfrm>
+          <a:prstGeom prst="rect">
+            <a:avLst/>
+          </a:prstGeom>
+          <a:solidFill>
+            <a:srgbClr val="840028"/>
+          </a:solidFill>
+          <a:ln w="12700">
+            <a:solidFill>
+              <a:srgbClr val="FFFFFF"/>
+            </a:solidFill>
+            <a:prstDash val="solid"/>
+          </a:ln>
+        </p:spPr>
+      </p:sp>
+      <p:sp>
+        <p:nvSpPr>
+          <p:cNvPr id="73" name="Text 71"/>
+          <p:cNvSpPr/>
+          <p:nvPr/>
+        </p:nvSpPr>
+        <p:spPr>
+          <a:xfrm>
+            <a:off x="777240" y="4343400"/>
+            <a:ext cx="3154680" cy="822960"/>
           </a:xfrm>
           <a:prstGeom prst="rect">
             <a:avLst/>
@@ -3074,453 +6413,195 @@
           <a:bodyPr wrap="square" lIns="0" tIns="0" rIns="0" bIns="0" rtlCol="0" anchor="t"/>
           <a:lstStyle/>
           <a:p>
-            <a:pPr indent="0" marL="0">
-              <a:buNone/>
-            </a:pPr>
-            <a:r>
-              <a:rPr lang="en-US" sz="1500" dirty="0">
-                <a:solidFill>
-                  <a:srgbClr val="6E6E70"/>
+            <a:pPr algn="ctr" indent="0" marL="0">
+              <a:buNone/>
+            </a:pPr>
+            <a:r>
+              <a:rPr lang="en-US" sz="1300" dirty="0">
+                <a:solidFill>
+                  <a:srgbClr val="1A1A1A"/>
                 </a:solidFill>
                 <a:latin typeface="Calibri" pitchFamily="34" charset="0"/>
                 <a:ea typeface="Calibri" pitchFamily="34" charset="-122"/>
                 <a:cs typeface="Calibri" pitchFamily="34" charset="-120"/>
               </a:rPr>
-              <a:t>Storm-surge and weather models that simulate how hurricanes form and move.</a:t>
-            </a:r>
-            <a:endParaRPr lang="en-US" sz="1500" dirty="0"/>
-          </a:p>
-        </p:txBody>
-      </p:sp>
-      <p:sp>
-        <p:nvSpPr>
-          <p:cNvPr id="8" name="Shape 6"/>
-          <p:cNvSpPr/>
-          <p:nvPr/>
-        </p:nvSpPr>
-        <p:spPr>
-          <a:xfrm>
-            <a:off x="6217920" y="2286000"/>
-            <a:ext cx="548640" cy="548640"/>
-          </a:xfrm>
-          <a:prstGeom prst="ellipse">
-            <a:avLst/>
-          </a:prstGeom>
-          <a:solidFill>
-            <a:srgbClr val="840028"/>
-          </a:solidFill>
-          <a:ln w="12700">
-            <a:solidFill>
-              <a:srgbClr val="840028"/>
-            </a:solidFill>
-            <a:prstDash val="solid"/>
-          </a:ln>
-        </p:spPr>
-      </p:sp>
-      <p:sp>
-        <p:nvSpPr>
-          <p:cNvPr id="9" name="Text 7"/>
-          <p:cNvSpPr/>
-          <p:nvPr/>
-        </p:nvSpPr>
-        <p:spPr>
-          <a:xfrm>
-            <a:off x="6217920" y="2286000"/>
-            <a:ext cx="548640" cy="548640"/>
-          </a:xfrm>
-          <a:prstGeom prst="rect">
-            <a:avLst/>
-          </a:prstGeom>
-          <a:noFill/>
-          <a:ln/>
-        </p:spPr>
-        <p:txBody>
-          <a:bodyPr wrap="square" lIns="0" tIns="0" rIns="0" bIns="0" rtlCol="0" anchor="ctr"/>
-          <a:lstStyle/>
+              <a:t>one worker</a:t>
+            </a:r>
+            <a:endParaRPr lang="en-US" sz="1300" dirty="0"/>
+          </a:p>
           <a:p>
             <a:pPr algn="ctr" indent="0" marL="0">
               <a:buNone/>
             </a:pPr>
             <a:r>
-              <a:rPr lang="en-US" sz="2200" b="1" dirty="0">
-                <a:solidFill>
-                  <a:srgbClr val="C1A231"/>
-                </a:solidFill>
-                <a:latin typeface="Arial" pitchFamily="34" charset="0"/>
-                <a:ea typeface="Arial" pitchFamily="34" charset="-122"/>
-                <a:cs typeface="Arial" pitchFamily="34" charset="-120"/>
-              </a:rPr>
-              <a:t>2</a:t>
-            </a:r>
-            <a:endParaRPr lang="en-US" sz="2200" dirty="0"/>
-          </a:p>
-        </p:txBody>
-      </p:sp>
-      <p:sp>
-        <p:nvSpPr>
-          <p:cNvPr id="10" name="Text 8"/>
-          <p:cNvSpPr/>
-          <p:nvPr/>
-        </p:nvSpPr>
-        <p:spPr>
-          <a:xfrm>
-            <a:off x="6995160" y="2240280"/>
-            <a:ext cx="4572000" cy="457200"/>
-          </a:xfrm>
-          <a:prstGeom prst="rect">
-            <a:avLst/>
-          </a:prstGeom>
-          <a:noFill/>
-          <a:ln/>
-        </p:spPr>
-        <p:txBody>
-          <a:bodyPr wrap="square" lIns="0" tIns="0" rIns="0" bIns="0" rtlCol="0" anchor="ctr"/>
-          <a:lstStyle/>
-          <a:p>
-            <a:pPr indent="0" marL="0">
-              <a:buNone/>
-            </a:pPr>
-            <a:r>
-              <a:rPr lang="en-US" sz="2000" b="1" dirty="0">
+              <a:rPr lang="en-US" sz="1300" dirty="0">
                 <a:solidFill>
                   <a:srgbClr val="1A1A1A"/>
-                </a:solidFill>
-                <a:latin typeface="Arial" pitchFamily="34" charset="0"/>
-                <a:ea typeface="Arial" pitchFamily="34" charset="-122"/>
-                <a:cs typeface="Arial" pitchFamily="34" charset="-120"/>
-              </a:rPr>
-              <a:t>Fighting disease</a:t>
-            </a:r>
-            <a:endParaRPr lang="en-US" sz="2000" dirty="0"/>
-          </a:p>
-        </p:txBody>
-      </p:sp>
-      <p:sp>
-        <p:nvSpPr>
-          <p:cNvPr id="11" name="Text 9"/>
-          <p:cNvSpPr/>
-          <p:nvPr/>
-        </p:nvSpPr>
-        <p:spPr>
-          <a:xfrm>
-            <a:off x="6995160" y="2724912"/>
-            <a:ext cx="4617720" cy="1188720"/>
-          </a:xfrm>
-          <a:prstGeom prst="rect">
-            <a:avLst/>
-          </a:prstGeom>
-          <a:noFill/>
-          <a:ln/>
-        </p:spPr>
-        <p:txBody>
-          <a:bodyPr wrap="square" lIns="0" tIns="0" rIns="0" bIns="0" rtlCol="0" anchor="t"/>
-          <a:lstStyle/>
-          <a:p>
-            <a:pPr indent="0" marL="0">
-              <a:buNone/>
-            </a:pPr>
-            <a:r>
-              <a:rPr lang="en-US" sz="1500" dirty="0">
-                <a:solidFill>
-                  <a:srgbClr val="6E6E70"/>
                 </a:solidFill>
                 <a:latin typeface="Calibri" pitchFamily="34" charset="0"/>
                 <a:ea typeface="Calibri" pitchFamily="34" charset="-122"/>
                 <a:cs typeface="Calibri" pitchFamily="34" charset="-120"/>
               </a:rPr>
-              <a:t>Simulating how proteins fold and how drug and vaccine molecules fit together.</a:t>
-            </a:r>
-            <a:endParaRPr lang="en-US" sz="1500" dirty="0"/>
-          </a:p>
-        </p:txBody>
-      </p:sp>
-      <p:sp>
-        <p:nvSpPr>
-          <p:cNvPr id="12" name="Shape 10"/>
-          <p:cNvSpPr/>
-          <p:nvPr/>
-        </p:nvSpPr>
-        <p:spPr>
-          <a:xfrm>
-            <a:off x="640080" y="4434840"/>
-            <a:ext cx="548640" cy="548640"/>
-          </a:xfrm>
-          <a:prstGeom prst="ellipse">
-            <a:avLst/>
-          </a:prstGeom>
-          <a:solidFill>
-            <a:srgbClr val="840028"/>
-          </a:solidFill>
-          <a:ln w="12700">
-            <a:solidFill>
-              <a:srgbClr val="840028"/>
-            </a:solidFill>
-            <a:prstDash val="solid"/>
-          </a:ln>
-        </p:spPr>
-      </p:sp>
-      <p:sp>
-        <p:nvSpPr>
-          <p:cNvPr id="13" name="Text 11"/>
-          <p:cNvSpPr/>
-          <p:nvPr/>
-        </p:nvSpPr>
-        <p:spPr>
-          <a:xfrm>
-            <a:off x="640080" y="4434840"/>
-            <a:ext cx="548640" cy="548640"/>
-          </a:xfrm>
-          <a:prstGeom prst="rect">
-            <a:avLst/>
-          </a:prstGeom>
-          <a:noFill/>
-          <a:ln/>
-        </p:spPr>
-        <p:txBody>
-          <a:bodyPr wrap="square" lIns="0" tIns="0" rIns="0" bIns="0" rtlCol="0" anchor="ctr"/>
+              <a:t>does one calculation at a time</a:t>
+            </a:r>
+            <a:endParaRPr lang="en-US" sz="1300" dirty="0"/>
+          </a:p>
+        </p:txBody>
+      </p:sp>
+      <p:sp>
+        <p:nvSpPr>
+          <p:cNvPr id="74" name="Text 72"/>
+          <p:cNvSpPr/>
+          <p:nvPr/>
+        </p:nvSpPr>
+        <p:spPr>
+          <a:xfrm>
+            <a:off x="4709160" y="4343400"/>
+            <a:ext cx="3154680" cy="822960"/>
+          </a:xfrm>
+          <a:prstGeom prst="rect">
+            <a:avLst/>
+          </a:prstGeom>
+          <a:noFill/>
+          <a:ln/>
+        </p:spPr>
+        <p:txBody>
+          <a:bodyPr wrap="square" lIns="0" tIns="0" rIns="0" bIns="0" rtlCol="0" anchor="t"/>
           <a:lstStyle/>
           <a:p>
             <a:pPr algn="ctr" indent="0" marL="0">
               <a:buNone/>
             </a:pPr>
             <a:r>
-              <a:rPr lang="en-US" sz="2200" b="1" dirty="0">
-                <a:solidFill>
-                  <a:srgbClr val="C1A231"/>
-                </a:solidFill>
-                <a:latin typeface="Arial" pitchFamily="34" charset="0"/>
-                <a:ea typeface="Arial" pitchFamily="34" charset="-122"/>
-                <a:cs typeface="Arial" pitchFamily="34" charset="-120"/>
-              </a:rPr>
-              <a:t>3</a:t>
-            </a:r>
-            <a:endParaRPr lang="en-US" sz="2200" dirty="0"/>
-          </a:p>
-        </p:txBody>
-      </p:sp>
-      <p:sp>
-        <p:nvSpPr>
-          <p:cNvPr id="14" name="Text 12"/>
-          <p:cNvSpPr/>
-          <p:nvPr/>
-        </p:nvSpPr>
-        <p:spPr>
-          <a:xfrm>
-            <a:off x="1417320" y="4389120"/>
-            <a:ext cx="4572000" cy="457200"/>
-          </a:xfrm>
-          <a:prstGeom prst="rect">
-            <a:avLst/>
-          </a:prstGeom>
-          <a:noFill/>
-          <a:ln/>
-        </p:spPr>
-        <p:txBody>
-          <a:bodyPr wrap="square" lIns="0" tIns="0" rIns="0" bIns="0" rtlCol="0" anchor="ctr"/>
-          <a:lstStyle/>
-          <a:p>
-            <a:pPr indent="0" marL="0">
-              <a:buNone/>
-            </a:pPr>
-            <a:r>
-              <a:rPr lang="en-US" sz="2000" b="1" dirty="0">
+              <a:rPr lang="en-US" sz="1300" dirty="0">
                 <a:solidFill>
                   <a:srgbClr val="1A1A1A"/>
-                </a:solidFill>
-                <a:latin typeface="Arial" pitchFamily="34" charset="0"/>
-                <a:ea typeface="Arial" pitchFamily="34" charset="-122"/>
-                <a:cs typeface="Arial" pitchFamily="34" charset="-120"/>
-              </a:rPr>
-              <a:t>Studying black holes</a:t>
-            </a:r>
-            <a:endParaRPr lang="en-US" sz="2000" dirty="0"/>
-          </a:p>
-        </p:txBody>
-      </p:sp>
-      <p:sp>
-        <p:nvSpPr>
-          <p:cNvPr id="15" name="Text 13"/>
-          <p:cNvSpPr/>
-          <p:nvPr/>
-        </p:nvSpPr>
-        <p:spPr>
-          <a:xfrm>
-            <a:off x="1417320" y="4873752"/>
-            <a:ext cx="4617720" cy="1188720"/>
-          </a:xfrm>
-          <a:prstGeom prst="rect">
-            <a:avLst/>
-          </a:prstGeom>
-          <a:noFill/>
-          <a:ln/>
-        </p:spPr>
-        <p:txBody>
-          <a:bodyPr wrap="square" lIns="0" tIns="0" rIns="0" bIns="0" rtlCol="0" anchor="t"/>
-          <a:lstStyle/>
-          <a:p>
-            <a:pPr indent="0" marL="0">
-              <a:buNone/>
-            </a:pPr>
-            <a:r>
-              <a:rPr lang="en-US" sz="1500" dirty="0">
-                <a:solidFill>
-                  <a:srgbClr val="6E6E70"/>
                 </a:solidFill>
                 <a:latin typeface="Calibri" pitchFamily="34" charset="0"/>
                 <a:ea typeface="Calibri" pitchFamily="34" charset="-122"/>
                 <a:cs typeface="Calibri" pitchFamily="34" charset="-120"/>
               </a:rPr>
-              <a:t>Modeling colliding black holes and the gravitational waves they send across the universe.</a:t>
-            </a:r>
-            <a:endParaRPr lang="en-US" sz="1500" dirty="0"/>
-          </a:p>
-        </p:txBody>
-      </p:sp>
-      <p:sp>
-        <p:nvSpPr>
-          <p:cNvPr id="16" name="Shape 14"/>
-          <p:cNvSpPr/>
-          <p:nvPr/>
-        </p:nvSpPr>
-        <p:spPr>
-          <a:xfrm>
-            <a:off x="6217920" y="4434840"/>
-            <a:ext cx="548640" cy="548640"/>
-          </a:xfrm>
-          <a:prstGeom prst="ellipse">
-            <a:avLst/>
-          </a:prstGeom>
-          <a:solidFill>
-            <a:srgbClr val="840028"/>
-          </a:solidFill>
-          <a:ln w="12700">
-            <a:solidFill>
-              <a:srgbClr val="840028"/>
-            </a:solidFill>
-            <a:prstDash val="solid"/>
-          </a:ln>
-        </p:spPr>
-      </p:sp>
-      <p:sp>
-        <p:nvSpPr>
-          <p:cNvPr id="17" name="Text 15"/>
-          <p:cNvSpPr/>
-          <p:nvPr/>
-        </p:nvSpPr>
-        <p:spPr>
-          <a:xfrm>
-            <a:off x="6217920" y="4434840"/>
-            <a:ext cx="548640" cy="548640"/>
-          </a:xfrm>
-          <a:prstGeom prst="rect">
-            <a:avLst/>
-          </a:prstGeom>
-          <a:noFill/>
-          <a:ln/>
-        </p:spPr>
-        <p:txBody>
-          <a:bodyPr wrap="square" lIns="0" tIns="0" rIns="0" bIns="0" rtlCol="0" anchor="ctr"/>
-          <a:lstStyle/>
+              <a:t>one computer</a:t>
+            </a:r>
+            <a:endParaRPr lang="en-US" sz="1300" dirty="0"/>
+          </a:p>
           <a:p>
             <a:pPr algn="ctr" indent="0" marL="0">
               <a:buNone/>
             </a:pPr>
             <a:r>
-              <a:rPr lang="en-US" sz="2200" b="1" dirty="0">
-                <a:solidFill>
-                  <a:srgbClr val="C1A231"/>
-                </a:solidFill>
-                <a:latin typeface="Arial" pitchFamily="34" charset="0"/>
-                <a:ea typeface="Arial" pitchFamily="34" charset="-122"/>
-                <a:cs typeface="Arial" pitchFamily="34" charset="-120"/>
-              </a:rPr>
-              <a:t>4</a:t>
-            </a:r>
-            <a:endParaRPr lang="en-US" sz="2200" dirty="0"/>
-          </a:p>
-        </p:txBody>
-      </p:sp>
-      <p:sp>
-        <p:nvSpPr>
-          <p:cNvPr id="18" name="Text 16"/>
-          <p:cNvSpPr/>
-          <p:nvPr/>
-        </p:nvSpPr>
-        <p:spPr>
-          <a:xfrm>
-            <a:off x="6995160" y="4389120"/>
-            <a:ext cx="4572000" cy="457200"/>
-          </a:xfrm>
-          <a:prstGeom prst="rect">
-            <a:avLst/>
-          </a:prstGeom>
-          <a:noFill/>
-          <a:ln/>
-        </p:spPr>
-        <p:txBody>
-          <a:bodyPr wrap="square" lIns="0" tIns="0" rIns="0" bIns="0" rtlCol="0" anchor="ctr"/>
-          <a:lstStyle/>
-          <a:p>
-            <a:pPr indent="0" marL="0">
-              <a:buNone/>
-            </a:pPr>
-            <a:r>
-              <a:rPr lang="en-US" sz="2000" b="1" dirty="0">
+              <a:rPr lang="en-US" sz="1300" dirty="0">
                 <a:solidFill>
                   <a:srgbClr val="1A1A1A"/>
-                </a:solidFill>
-                <a:latin typeface="Arial" pitchFamily="34" charset="0"/>
-                <a:ea typeface="Arial" pitchFamily="34" charset="-122"/>
-                <a:cs typeface="Arial" pitchFamily="34" charset="-120"/>
-              </a:rPr>
-              <a:t>Mapping the cosmos</a:t>
-            </a:r>
-            <a:endParaRPr lang="en-US" sz="2000" dirty="0"/>
-          </a:p>
-        </p:txBody>
-      </p:sp>
-      <p:sp>
-        <p:nvSpPr>
-          <p:cNvPr id="19" name="Text 17"/>
-          <p:cNvSpPr/>
-          <p:nvPr/>
-        </p:nvSpPr>
-        <p:spPr>
-          <a:xfrm>
-            <a:off x="6995160" y="4873752"/>
-            <a:ext cx="4617720" cy="1188720"/>
-          </a:xfrm>
-          <a:prstGeom prst="rect">
-            <a:avLst/>
-          </a:prstGeom>
-          <a:noFill/>
-          <a:ln/>
-        </p:spPr>
-        <p:txBody>
-          <a:bodyPr wrap="square" lIns="0" tIns="0" rIns="0" bIns="0" rtlCol="0" anchor="t"/>
-          <a:lstStyle/>
-          <a:p>
-            <a:pPr indent="0" marL="0">
-              <a:buNone/>
-            </a:pPr>
-            <a:r>
-              <a:rPr lang="en-US" sz="1500" dirty="0">
-                <a:solidFill>
-                  <a:srgbClr val="6E6E70"/>
                 </a:solidFill>
                 <a:latin typeface="Calibri" pitchFamily="34" charset="0"/>
                 <a:ea typeface="Calibri" pitchFamily="34" charset="-122"/>
                 <a:cs typeface="Calibri" pitchFamily="34" charset="-120"/>
               </a:rPr>
-              <a:t>Astrophysics simulations of how galaxies and the early universe formed.</a:t>
-            </a:r>
-            <a:endParaRPr lang="en-US" sz="1500" dirty="0"/>
-          </a:p>
-        </p:txBody>
-      </p:sp>
-      <p:sp>
-        <p:nvSpPr>
-          <p:cNvPr id="20" name="Text 18"/>
+              <a:t>56 cores together</a:t>
+            </a:r>
+            <a:endParaRPr lang="en-US" sz="1300" dirty="0"/>
+          </a:p>
+        </p:txBody>
+      </p:sp>
+      <p:sp>
+        <p:nvSpPr>
+          <p:cNvPr id="75" name="Text 73"/>
+          <p:cNvSpPr/>
+          <p:nvPr/>
+        </p:nvSpPr>
+        <p:spPr>
+          <a:xfrm>
+            <a:off x="8641080" y="4343400"/>
+            <a:ext cx="3154680" cy="822960"/>
+          </a:xfrm>
+          <a:prstGeom prst="rect">
+            <a:avLst/>
+          </a:prstGeom>
+          <a:noFill/>
+          <a:ln/>
+        </p:spPr>
+        <p:txBody>
+          <a:bodyPr wrap="square" lIns="0" tIns="0" rIns="0" bIns="0" rtlCol="0" anchor="t"/>
+          <a:lstStyle/>
+          <a:p>
+            <a:pPr algn="ctr" indent="0" marL="0">
+              <a:buNone/>
+            </a:pPr>
+            <a:r>
+              <a:rPr lang="en-US" sz="1300" dirty="0">
+                <a:solidFill>
+                  <a:srgbClr val="1A1A1A"/>
+                </a:solidFill>
+                <a:latin typeface="Calibri" pitchFamily="34" charset="0"/>
+                <a:ea typeface="Calibri" pitchFamily="34" charset="-122"/>
+                <a:cs typeface="Calibri" pitchFamily="34" charset="-120"/>
+              </a:rPr>
+              <a:t>the whole supercomputer</a:t>
+            </a:r>
+            <a:endParaRPr lang="en-US" sz="1300" dirty="0"/>
+          </a:p>
+          <a:p>
+            <a:pPr algn="ctr" indent="0" marL="0">
+              <a:buNone/>
+            </a:pPr>
+            <a:r>
+              <a:rPr lang="en-US" sz="1300" dirty="0">
+                <a:solidFill>
+                  <a:srgbClr val="1A1A1A"/>
+                </a:solidFill>
+                <a:latin typeface="Calibri" pitchFamily="34" charset="0"/>
+                <a:ea typeface="Calibri" pitchFamily="34" charset="-122"/>
+                <a:cs typeface="Calibri" pitchFamily="34" charset="-120"/>
+              </a:rPr>
+              <a:t>8,368 nodes in racks</a:t>
+            </a:r>
+            <a:endParaRPr lang="en-US" sz="1300" dirty="0"/>
+          </a:p>
+        </p:txBody>
+      </p:sp>
+      <p:sp>
+        <p:nvSpPr>
+          <p:cNvPr id="76" name="Text 74"/>
+          <p:cNvSpPr/>
+          <p:nvPr/>
+        </p:nvSpPr>
+        <p:spPr>
+          <a:xfrm>
+            <a:off x="640080" y="5486400"/>
+            <a:ext cx="10972800" cy="457200"/>
+          </a:xfrm>
+          <a:prstGeom prst="rect">
+            <a:avLst/>
+          </a:prstGeom>
+          <a:noFill/>
+          <a:ln/>
+        </p:spPr>
+        <p:txBody>
+          <a:bodyPr wrap="square" lIns="0" tIns="0" rIns="0" bIns="0" rtlCol="0" anchor="ctr"/>
+          <a:lstStyle/>
+          <a:p>
+            <a:pPr indent="0" marL="0">
+              <a:buNone/>
+            </a:pPr>
+            <a:r>
+              <a:rPr lang="en-US" sz="1700" i="1" dirty="0">
+                <a:solidFill>
+                  <a:srgbClr val="6E6E70"/>
+                </a:solidFill>
+                <a:latin typeface="Calibri" pitchFamily="34" charset="0"/>
+                <a:ea typeface="Calibri" pitchFamily="34" charset="-122"/>
+                <a:cs typeface="Calibri" pitchFamily="34" charset="-120"/>
+              </a:rPr>
+              <a:t>56 cores make a node.  8,368 nodes make Frontera.</a:t>
+            </a:r>
+            <a:endParaRPr lang="en-US" sz="1700" dirty="0"/>
+          </a:p>
+        </p:txBody>
+      </p:sp>
+      <p:sp>
+        <p:nvSpPr>
+          <p:cNvPr id="77" name="Text 75"/>
           <p:cNvSpPr/>
           <p:nvPr/>
         </p:nvSpPr>
@@ -3622,7 +6703,7 @@
                 <a:ea typeface="Arial" pitchFamily="34" charset="-122"/>
                 <a:cs typeface="Arial" pitchFamily="34" charset="-120"/>
               </a:rPr>
-              <a:t>THE BIG IDEA</a:t>
+              <a:t>THE RULE</a:t>
             </a:r>
             <a:endParaRPr lang="en-US" sz="1300" dirty="0"/>
           </a:p>
@@ -3661,7 +6742,7 @@
                 <a:ea typeface="Arial" pitchFamily="34" charset="-122"/>
                 <a:cs typeface="Arial" pitchFamily="34" charset="-120"/>
               </a:rPr>
-              <a:t>Many workers, at the same time</a:t>
+              <a:t>Two kinds of nodes</a:t>
             </a:r>
             <a:endParaRPr lang="en-US" sz="3200" dirty="0"/>
           </a:p>
@@ -3669,14 +6750,39 @@
       </p:sp>
       <p:sp>
         <p:nvSpPr>
-          <p:cNvPr id="4" name="Text 2"/>
-          <p:cNvSpPr/>
-          <p:nvPr/>
-        </p:nvSpPr>
-        <p:spPr>
-          <a:xfrm>
-            <a:off x="822960" y="2103120"/>
-            <a:ext cx="3200400" cy="365760"/>
+          <p:cNvPr id="4" name="Shape 2"/>
+          <p:cNvSpPr/>
+          <p:nvPr/>
+        </p:nvSpPr>
+        <p:spPr>
+          <a:xfrm>
+            <a:off x="640080" y="2103120"/>
+            <a:ext cx="5349240" cy="2286000"/>
+          </a:xfrm>
+          <a:prstGeom prst="rect">
+            <a:avLst/>
+          </a:prstGeom>
+          <a:solidFill>
+            <a:srgbClr val="EFEDEA"/>
+          </a:solidFill>
+          <a:ln w="12700">
+            <a:solidFill>
+              <a:srgbClr val="EFEDEA"/>
+            </a:solidFill>
+            <a:prstDash val="solid"/>
+          </a:ln>
+        </p:spPr>
+      </p:sp>
+      <p:sp>
+        <p:nvSpPr>
+          <p:cNvPr id="5" name="Text 3"/>
+          <p:cNvSpPr/>
+          <p:nvPr/>
+        </p:nvSpPr>
+        <p:spPr>
+          <a:xfrm>
+            <a:off x="914400" y="2286000"/>
+            <a:ext cx="4754880" cy="365760"/>
           </a:xfrm>
           <a:prstGeom prst="rect">
             <a:avLst/>
@@ -3688,48 +6794,23 @@
           <a:bodyPr wrap="square" lIns="0" tIns="0" rIns="0" bIns="0" rtlCol="0" anchor="ctr"/>
           <a:lstStyle/>
           <a:p>
-            <a:pPr algn="ctr" indent="0" marL="0">
-              <a:buNone/>
-            </a:pPr>
-            <a:r>
-              <a:rPr lang="en-US" sz="1800" b="1" dirty="0">
-                <a:solidFill>
-                  <a:srgbClr val="6E6E70"/>
+            <a:pPr indent="0" marL="0">
+              <a:buNone/>
+            </a:pPr>
+            <a:r>
+              <a:rPr lang="en-US" sz="1900" b="1" dirty="0">
+                <a:solidFill>
+                  <a:srgbClr val="840028"/>
                 </a:solidFill>
                 <a:latin typeface="Arial" pitchFamily="34" charset="0"/>
                 <a:ea typeface="Arial" pitchFamily="34" charset="-122"/>
                 <a:cs typeface="Arial" pitchFamily="34" charset="-120"/>
               </a:rPr>
-              <a:t>One core</a:t>
-            </a:r>
-            <a:endParaRPr lang="en-US" sz="1800" dirty="0"/>
-          </a:p>
-        </p:txBody>
-      </p:sp>
-      <p:sp>
-        <p:nvSpPr>
-          <p:cNvPr id="5" name="Shape 3"/>
-          <p:cNvSpPr/>
-          <p:nvPr/>
-        </p:nvSpPr>
-        <p:spPr>
-          <a:xfrm>
-            <a:off x="1828800" y="2651760"/>
-            <a:ext cx="1280160" cy="1280160"/>
-          </a:xfrm>
-          <a:prstGeom prst="ellipse">
-            <a:avLst/>
-          </a:prstGeom>
-          <a:solidFill>
-            <a:srgbClr val="6E6E70"/>
-          </a:solidFill>
-          <a:ln w="12700">
-            <a:solidFill>
-              <a:srgbClr val="6E6E70"/>
-            </a:solidFill>
-            <a:prstDash val="solid"/>
-          </a:ln>
-        </p:spPr>
+              <a:t>LOGIN NODE</a:t>
+            </a:r>
+            <a:endParaRPr lang="en-US" sz="1900" dirty="0"/>
+          </a:p>
+        </p:txBody>
       </p:sp>
       <p:sp>
         <p:nvSpPr>
@@ -3739,8 +6820,8 @@
         </p:nvSpPr>
         <p:spPr>
           <a:xfrm>
-            <a:off x="822960" y="4114800"/>
-            <a:ext cx="3291840" cy="822960"/>
+            <a:off x="914400" y="2651760"/>
+            <a:ext cx="4754880" cy="320040"/>
           </a:xfrm>
           <a:prstGeom prst="rect">
             <a:avLst/>
@@ -3752,25 +6833,51 @@
           <a:bodyPr wrap="square" lIns="0" tIns="0" rIns="0" bIns="0" rtlCol="0" anchor="ctr"/>
           <a:lstStyle/>
           <a:p>
-            <a:pPr algn="ctr" indent="0" marL="0">
-              <a:buNone/>
-            </a:pPr>
-            <a:r>
-              <a:rPr lang="en-US" sz="1500" dirty="0">
-                <a:solidFill>
-                  <a:srgbClr val="1A1A1A"/>
+            <a:pPr indent="0" marL="0">
+              <a:buNone/>
+            </a:pPr>
+            <a:r>
+              <a:rPr lang="en-US" sz="1500" i="1" dirty="0">
+                <a:solidFill>
+                  <a:srgbClr val="6E6E70"/>
                 </a:solidFill>
                 <a:latin typeface="Calibri" pitchFamily="34" charset="0"/>
                 <a:ea typeface="Calibri" pitchFamily="34" charset="-122"/>
                 <a:cs typeface="Calibri" pitchFamily="34" charset="-120"/>
               </a:rPr>
-              <a:t>does the work</a:t>
+              <a:t>the shared lobby</a:t>
             </a:r>
             <a:endParaRPr lang="en-US" sz="1500" dirty="0"/>
           </a:p>
-          <a:p>
-            <a:pPr algn="ctr" indent="0" marL="0">
-              <a:buNone/>
+        </p:txBody>
+      </p:sp>
+      <p:sp>
+        <p:nvSpPr>
+          <p:cNvPr id="7" name="Text 5"/>
+          <p:cNvSpPr/>
+          <p:nvPr/>
+        </p:nvSpPr>
+        <p:spPr>
+          <a:xfrm>
+            <a:off x="960120" y="3063240"/>
+            <a:ext cx="4754880" cy="1188720"/>
+          </a:xfrm>
+          <a:prstGeom prst="rect">
+            <a:avLst/>
+          </a:prstGeom>
+          <a:noFill/>
+          <a:ln/>
+        </p:spPr>
+        <p:txBody>
+          <a:bodyPr wrap="square" lIns="0" tIns="0" rIns="0" bIns="0" rtlCol="0" anchor="ctr"/>
+          <a:lstStyle/>
+          <a:p>
+            <a:pPr marL="342900" indent="-342900">
+              <a:spcAft>
+                <a:spcPts val="600"/>
+              </a:spcAft>
+              <a:buSzPct val="100000"/>
+              <a:buChar char="•"/>
             </a:pPr>
             <a:r>
               <a:rPr lang="en-US" sz="1500" dirty="0">
@@ -3781,22 +6888,65 @@
                 <a:ea typeface="Calibri" pitchFamily="34" charset="-122"/>
                 <a:cs typeface="Calibri" pitchFamily="34" charset="-120"/>
               </a:rPr>
-              <a:t>one piece at a time</a:t>
+              <a:t>Everyone logs into the same space.</a:t>
             </a:r>
             <a:endParaRPr lang="en-US" sz="1500" dirty="0"/>
           </a:p>
-        </p:txBody>
-      </p:sp>
-      <p:sp>
-        <p:nvSpPr>
-          <p:cNvPr id="7" name="Text 5"/>
-          <p:cNvSpPr/>
-          <p:nvPr/>
-        </p:nvSpPr>
-        <p:spPr>
-          <a:xfrm>
-            <a:off x="4297680" y="2926080"/>
-            <a:ext cx="914400" cy="731520"/>
+          <a:p>
+            <a:pPr marL="342900" indent="-342900">
+              <a:buSzPct val="100000"/>
+              <a:buChar char="•"/>
+            </a:pPr>
+            <a:r>
+              <a:rPr lang="en-US" sz="1500" dirty="0">
+                <a:solidFill>
+                  <a:srgbClr val="1A1A1A"/>
+                </a:solidFill>
+                <a:latin typeface="Calibri" pitchFamily="34" charset="0"/>
+                <a:ea typeface="Calibri" pitchFamily="34" charset="-122"/>
+                <a:cs typeface="Calibri" pitchFamily="34" charset="-120"/>
+              </a:rPr>
+              <a:t>Fine for opening files and small setup.</a:t>
+            </a:r>
+            <a:endParaRPr lang="en-US" sz="1500" dirty="0"/>
+          </a:p>
+        </p:txBody>
+      </p:sp>
+      <p:sp>
+        <p:nvSpPr>
+          <p:cNvPr id="8" name="Shape 6"/>
+          <p:cNvSpPr/>
+          <p:nvPr/>
+        </p:nvSpPr>
+        <p:spPr>
+          <a:xfrm>
+            <a:off x="6446520" y="2103120"/>
+            <a:ext cx="5349240" cy="2286000"/>
+          </a:xfrm>
+          <a:prstGeom prst="rect">
+            <a:avLst/>
+          </a:prstGeom>
+          <a:solidFill>
+            <a:srgbClr val="840028"/>
+          </a:solidFill>
+          <a:ln w="12700">
+            <a:solidFill>
+              <a:srgbClr val="840028"/>
+            </a:solidFill>
+            <a:prstDash val="solid"/>
+          </a:ln>
+        </p:spPr>
+      </p:sp>
+      <p:sp>
+        <p:nvSpPr>
+          <p:cNvPr id="9" name="Text 7"/>
+          <p:cNvSpPr/>
+          <p:nvPr/>
+        </p:nvSpPr>
+        <p:spPr>
+          <a:xfrm>
+            <a:off x="6720840" y="2286000"/>
+            <a:ext cx="4754880" cy="365760"/>
           </a:xfrm>
           <a:prstGeom prst="rect">
             <a:avLst/>
@@ -3808,11 +6958,11 @@
           <a:bodyPr wrap="square" lIns="0" tIns="0" rIns="0" bIns="0" rtlCol="0" anchor="ctr"/>
           <a:lstStyle/>
           <a:p>
-            <a:pPr algn="ctr" indent="0" marL="0">
-              <a:buNone/>
-            </a:pPr>
-            <a:r>
-              <a:rPr lang="en-US" sz="2400" b="1" dirty="0">
+            <a:pPr indent="0" marL="0">
+              <a:buNone/>
+            </a:pPr>
+            <a:r>
+              <a:rPr lang="en-US" sz="1900" b="1" dirty="0">
                 <a:solidFill>
                   <a:srgbClr val="C1A231"/>
                 </a:solidFill>
@@ -3820,22 +6970,22 @@
                 <a:ea typeface="Arial" pitchFamily="34" charset="-122"/>
                 <a:cs typeface="Arial" pitchFamily="34" charset="-120"/>
               </a:rPr>
-              <a:t>vs</a:t>
-            </a:r>
-            <a:endParaRPr lang="en-US" sz="2400" dirty="0"/>
-          </a:p>
-        </p:txBody>
-      </p:sp>
-      <p:sp>
-        <p:nvSpPr>
-          <p:cNvPr id="8" name="Text 6"/>
-          <p:cNvSpPr/>
-          <p:nvPr/>
-        </p:nvSpPr>
-        <p:spPr>
-          <a:xfrm>
-            <a:off x="5669280" y="2103120"/>
-            <a:ext cx="5486400" cy="365760"/>
+              <a:t>COMPUTE NODE</a:t>
+            </a:r>
+            <a:endParaRPr lang="en-US" sz="1900" dirty="0"/>
+          </a:p>
+        </p:txBody>
+      </p:sp>
+      <p:sp>
+        <p:nvSpPr>
+          <p:cNvPr id="10" name="Text 8"/>
+          <p:cNvSpPr/>
+          <p:nvPr/>
+        </p:nvSpPr>
+        <p:spPr>
+          <a:xfrm>
+            <a:off x="6720840" y="2651760"/>
+            <a:ext cx="4754880" cy="320040"/>
           </a:xfrm>
           <a:prstGeom prst="rect">
             <a:avLst/>
@@ -3847,19 +6997,144 @@
           <a:bodyPr wrap="square" lIns="0" tIns="0" rIns="0" bIns="0" rtlCol="0" anchor="ctr"/>
           <a:lstStyle/>
           <a:p>
-            <a:pPr algn="ctr" indent="0" marL="0">
+            <a:pPr indent="0" marL="0">
+              <a:buNone/>
+            </a:pPr>
+            <a:r>
+              <a:rPr lang="en-US" sz="1500" i="1" dirty="0">
+                <a:solidFill>
+                  <a:srgbClr val="F0D9DE"/>
+                </a:solidFill>
+                <a:latin typeface="Calibri" pitchFamily="34" charset="0"/>
+                <a:ea typeface="Calibri" pitchFamily="34" charset="-122"/>
+                <a:cs typeface="Calibri" pitchFamily="34" charset="-120"/>
+              </a:rPr>
+              <a:t>your own workspace</a:t>
+            </a:r>
+            <a:endParaRPr lang="en-US" sz="1500" dirty="0"/>
+          </a:p>
+        </p:txBody>
+      </p:sp>
+      <p:sp>
+        <p:nvSpPr>
+          <p:cNvPr id="11" name="Text 9"/>
+          <p:cNvSpPr/>
+          <p:nvPr/>
+        </p:nvSpPr>
+        <p:spPr>
+          <a:xfrm>
+            <a:off x="6766560" y="3063240"/>
+            <a:ext cx="4754880" cy="1188720"/>
+          </a:xfrm>
+          <a:prstGeom prst="rect">
+            <a:avLst/>
+          </a:prstGeom>
+          <a:noFill/>
+          <a:ln/>
+        </p:spPr>
+        <p:txBody>
+          <a:bodyPr wrap="square" lIns="0" tIns="0" rIns="0" bIns="0" rtlCol="0" anchor="ctr"/>
+          <a:lstStyle/>
+          <a:p>
+            <a:pPr marL="342900" indent="-342900">
+              <a:spcAft>
+                <a:spcPts val="600"/>
+              </a:spcAft>
+              <a:buSzPct val="100000"/>
+              <a:buChar char="•"/>
+            </a:pPr>
+            <a:r>
+              <a:rPr lang="en-US" sz="1500" dirty="0">
+                <a:solidFill>
+                  <a:srgbClr val="FFFFFF"/>
+                </a:solidFill>
+                <a:latin typeface="Calibri" pitchFamily="34" charset="0"/>
+                <a:ea typeface="Calibri" pitchFamily="34" charset="-122"/>
+                <a:cs typeface="Calibri" pitchFamily="34" charset="-120"/>
+              </a:rPr>
+              <a:t>Where all real computation runs.</a:t>
+            </a:r>
+            <a:endParaRPr lang="en-US" sz="1500" dirty="0"/>
+          </a:p>
+          <a:p>
+            <a:pPr marL="342900" indent="-342900">
+              <a:buSzPct val="100000"/>
+              <a:buChar char="•"/>
+            </a:pPr>
+            <a:r>
+              <a:rPr lang="en-US" sz="1500" dirty="0">
+                <a:solidFill>
+                  <a:srgbClr val="FFFFFF"/>
+                </a:solidFill>
+                <a:latin typeface="Calibri" pitchFamily="34" charset="0"/>
+                <a:ea typeface="Calibri" pitchFamily="34" charset="-122"/>
+                <a:cs typeface="Calibri" pitchFamily="34" charset="-120"/>
+              </a:rPr>
+              <a:t>You get your own, away from everyone else.</a:t>
+            </a:r>
+            <a:endParaRPr lang="en-US" sz="1500" dirty="0"/>
+          </a:p>
+        </p:txBody>
+      </p:sp>
+      <p:sp>
+        <p:nvSpPr>
+          <p:cNvPr id="12" name="Shape 10"/>
+          <p:cNvSpPr/>
+          <p:nvPr/>
+        </p:nvSpPr>
+        <p:spPr>
+          <a:xfrm>
+            <a:off x="640080" y="4709160"/>
+            <a:ext cx="11155680" cy="960120"/>
+          </a:xfrm>
+          <a:prstGeom prst="rect">
+            <a:avLst/>
+          </a:prstGeom>
+          <a:solidFill>
+            <a:srgbClr val="5A001C"/>
+          </a:solidFill>
+          <a:ln w="19050">
+            <a:solidFill>
+              <a:srgbClr val="C1A231"/>
+            </a:solidFill>
+            <a:prstDash val="solid"/>
+          </a:ln>
+        </p:spPr>
+      </p:sp>
+      <p:sp>
+        <p:nvSpPr>
+          <p:cNvPr id="13" name="Text 11"/>
+          <p:cNvSpPr/>
+          <p:nvPr/>
+        </p:nvSpPr>
+        <p:spPr>
+          <a:xfrm>
+            <a:off x="960120" y="4709160"/>
+            <a:ext cx="10515600" cy="960120"/>
+          </a:xfrm>
+          <a:prstGeom prst="rect">
+            <a:avLst/>
+          </a:prstGeom>
+          <a:noFill/>
+          <a:ln/>
+        </p:spPr>
+        <p:txBody>
+          <a:bodyPr wrap="square" lIns="0" tIns="0" rIns="0" bIns="0" rtlCol="0" anchor="ctr"/>
+          <a:lstStyle/>
+          <a:p>
+            <a:pPr indent="0" marL="0">
               <a:buNone/>
             </a:pPr>
             <a:r>
               <a:rPr lang="en-US" sz="1800" b="1" dirty="0">
                 <a:solidFill>
-                  <a:srgbClr val="840028"/>
+                  <a:srgbClr val="FFFFFF"/>
                 </a:solidFill>
                 <a:latin typeface="Arial" pitchFamily="34" charset="0"/>
                 <a:ea typeface="Arial" pitchFamily="34" charset="-122"/>
                 <a:cs typeface="Arial" pitchFamily="34" charset="-120"/>
               </a:rPr>
-              <a:t>Many cores</a:t>
+              <a:t>The rule: never run heavy work on a login node. It's the lobby everyone shares. Do real work on a compute node.</a:t>
             </a:r>
             <a:endParaRPr lang="en-US" sz="1800" dirty="0"/>
           </a:p>
@@ -3867,685 +7142,7 @@
       </p:sp>
       <p:sp>
         <p:nvSpPr>
-          <p:cNvPr id="9" name="Shape 7"/>
-          <p:cNvSpPr/>
-          <p:nvPr/>
-        </p:nvSpPr>
-        <p:spPr>
-          <a:xfrm>
-            <a:off x="5943600" y="2651760"/>
-            <a:ext cx="384048" cy="384048"/>
-          </a:xfrm>
-          <a:prstGeom prst="ellipse">
-            <a:avLst/>
-          </a:prstGeom>
-          <a:solidFill>
-            <a:srgbClr val="840028"/>
-          </a:solidFill>
-          <a:ln w="12700">
-            <a:solidFill>
-              <a:srgbClr val="840028"/>
-            </a:solidFill>
-            <a:prstDash val="solid"/>
-          </a:ln>
-        </p:spPr>
-      </p:sp>
-      <p:sp>
-        <p:nvSpPr>
-          <p:cNvPr id="10" name="Shape 8"/>
-          <p:cNvSpPr/>
-          <p:nvPr/>
-        </p:nvSpPr>
-        <p:spPr>
-          <a:xfrm>
-            <a:off x="6473952" y="2651760"/>
-            <a:ext cx="384048" cy="384048"/>
-          </a:xfrm>
-          <a:prstGeom prst="ellipse">
-            <a:avLst/>
-          </a:prstGeom>
-          <a:solidFill>
-            <a:srgbClr val="840028"/>
-          </a:solidFill>
-          <a:ln w="12700">
-            <a:solidFill>
-              <a:srgbClr val="840028"/>
-            </a:solidFill>
-            <a:prstDash val="solid"/>
-          </a:ln>
-        </p:spPr>
-      </p:sp>
-      <p:sp>
-        <p:nvSpPr>
-          <p:cNvPr id="11" name="Shape 9"/>
-          <p:cNvSpPr/>
-          <p:nvPr/>
-        </p:nvSpPr>
-        <p:spPr>
-          <a:xfrm>
-            <a:off x="7004304" y="2651760"/>
-            <a:ext cx="384048" cy="384048"/>
-          </a:xfrm>
-          <a:prstGeom prst="ellipse">
-            <a:avLst/>
-          </a:prstGeom>
-          <a:solidFill>
-            <a:srgbClr val="840028"/>
-          </a:solidFill>
-          <a:ln w="12700">
-            <a:solidFill>
-              <a:srgbClr val="840028"/>
-            </a:solidFill>
-            <a:prstDash val="solid"/>
-          </a:ln>
-        </p:spPr>
-      </p:sp>
-      <p:sp>
-        <p:nvSpPr>
-          <p:cNvPr id="12" name="Shape 10"/>
-          <p:cNvSpPr/>
-          <p:nvPr/>
-        </p:nvSpPr>
-        <p:spPr>
-          <a:xfrm>
-            <a:off x="7534656" y="2651760"/>
-            <a:ext cx="384048" cy="384048"/>
-          </a:xfrm>
-          <a:prstGeom prst="ellipse">
-            <a:avLst/>
-          </a:prstGeom>
-          <a:solidFill>
-            <a:srgbClr val="840028"/>
-          </a:solidFill>
-          <a:ln w="12700">
-            <a:solidFill>
-              <a:srgbClr val="840028"/>
-            </a:solidFill>
-            <a:prstDash val="solid"/>
-          </a:ln>
-        </p:spPr>
-      </p:sp>
-      <p:sp>
-        <p:nvSpPr>
-          <p:cNvPr id="13" name="Shape 11"/>
-          <p:cNvSpPr/>
-          <p:nvPr/>
-        </p:nvSpPr>
-        <p:spPr>
-          <a:xfrm>
-            <a:off x="8065008" y="2651760"/>
-            <a:ext cx="384048" cy="384048"/>
-          </a:xfrm>
-          <a:prstGeom prst="ellipse">
-            <a:avLst/>
-          </a:prstGeom>
-          <a:solidFill>
-            <a:srgbClr val="840028"/>
-          </a:solidFill>
-          <a:ln w="12700">
-            <a:solidFill>
-              <a:srgbClr val="840028"/>
-            </a:solidFill>
-            <a:prstDash val="solid"/>
-          </a:ln>
-        </p:spPr>
-      </p:sp>
-      <p:sp>
-        <p:nvSpPr>
-          <p:cNvPr id="14" name="Shape 12"/>
-          <p:cNvSpPr/>
-          <p:nvPr/>
-        </p:nvSpPr>
-        <p:spPr>
-          <a:xfrm>
-            <a:off x="8595360" y="2651760"/>
-            <a:ext cx="384048" cy="384048"/>
-          </a:xfrm>
-          <a:prstGeom prst="ellipse">
-            <a:avLst/>
-          </a:prstGeom>
-          <a:solidFill>
-            <a:srgbClr val="840028"/>
-          </a:solidFill>
-          <a:ln w="12700">
-            <a:solidFill>
-              <a:srgbClr val="840028"/>
-            </a:solidFill>
-            <a:prstDash val="solid"/>
-          </a:ln>
-        </p:spPr>
-      </p:sp>
-      <p:sp>
-        <p:nvSpPr>
-          <p:cNvPr id="15" name="Shape 13"/>
-          <p:cNvSpPr/>
-          <p:nvPr/>
-        </p:nvSpPr>
-        <p:spPr>
-          <a:xfrm>
-            <a:off x="5943600" y="3182112"/>
-            <a:ext cx="384048" cy="384048"/>
-          </a:xfrm>
-          <a:prstGeom prst="ellipse">
-            <a:avLst/>
-          </a:prstGeom>
-          <a:solidFill>
-            <a:srgbClr val="840028"/>
-          </a:solidFill>
-          <a:ln w="12700">
-            <a:solidFill>
-              <a:srgbClr val="840028"/>
-            </a:solidFill>
-            <a:prstDash val="solid"/>
-          </a:ln>
-        </p:spPr>
-      </p:sp>
-      <p:sp>
-        <p:nvSpPr>
-          <p:cNvPr id="16" name="Shape 14"/>
-          <p:cNvSpPr/>
-          <p:nvPr/>
-        </p:nvSpPr>
-        <p:spPr>
-          <a:xfrm>
-            <a:off x="6473952" y="3182112"/>
-            <a:ext cx="384048" cy="384048"/>
-          </a:xfrm>
-          <a:prstGeom prst="ellipse">
-            <a:avLst/>
-          </a:prstGeom>
-          <a:solidFill>
-            <a:srgbClr val="840028"/>
-          </a:solidFill>
-          <a:ln w="12700">
-            <a:solidFill>
-              <a:srgbClr val="840028"/>
-            </a:solidFill>
-            <a:prstDash val="solid"/>
-          </a:ln>
-        </p:spPr>
-      </p:sp>
-      <p:sp>
-        <p:nvSpPr>
-          <p:cNvPr id="17" name="Shape 15"/>
-          <p:cNvSpPr/>
-          <p:nvPr/>
-        </p:nvSpPr>
-        <p:spPr>
-          <a:xfrm>
-            <a:off x="7004304" y="3182112"/>
-            <a:ext cx="384048" cy="384048"/>
-          </a:xfrm>
-          <a:prstGeom prst="ellipse">
-            <a:avLst/>
-          </a:prstGeom>
-          <a:solidFill>
-            <a:srgbClr val="840028"/>
-          </a:solidFill>
-          <a:ln w="12700">
-            <a:solidFill>
-              <a:srgbClr val="840028"/>
-            </a:solidFill>
-            <a:prstDash val="solid"/>
-          </a:ln>
-        </p:spPr>
-      </p:sp>
-      <p:sp>
-        <p:nvSpPr>
-          <p:cNvPr id="18" name="Shape 16"/>
-          <p:cNvSpPr/>
-          <p:nvPr/>
-        </p:nvSpPr>
-        <p:spPr>
-          <a:xfrm>
-            <a:off x="7534656" y="3182112"/>
-            <a:ext cx="384048" cy="384048"/>
-          </a:xfrm>
-          <a:prstGeom prst="ellipse">
-            <a:avLst/>
-          </a:prstGeom>
-          <a:solidFill>
-            <a:srgbClr val="840028"/>
-          </a:solidFill>
-          <a:ln w="12700">
-            <a:solidFill>
-              <a:srgbClr val="840028"/>
-            </a:solidFill>
-            <a:prstDash val="solid"/>
-          </a:ln>
-        </p:spPr>
-      </p:sp>
-      <p:sp>
-        <p:nvSpPr>
-          <p:cNvPr id="19" name="Shape 17"/>
-          <p:cNvSpPr/>
-          <p:nvPr/>
-        </p:nvSpPr>
-        <p:spPr>
-          <a:xfrm>
-            <a:off x="8065008" y="3182112"/>
-            <a:ext cx="384048" cy="384048"/>
-          </a:xfrm>
-          <a:prstGeom prst="ellipse">
-            <a:avLst/>
-          </a:prstGeom>
-          <a:solidFill>
-            <a:srgbClr val="840028"/>
-          </a:solidFill>
-          <a:ln w="12700">
-            <a:solidFill>
-              <a:srgbClr val="840028"/>
-            </a:solidFill>
-            <a:prstDash val="solid"/>
-          </a:ln>
-        </p:spPr>
-      </p:sp>
-      <p:sp>
-        <p:nvSpPr>
-          <p:cNvPr id="20" name="Shape 18"/>
-          <p:cNvSpPr/>
-          <p:nvPr/>
-        </p:nvSpPr>
-        <p:spPr>
-          <a:xfrm>
-            <a:off x="8595360" y="3182112"/>
-            <a:ext cx="384048" cy="384048"/>
-          </a:xfrm>
-          <a:prstGeom prst="ellipse">
-            <a:avLst/>
-          </a:prstGeom>
-          <a:solidFill>
-            <a:srgbClr val="840028"/>
-          </a:solidFill>
-          <a:ln w="12700">
-            <a:solidFill>
-              <a:srgbClr val="840028"/>
-            </a:solidFill>
-            <a:prstDash val="solid"/>
-          </a:ln>
-        </p:spPr>
-      </p:sp>
-      <p:sp>
-        <p:nvSpPr>
-          <p:cNvPr id="21" name="Shape 19"/>
-          <p:cNvSpPr/>
-          <p:nvPr/>
-        </p:nvSpPr>
-        <p:spPr>
-          <a:xfrm>
-            <a:off x="5943600" y="3712464"/>
-            <a:ext cx="384048" cy="384048"/>
-          </a:xfrm>
-          <a:prstGeom prst="ellipse">
-            <a:avLst/>
-          </a:prstGeom>
-          <a:solidFill>
-            <a:srgbClr val="840028"/>
-          </a:solidFill>
-          <a:ln w="12700">
-            <a:solidFill>
-              <a:srgbClr val="840028"/>
-            </a:solidFill>
-            <a:prstDash val="solid"/>
-          </a:ln>
-        </p:spPr>
-      </p:sp>
-      <p:sp>
-        <p:nvSpPr>
-          <p:cNvPr id="22" name="Shape 20"/>
-          <p:cNvSpPr/>
-          <p:nvPr/>
-        </p:nvSpPr>
-        <p:spPr>
-          <a:xfrm>
-            <a:off x="6473952" y="3712464"/>
-            <a:ext cx="384048" cy="384048"/>
-          </a:xfrm>
-          <a:prstGeom prst="ellipse">
-            <a:avLst/>
-          </a:prstGeom>
-          <a:solidFill>
-            <a:srgbClr val="840028"/>
-          </a:solidFill>
-          <a:ln w="12700">
-            <a:solidFill>
-              <a:srgbClr val="840028"/>
-            </a:solidFill>
-            <a:prstDash val="solid"/>
-          </a:ln>
-        </p:spPr>
-      </p:sp>
-      <p:sp>
-        <p:nvSpPr>
-          <p:cNvPr id="23" name="Shape 21"/>
-          <p:cNvSpPr/>
-          <p:nvPr/>
-        </p:nvSpPr>
-        <p:spPr>
-          <a:xfrm>
-            <a:off x="7004304" y="3712464"/>
-            <a:ext cx="384048" cy="384048"/>
-          </a:xfrm>
-          <a:prstGeom prst="ellipse">
-            <a:avLst/>
-          </a:prstGeom>
-          <a:solidFill>
-            <a:srgbClr val="840028"/>
-          </a:solidFill>
-          <a:ln w="12700">
-            <a:solidFill>
-              <a:srgbClr val="840028"/>
-            </a:solidFill>
-            <a:prstDash val="solid"/>
-          </a:ln>
-        </p:spPr>
-      </p:sp>
-      <p:sp>
-        <p:nvSpPr>
-          <p:cNvPr id="24" name="Shape 22"/>
-          <p:cNvSpPr/>
-          <p:nvPr/>
-        </p:nvSpPr>
-        <p:spPr>
-          <a:xfrm>
-            <a:off x="7534656" y="3712464"/>
-            <a:ext cx="384048" cy="384048"/>
-          </a:xfrm>
-          <a:prstGeom prst="ellipse">
-            <a:avLst/>
-          </a:prstGeom>
-          <a:solidFill>
-            <a:srgbClr val="840028"/>
-          </a:solidFill>
-          <a:ln w="12700">
-            <a:solidFill>
-              <a:srgbClr val="840028"/>
-            </a:solidFill>
-            <a:prstDash val="solid"/>
-          </a:ln>
-        </p:spPr>
-      </p:sp>
-      <p:sp>
-        <p:nvSpPr>
-          <p:cNvPr id="25" name="Shape 23"/>
-          <p:cNvSpPr/>
-          <p:nvPr/>
-        </p:nvSpPr>
-        <p:spPr>
-          <a:xfrm>
-            <a:off x="8065008" y="3712464"/>
-            <a:ext cx="384048" cy="384048"/>
-          </a:xfrm>
-          <a:prstGeom prst="ellipse">
-            <a:avLst/>
-          </a:prstGeom>
-          <a:solidFill>
-            <a:srgbClr val="840028"/>
-          </a:solidFill>
-          <a:ln w="12700">
-            <a:solidFill>
-              <a:srgbClr val="840028"/>
-            </a:solidFill>
-            <a:prstDash val="solid"/>
-          </a:ln>
-        </p:spPr>
-      </p:sp>
-      <p:sp>
-        <p:nvSpPr>
-          <p:cNvPr id="26" name="Shape 24"/>
-          <p:cNvSpPr/>
-          <p:nvPr/>
-        </p:nvSpPr>
-        <p:spPr>
-          <a:xfrm>
-            <a:off x="8595360" y="3712464"/>
-            <a:ext cx="384048" cy="384048"/>
-          </a:xfrm>
-          <a:prstGeom prst="ellipse">
-            <a:avLst/>
-          </a:prstGeom>
-          <a:solidFill>
-            <a:srgbClr val="840028"/>
-          </a:solidFill>
-          <a:ln w="12700">
-            <a:solidFill>
-              <a:srgbClr val="840028"/>
-            </a:solidFill>
-            <a:prstDash val="solid"/>
-          </a:ln>
-        </p:spPr>
-      </p:sp>
-      <p:sp>
-        <p:nvSpPr>
-          <p:cNvPr id="27" name="Shape 25"/>
-          <p:cNvSpPr/>
-          <p:nvPr/>
-        </p:nvSpPr>
-        <p:spPr>
-          <a:xfrm>
-            <a:off x="5943600" y="4242816"/>
-            <a:ext cx="384048" cy="384048"/>
-          </a:xfrm>
-          <a:prstGeom prst="ellipse">
-            <a:avLst/>
-          </a:prstGeom>
-          <a:solidFill>
-            <a:srgbClr val="840028"/>
-          </a:solidFill>
-          <a:ln w="12700">
-            <a:solidFill>
-              <a:srgbClr val="840028"/>
-            </a:solidFill>
-            <a:prstDash val="solid"/>
-          </a:ln>
-        </p:spPr>
-      </p:sp>
-      <p:sp>
-        <p:nvSpPr>
-          <p:cNvPr id="28" name="Shape 26"/>
-          <p:cNvSpPr/>
-          <p:nvPr/>
-        </p:nvSpPr>
-        <p:spPr>
-          <a:xfrm>
-            <a:off x="6473952" y="4242816"/>
-            <a:ext cx="384048" cy="384048"/>
-          </a:xfrm>
-          <a:prstGeom prst="ellipse">
-            <a:avLst/>
-          </a:prstGeom>
-          <a:solidFill>
-            <a:srgbClr val="840028"/>
-          </a:solidFill>
-          <a:ln w="12700">
-            <a:solidFill>
-              <a:srgbClr val="840028"/>
-            </a:solidFill>
-            <a:prstDash val="solid"/>
-          </a:ln>
-        </p:spPr>
-      </p:sp>
-      <p:sp>
-        <p:nvSpPr>
-          <p:cNvPr id="29" name="Shape 27"/>
-          <p:cNvSpPr/>
-          <p:nvPr/>
-        </p:nvSpPr>
-        <p:spPr>
-          <a:xfrm>
-            <a:off x="7004304" y="4242816"/>
-            <a:ext cx="384048" cy="384048"/>
-          </a:xfrm>
-          <a:prstGeom prst="ellipse">
-            <a:avLst/>
-          </a:prstGeom>
-          <a:solidFill>
-            <a:srgbClr val="840028"/>
-          </a:solidFill>
-          <a:ln w="12700">
-            <a:solidFill>
-              <a:srgbClr val="840028"/>
-            </a:solidFill>
-            <a:prstDash val="solid"/>
-          </a:ln>
-        </p:spPr>
-      </p:sp>
-      <p:sp>
-        <p:nvSpPr>
-          <p:cNvPr id="30" name="Shape 28"/>
-          <p:cNvSpPr/>
-          <p:nvPr/>
-        </p:nvSpPr>
-        <p:spPr>
-          <a:xfrm>
-            <a:off x="7534656" y="4242816"/>
-            <a:ext cx="384048" cy="384048"/>
-          </a:xfrm>
-          <a:prstGeom prst="ellipse">
-            <a:avLst/>
-          </a:prstGeom>
-          <a:solidFill>
-            <a:srgbClr val="840028"/>
-          </a:solidFill>
-          <a:ln w="12700">
-            <a:solidFill>
-              <a:srgbClr val="840028"/>
-            </a:solidFill>
-            <a:prstDash val="solid"/>
-          </a:ln>
-        </p:spPr>
-      </p:sp>
-      <p:sp>
-        <p:nvSpPr>
-          <p:cNvPr id="31" name="Shape 29"/>
-          <p:cNvSpPr/>
-          <p:nvPr/>
-        </p:nvSpPr>
-        <p:spPr>
-          <a:xfrm>
-            <a:off x="8065008" y="4242816"/>
-            <a:ext cx="384048" cy="384048"/>
-          </a:xfrm>
-          <a:prstGeom prst="ellipse">
-            <a:avLst/>
-          </a:prstGeom>
-          <a:solidFill>
-            <a:srgbClr val="840028"/>
-          </a:solidFill>
-          <a:ln w="12700">
-            <a:solidFill>
-              <a:srgbClr val="840028"/>
-            </a:solidFill>
-            <a:prstDash val="solid"/>
-          </a:ln>
-        </p:spPr>
-      </p:sp>
-      <p:sp>
-        <p:nvSpPr>
-          <p:cNvPr id="32" name="Shape 30"/>
-          <p:cNvSpPr/>
-          <p:nvPr/>
-        </p:nvSpPr>
-        <p:spPr>
-          <a:xfrm>
-            <a:off x="8595360" y="4242816"/>
-            <a:ext cx="384048" cy="384048"/>
-          </a:xfrm>
-          <a:prstGeom prst="ellipse">
-            <a:avLst/>
-          </a:prstGeom>
-          <a:solidFill>
-            <a:srgbClr val="840028"/>
-          </a:solidFill>
-          <a:ln w="12700">
-            <a:solidFill>
-              <a:srgbClr val="840028"/>
-            </a:solidFill>
-            <a:prstDash val="solid"/>
-          </a:ln>
-        </p:spPr>
-      </p:sp>
-      <p:sp>
-        <p:nvSpPr>
-          <p:cNvPr id="33" name="Text 31"/>
-          <p:cNvSpPr/>
-          <p:nvPr/>
-        </p:nvSpPr>
-        <p:spPr>
-          <a:xfrm>
-            <a:off x="5669280" y="4800600"/>
-            <a:ext cx="5486400" cy="548640"/>
-          </a:xfrm>
-          <a:prstGeom prst="rect">
-            <a:avLst/>
-          </a:prstGeom>
-          <a:noFill/>
-          <a:ln/>
-        </p:spPr>
-        <p:txBody>
-          <a:bodyPr wrap="square" lIns="0" tIns="0" rIns="0" bIns="0" rtlCol="0" anchor="ctr"/>
-          <a:lstStyle/>
-          <a:p>
-            <a:pPr algn="ctr" indent="0" marL="0">
-              <a:buNone/>
-            </a:pPr>
-            <a:r>
-              <a:rPr lang="en-US" sz="1500" dirty="0">
-                <a:solidFill>
-                  <a:srgbClr val="1A1A1A"/>
-                </a:solidFill>
-                <a:latin typeface="Calibri" pitchFamily="34" charset="0"/>
-                <a:ea typeface="Calibri" pitchFamily="34" charset="-122"/>
-                <a:cs typeface="Calibri" pitchFamily="34" charset="-120"/>
-              </a:rPr>
-              <a:t>split the work and finish together, far faster</a:t>
-            </a:r>
-            <a:endParaRPr lang="en-US" sz="1500" dirty="0"/>
-          </a:p>
-        </p:txBody>
-      </p:sp>
-      <p:sp>
-        <p:nvSpPr>
-          <p:cNvPr id="34" name="Text 32"/>
-          <p:cNvSpPr/>
-          <p:nvPr/>
-        </p:nvSpPr>
-        <p:spPr>
-          <a:xfrm>
-            <a:off x="640080" y="5806440"/>
-            <a:ext cx="10972800" cy="548640"/>
-          </a:xfrm>
-          <a:prstGeom prst="rect">
-            <a:avLst/>
-          </a:prstGeom>
-          <a:noFill/>
-          <a:ln/>
-        </p:spPr>
-        <p:txBody>
-          <a:bodyPr wrap="square" lIns="0" tIns="0" rIns="0" bIns="0" rtlCol="0" anchor="ctr"/>
-          <a:lstStyle/>
-          <a:p>
-            <a:pPr indent="0" marL="0">
-              <a:buNone/>
-            </a:pPr>
-            <a:r>
-              <a:rPr lang="en-US" sz="1700" i="1" dirty="0">
-                <a:solidFill>
-                  <a:srgbClr val="6E6E70"/>
-                </a:solidFill>
-                <a:latin typeface="Calibri" pitchFamily="34" charset="0"/>
-                <a:ea typeface="Calibri" pitchFamily="34" charset="-122"/>
-                <a:cs typeface="Calibri" pitchFamily="34" charset="-120"/>
-              </a:rPr>
-              <a:t>That's high-performance computing (HPC). You'll feel the speed difference yourself in a few minutes.</a:t>
-            </a:r>
-            <a:endParaRPr lang="en-US" sz="1700" dirty="0"/>
-          </a:p>
-        </p:txBody>
-      </p:sp>
-      <p:sp>
-        <p:nvSpPr>
-          <p:cNvPr id="35" name="Text 33"/>
+          <p:cNvPr id="14" name="Text 12"/>
           <p:cNvSpPr/>
           <p:nvPr/>
         </p:nvSpPr>
@@ -4647,7 +7244,7 @@
                 <a:ea typeface="Arial" pitchFamily="34" charset="-122"/>
                 <a:cs typeface="Arial" pitchFamily="34" charset="-120"/>
               </a:rPr>
-              <a:t>THE LANGUAGE</a:t>
+              <a:t>HOW YOU USE IT</a:t>
             </a:r>
             <a:endParaRPr lang="en-US" sz="1300" dirty="0"/>
           </a:p>
@@ -4686,7 +7283,7 @@
                 <a:ea typeface="Arial" pitchFamily="34" charset="-122"/>
                 <a:cs typeface="Arial" pitchFamily="34" charset="-120"/>
               </a:rPr>
-              <a:t>Why Python?</a:t>
+              <a:t>Getting onto the compute nodes</a:t>
             </a:r>
             <a:endParaRPr lang="en-US" sz="3200" dirty="0"/>
           </a:p>
@@ -4700,18 +7297,20 @@
         </p:nvSpPr>
         <p:spPr>
           <a:xfrm>
-            <a:off x="640080" y="2286000"/>
-            <a:ext cx="3383280" cy="2331720"/>
-          </a:xfrm>
-          <a:prstGeom prst="rect">
-            <a:avLst/>
-          </a:prstGeom>
-          <a:solidFill>
-            <a:srgbClr val="840028"/>
-          </a:solidFill>
-          <a:ln w="12700">
-            <a:solidFill>
-              <a:srgbClr val="840028"/>
+            <a:off x="640080" y="2057400"/>
+            <a:ext cx="2743200" cy="914400"/>
+          </a:xfrm>
+          <a:prstGeom prst="roundRect">
+            <a:avLst>
+              <a:gd name="adj" fmla="val 8000"/>
+            </a:avLst>
+          </a:prstGeom>
+          <a:solidFill>
+            <a:srgbClr val="EFEDEA"/>
+          </a:solidFill>
+          <a:ln w="12700">
+            <a:solidFill>
+              <a:srgbClr val="6E6E70"/>
             </a:solidFill>
             <a:prstDash val="solid"/>
           </a:ln>
@@ -4725,127 +7324,303 @@
         </p:nvSpPr>
         <p:spPr>
           <a:xfrm>
-            <a:off x="914400" y="2514600"/>
-            <a:ext cx="2834640" cy="868680"/>
-          </a:xfrm>
-          <a:prstGeom prst="rect">
-            <a:avLst/>
-          </a:prstGeom>
-          <a:noFill/>
-          <a:ln/>
-        </p:spPr>
-        <p:txBody>
-          <a:bodyPr wrap="square" lIns="0" tIns="0" rIns="0" bIns="0" rtlCol="0" anchor="b"/>
-          <a:lstStyle/>
-          <a:p>
-            <a:pPr indent="0" marL="0">
-              <a:buNone/>
-            </a:pPr>
-            <a:r>
-              <a:rPr lang="en-US" sz="2200" b="1" dirty="0">
-                <a:solidFill>
-                  <a:srgbClr val="C1A231"/>
+            <a:off x="640080" y="2057400"/>
+            <a:ext cx="2743200" cy="914400"/>
+          </a:xfrm>
+          <a:prstGeom prst="rect">
+            <a:avLst/>
+          </a:prstGeom>
+          <a:noFill/>
+          <a:ln/>
+        </p:spPr>
+        <p:txBody>
+          <a:bodyPr wrap="square" lIns="0" tIns="0" rIns="0" bIns="0" rtlCol="0" anchor="ctr"/>
+          <a:lstStyle/>
+          <a:p>
+            <a:pPr algn="ctr" indent="0" marL="0">
+              <a:buNone/>
+            </a:pPr>
+            <a:r>
+              <a:rPr lang="en-US" sz="1600" b="1" dirty="0">
+                <a:solidFill>
+                  <a:srgbClr val="1A1A1A"/>
                 </a:solidFill>
                 <a:latin typeface="Arial" pitchFamily="34" charset="0"/>
                 <a:ea typeface="Arial" pitchFamily="34" charset="-122"/>
                 <a:cs typeface="Arial" pitchFamily="34" charset="-120"/>
               </a:rPr>
-              <a:t>Readable</a:t>
-            </a:r>
-            <a:endParaRPr lang="en-US" sz="2200" dirty="0"/>
-          </a:p>
-        </p:txBody>
-      </p:sp>
-      <p:sp>
-        <p:nvSpPr>
-          <p:cNvPr id="6" name="Text 4"/>
-          <p:cNvSpPr/>
-          <p:nvPr/>
-        </p:nvSpPr>
-        <p:spPr>
-          <a:xfrm>
-            <a:off x="914400" y="3474720"/>
-            <a:ext cx="2834640" cy="1005840"/>
-          </a:xfrm>
-          <a:prstGeom prst="rect">
-            <a:avLst/>
-          </a:prstGeom>
-          <a:noFill/>
-          <a:ln/>
-        </p:spPr>
-        <p:txBody>
-          <a:bodyPr wrap="square" lIns="0" tIns="0" rIns="0" bIns="0" rtlCol="0" anchor="t"/>
-          <a:lstStyle/>
-          <a:p>
-            <a:pPr indent="0" marL="0">
-              <a:buNone/>
-            </a:pPr>
-            <a:r>
-              <a:rPr lang="en-US" sz="1600" dirty="0">
-                <a:solidFill>
-                  <a:srgbClr val="FFFFFF"/>
+              <a:t>your laptop</a:t>
+            </a:r>
+            <a:endParaRPr lang="en-US" sz="1600" dirty="0"/>
+          </a:p>
+        </p:txBody>
+      </p:sp>
+      <p:sp>
+        <p:nvSpPr>
+          <p:cNvPr id="6" name="Shape 4"/>
+          <p:cNvSpPr/>
+          <p:nvPr/>
+        </p:nvSpPr>
+        <p:spPr>
+          <a:xfrm>
+            <a:off x="4709160" y="2057400"/>
+            <a:ext cx="2743200" cy="914400"/>
+          </a:xfrm>
+          <a:prstGeom prst="rect">
+            <a:avLst/>
+          </a:prstGeom>
+          <a:solidFill>
+            <a:srgbClr val="EFEDEA"/>
+          </a:solidFill>
+          <a:ln w="12700">
+            <a:solidFill>
+              <a:srgbClr val="6E6E70"/>
+            </a:solidFill>
+            <a:prstDash val="solid"/>
+          </a:ln>
+        </p:spPr>
+      </p:sp>
+      <p:sp>
+        <p:nvSpPr>
+          <p:cNvPr id="7" name="Text 5"/>
+          <p:cNvSpPr/>
+          <p:nvPr/>
+        </p:nvSpPr>
+        <p:spPr>
+          <a:xfrm>
+            <a:off x="4709160" y="2057400"/>
+            <a:ext cx="2743200" cy="914400"/>
+          </a:xfrm>
+          <a:prstGeom prst="rect">
+            <a:avLst/>
+          </a:prstGeom>
+          <a:noFill/>
+          <a:ln/>
+        </p:spPr>
+        <p:txBody>
+          <a:bodyPr wrap="square" lIns="0" tIns="0" rIns="0" bIns="0" rtlCol="0" anchor="ctr"/>
+          <a:lstStyle/>
+          <a:p>
+            <a:pPr algn="ctr" indent="0" marL="0">
+              <a:buNone/>
+            </a:pPr>
+            <a:r>
+              <a:rPr lang="en-US" sz="1500" b="1" dirty="0">
+                <a:solidFill>
+                  <a:srgbClr val="1A1A1A"/>
+                </a:solidFill>
+                <a:latin typeface="Arial" pitchFamily="34" charset="0"/>
+                <a:ea typeface="Arial" pitchFamily="34" charset="-122"/>
+                <a:cs typeface="Arial" pitchFamily="34" charset="-120"/>
+              </a:rPr>
+              <a:t>login node</a:t>
+            </a:r>
+            <a:endParaRPr lang="en-US" sz="1500" dirty="0"/>
+          </a:p>
+          <a:p>
+            <a:pPr algn="ctr" indent="0" marL="0">
+              <a:buNone/>
+            </a:pPr>
+            <a:r>
+              <a:rPr lang="en-US" sz="1500" b="1" dirty="0">
+                <a:solidFill>
+                  <a:srgbClr val="1A1A1A"/>
+                </a:solidFill>
+                <a:latin typeface="Arial" pitchFamily="34" charset="0"/>
+                <a:ea typeface="Arial" pitchFamily="34" charset="-122"/>
+                <a:cs typeface="Arial" pitchFamily="34" charset="-120"/>
+              </a:rPr>
+              <a:t>(the lobby)</a:t>
+            </a:r>
+            <a:endParaRPr lang="en-US" sz="1500" dirty="0"/>
+          </a:p>
+        </p:txBody>
+      </p:sp>
+      <p:sp>
+        <p:nvSpPr>
+          <p:cNvPr id="8" name="Shape 6"/>
+          <p:cNvSpPr/>
+          <p:nvPr/>
+        </p:nvSpPr>
+        <p:spPr>
+          <a:xfrm>
+            <a:off x="9418320" y="2057400"/>
+            <a:ext cx="2377440" cy="914400"/>
+          </a:xfrm>
+          <a:prstGeom prst="rect">
+            <a:avLst/>
+          </a:prstGeom>
+          <a:solidFill>
+            <a:srgbClr val="840028"/>
+          </a:solidFill>
+          <a:ln w="12700">
+            <a:solidFill>
+              <a:srgbClr val="840028"/>
+            </a:solidFill>
+            <a:prstDash val="solid"/>
+          </a:ln>
+        </p:spPr>
+      </p:sp>
+      <p:sp>
+        <p:nvSpPr>
+          <p:cNvPr id="9" name="Text 7"/>
+          <p:cNvSpPr/>
+          <p:nvPr/>
+        </p:nvSpPr>
+        <p:spPr>
+          <a:xfrm>
+            <a:off x="9418320" y="2057400"/>
+            <a:ext cx="2377440" cy="914400"/>
+          </a:xfrm>
+          <a:prstGeom prst="rect">
+            <a:avLst/>
+          </a:prstGeom>
+          <a:noFill/>
+          <a:ln/>
+        </p:spPr>
+        <p:txBody>
+          <a:bodyPr wrap="square" lIns="0" tIns="0" rIns="0" bIns="0" rtlCol="0" anchor="ctr"/>
+          <a:lstStyle/>
+          <a:p>
+            <a:pPr algn="ctr" indent="0" marL="0">
+              <a:buNone/>
+            </a:pPr>
+            <a:r>
+              <a:rPr lang="en-US" sz="1500" b="1" dirty="0">
+                <a:solidFill>
+                  <a:srgbClr val="C1A231"/>
+                </a:solidFill>
+                <a:latin typeface="Arial" pitchFamily="34" charset="0"/>
+                <a:ea typeface="Arial" pitchFamily="34" charset="-122"/>
+                <a:cs typeface="Arial" pitchFamily="34" charset="-120"/>
+              </a:rPr>
+              <a:t>compute</a:t>
+            </a:r>
+            <a:endParaRPr lang="en-US" sz="1500" dirty="0"/>
+          </a:p>
+          <a:p>
+            <a:pPr algn="ctr" indent="0" marL="0">
+              <a:buNone/>
+            </a:pPr>
+            <a:r>
+              <a:rPr lang="en-US" sz="1500" b="1" dirty="0">
+                <a:solidFill>
+                  <a:srgbClr val="C1A231"/>
+                </a:solidFill>
+                <a:latin typeface="Arial" pitchFamily="34" charset="0"/>
+                <a:ea typeface="Arial" pitchFamily="34" charset="-122"/>
+                <a:cs typeface="Arial" pitchFamily="34" charset="-120"/>
+              </a:rPr>
+              <a:t>nodes</a:t>
+            </a:r>
+            <a:endParaRPr lang="en-US" sz="1500" dirty="0"/>
+          </a:p>
+        </p:txBody>
+      </p:sp>
+      <p:sp>
+        <p:nvSpPr>
+          <p:cNvPr id="10" name="Text 8"/>
+          <p:cNvSpPr/>
+          <p:nvPr/>
+        </p:nvSpPr>
+        <p:spPr>
+          <a:xfrm>
+            <a:off x="3246120" y="1673352"/>
+            <a:ext cx="1554480" cy="365760"/>
+          </a:xfrm>
+          <a:prstGeom prst="rect">
+            <a:avLst/>
+          </a:prstGeom>
+          <a:noFill/>
+          <a:ln/>
+        </p:spPr>
+        <p:txBody>
+          <a:bodyPr wrap="square" lIns="0" tIns="0" rIns="0" bIns="0" rtlCol="0" anchor="ctr"/>
+          <a:lstStyle/>
+          <a:p>
+            <a:pPr algn="ctr" indent="0" marL="0">
+              <a:buNone/>
+            </a:pPr>
+            <a:r>
+              <a:rPr lang="en-US" sz="1300" b="1" dirty="0">
+                <a:solidFill>
+                  <a:srgbClr val="840028"/>
                 </a:solidFill>
                 <a:latin typeface="Calibri" pitchFamily="34" charset="0"/>
                 <a:ea typeface="Calibri" pitchFamily="34" charset="-122"/>
                 <a:cs typeface="Calibri" pitchFamily="34" charset="-120"/>
               </a:rPr>
-              <a:t>It looks almost like plain English, so you can learn it fast.</a:t>
-            </a:r>
-            <a:endParaRPr lang="en-US" sz="1600" dirty="0"/>
-          </a:p>
-        </p:txBody>
-      </p:sp>
-      <p:sp>
-        <p:nvSpPr>
-          <p:cNvPr id="7" name="Shape 5"/>
-          <p:cNvSpPr/>
-          <p:nvPr/>
-        </p:nvSpPr>
-        <p:spPr>
-          <a:xfrm>
-            <a:off x="4343400" y="2286000"/>
-            <a:ext cx="3383280" cy="2331720"/>
-          </a:xfrm>
-          <a:prstGeom prst="rect">
-            <a:avLst/>
-          </a:prstGeom>
-          <a:solidFill>
-            <a:srgbClr val="840028"/>
-          </a:solidFill>
-          <a:ln w="12700">
-            <a:solidFill>
-              <a:srgbClr val="840028"/>
-            </a:solidFill>
-            <a:prstDash val="solid"/>
-          </a:ln>
-        </p:spPr>
-      </p:sp>
-      <p:sp>
-        <p:nvSpPr>
-          <p:cNvPr id="8" name="Text 6"/>
-          <p:cNvSpPr/>
-          <p:nvPr/>
-        </p:nvSpPr>
-        <p:spPr>
-          <a:xfrm>
-            <a:off x="4617720" y="2514600"/>
-            <a:ext cx="2834640" cy="868680"/>
-          </a:xfrm>
-          <a:prstGeom prst="rect">
-            <a:avLst/>
-          </a:prstGeom>
-          <a:noFill/>
-          <a:ln/>
-        </p:spPr>
-        <p:txBody>
-          <a:bodyPr wrap="square" lIns="0" tIns="0" rIns="0" bIns="0" rtlCol="0" anchor="b"/>
-          <a:lstStyle/>
-          <a:p>
-            <a:pPr indent="0" marL="0">
-              <a:buNone/>
-            </a:pPr>
-            <a:r>
-              <a:rPr lang="en-US" sz="2200" b="1" dirty="0">
+              <a:t>1. log in</a:t>
+            </a:r>
+            <a:endParaRPr lang="en-US" sz="1300" dirty="0"/>
+          </a:p>
+        </p:txBody>
+      </p:sp>
+      <p:sp>
+        <p:nvSpPr>
+          <p:cNvPr id="11" name="Text 9"/>
+          <p:cNvSpPr/>
+          <p:nvPr/>
+        </p:nvSpPr>
+        <p:spPr>
+          <a:xfrm>
+            <a:off x="7315200" y="1673352"/>
+            <a:ext cx="2194560" cy="365760"/>
+          </a:xfrm>
+          <a:prstGeom prst="rect">
+            <a:avLst/>
+          </a:prstGeom>
+          <a:noFill/>
+          <a:ln/>
+        </p:spPr>
+        <p:txBody>
+          <a:bodyPr wrap="square" lIns="0" tIns="0" rIns="0" bIns="0" rtlCol="0" anchor="ctr"/>
+          <a:lstStyle/>
+          <a:p>
+            <a:pPr algn="ctr" indent="0" marL="0">
+              <a:buNone/>
+            </a:pPr>
+            <a:r>
+              <a:rPr lang="en-US" sz="1300" b="1" dirty="0">
+                <a:solidFill>
+                  <a:srgbClr val="840028"/>
+                </a:solidFill>
+                <a:latin typeface="Calibri" pitchFamily="34" charset="0"/>
+                <a:ea typeface="Calibri" pitchFamily="34" charset="-122"/>
+                <a:cs typeface="Calibri" pitchFamily="34" charset="-120"/>
+              </a:rPr>
+              <a:t>2. get a node</a:t>
+            </a:r>
+            <a:endParaRPr lang="en-US" sz="1300" dirty="0"/>
+          </a:p>
+        </p:txBody>
+      </p:sp>
+      <p:sp>
+        <p:nvSpPr>
+          <p:cNvPr id="12" name="Text 10"/>
+          <p:cNvSpPr/>
+          <p:nvPr/>
+        </p:nvSpPr>
+        <p:spPr>
+          <a:xfrm>
+            <a:off x="3794760" y="2148840"/>
+            <a:ext cx="914400" cy="914400"/>
+          </a:xfrm>
+          <a:prstGeom prst="rect">
+            <a:avLst/>
+          </a:prstGeom>
+          <a:noFill/>
+          <a:ln/>
+        </p:spPr>
+        <p:txBody>
+          <a:bodyPr wrap="square" lIns="0" tIns="0" rIns="0" bIns="0" rtlCol="0" anchor="ctr"/>
+          <a:lstStyle/>
+          <a:p>
+            <a:pPr algn="ctr" indent="0" marL="0">
+              <a:buNone/>
+            </a:pPr>
+            <a:r>
+              <a:rPr lang="en-US" sz="3000" b="1" dirty="0">
                 <a:solidFill>
                   <a:srgbClr val="C1A231"/>
                 </a:solidFill>
@@ -4853,22 +7628,164 @@
                 <a:ea typeface="Arial" pitchFamily="34" charset="-122"/>
                 <a:cs typeface="Arial" pitchFamily="34" charset="-120"/>
               </a:rPr>
-              <a:t>Everywhere in science</a:t>
-            </a:r>
-            <a:endParaRPr lang="en-US" sz="2200" dirty="0"/>
-          </a:p>
-        </p:txBody>
-      </p:sp>
-      <p:sp>
-        <p:nvSpPr>
-          <p:cNvPr id="9" name="Text 7"/>
-          <p:cNvSpPr/>
-          <p:nvPr/>
-        </p:nvSpPr>
-        <p:spPr>
-          <a:xfrm>
-            <a:off x="4617720" y="3474720"/>
-            <a:ext cx="2834640" cy="1005840"/>
+              <a:t>→</a:t>
+            </a:r>
+            <a:endParaRPr lang="en-US" sz="3000" dirty="0"/>
+          </a:p>
+        </p:txBody>
+      </p:sp>
+      <p:sp>
+        <p:nvSpPr>
+          <p:cNvPr id="13" name="Text 11"/>
+          <p:cNvSpPr/>
+          <p:nvPr/>
+        </p:nvSpPr>
+        <p:spPr>
+          <a:xfrm>
+            <a:off x="7589520" y="2148840"/>
+            <a:ext cx="1828800" cy="914400"/>
+          </a:xfrm>
+          <a:prstGeom prst="rect">
+            <a:avLst/>
+          </a:prstGeom>
+          <a:noFill/>
+          <a:ln/>
+        </p:spPr>
+        <p:txBody>
+          <a:bodyPr wrap="square" lIns="0" tIns="0" rIns="0" bIns="0" rtlCol="0" anchor="ctr"/>
+          <a:lstStyle/>
+          <a:p>
+            <a:pPr algn="ctr" indent="0" marL="0">
+              <a:buNone/>
+            </a:pPr>
+            <a:r>
+              <a:rPr lang="en-US" sz="3000" b="1" dirty="0">
+                <a:solidFill>
+                  <a:srgbClr val="C1A231"/>
+                </a:solidFill>
+                <a:latin typeface="Arial" pitchFamily="34" charset="0"/>
+                <a:ea typeface="Arial" pitchFamily="34" charset="-122"/>
+                <a:cs typeface="Arial" pitchFamily="34" charset="-120"/>
+              </a:rPr>
+              <a:t>→</a:t>
+            </a:r>
+            <a:endParaRPr lang="en-US" sz="3000" dirty="0"/>
+          </a:p>
+        </p:txBody>
+      </p:sp>
+      <p:sp>
+        <p:nvSpPr>
+          <p:cNvPr id="14" name="Text 12"/>
+          <p:cNvSpPr/>
+          <p:nvPr/>
+        </p:nvSpPr>
+        <p:spPr>
+          <a:xfrm>
+            <a:off x="640080" y="3429000"/>
+            <a:ext cx="10972800" cy="365760"/>
+          </a:xfrm>
+          <a:prstGeom prst="rect">
+            <a:avLst/>
+          </a:prstGeom>
+          <a:noFill/>
+          <a:ln/>
+        </p:spPr>
+        <p:txBody>
+          <a:bodyPr wrap="square" lIns="0" tIns="0" rIns="0" bIns="0" rtlCol="0" anchor="ctr"/>
+          <a:lstStyle/>
+          <a:p>
+            <a:pPr indent="0" marL="0">
+              <a:buNone/>
+            </a:pPr>
+            <a:r>
+              <a:rPr lang="en-US" sz="1800" b="1" dirty="0">
+                <a:solidFill>
+                  <a:srgbClr val="840028"/>
+                </a:solidFill>
+                <a:latin typeface="Arial" pitchFamily="34" charset="0"/>
+                <a:ea typeface="Arial" pitchFamily="34" charset="-122"/>
+                <a:cs typeface="Arial" pitchFamily="34" charset="-120"/>
+              </a:rPr>
+              <a:t>Three ways to get a compute node:</a:t>
+            </a:r>
+            <a:endParaRPr lang="en-US" sz="1800" dirty="0"/>
+          </a:p>
+        </p:txBody>
+      </p:sp>
+      <p:sp>
+        <p:nvSpPr>
+          <p:cNvPr id="15" name="Shape 13"/>
+          <p:cNvSpPr/>
+          <p:nvPr/>
+        </p:nvSpPr>
+        <p:spPr>
+          <a:xfrm>
+            <a:off x="640080" y="3886200"/>
+            <a:ext cx="3566160" cy="1325880"/>
+          </a:xfrm>
+          <a:prstGeom prst="rect">
+            <a:avLst/>
+          </a:prstGeom>
+          <a:solidFill>
+            <a:srgbClr val="EFEDEA"/>
+          </a:solidFill>
+          <a:ln w="12700">
+            <a:solidFill>
+              <a:srgbClr val="EFEDEA"/>
+            </a:solidFill>
+            <a:prstDash val="solid"/>
+          </a:ln>
+        </p:spPr>
+      </p:sp>
+      <p:sp>
+        <p:nvSpPr>
+          <p:cNvPr id="16" name="Text 14"/>
+          <p:cNvSpPr/>
+          <p:nvPr/>
+        </p:nvSpPr>
+        <p:spPr>
+          <a:xfrm>
+            <a:off x="868680" y="4023360"/>
+            <a:ext cx="3108960" cy="411480"/>
+          </a:xfrm>
+          <a:prstGeom prst="rect">
+            <a:avLst/>
+          </a:prstGeom>
+          <a:noFill/>
+          <a:ln/>
+        </p:spPr>
+        <p:txBody>
+          <a:bodyPr wrap="square" lIns="0" tIns="0" rIns="0" bIns="0" rtlCol="0" anchor="ctr"/>
+          <a:lstStyle/>
+          <a:p>
+            <a:pPr indent="0" marL="0">
+              <a:buNone/>
+            </a:pPr>
+            <a:r>
+              <a:rPr lang="en-US" sz="1700" b="1" dirty="0">
+                <a:solidFill>
+                  <a:srgbClr val="840028"/>
+                </a:solidFill>
+                <a:latin typeface="Arial" pitchFamily="34" charset="0"/>
+                <a:ea typeface="Arial" pitchFamily="34" charset="-122"/>
+                <a:cs typeface="Arial" pitchFamily="34" charset="-120"/>
+              </a:rPr>
+              <a:t>idev</a:t>
+            </a:r>
+            <a:endParaRPr lang="en-US" sz="1700" dirty="0"/>
+          </a:p>
+        </p:txBody>
+      </p:sp>
+      <p:sp>
+        <p:nvSpPr>
+          <p:cNvPr id="17" name="Text 15"/>
+          <p:cNvSpPr/>
+          <p:nvPr/>
+        </p:nvSpPr>
+        <p:spPr>
+          <a:xfrm>
+            <a:off x="868680" y="4434840"/>
+            <a:ext cx="3108960" cy="731520"/>
           </a:xfrm>
           <a:prstGeom prst="rect">
             <a:avLst/>
@@ -4884,94 +7801,94 @@
               <a:buNone/>
             </a:pPr>
             <a:r>
-              <a:rPr lang="en-US" sz="1600" dirty="0">
-                <a:solidFill>
-                  <a:srgbClr val="FFFFFF"/>
+              <a:rPr lang="en-US" sz="1350" dirty="0">
+                <a:solidFill>
+                  <a:srgbClr val="1A1A1A"/>
                 </a:solidFill>
                 <a:latin typeface="Calibri" pitchFamily="34" charset="0"/>
                 <a:ea typeface="Calibri" pitchFamily="34" charset="-122"/>
                 <a:cs typeface="Calibri" pitchFamily="34" charset="-120"/>
               </a:rPr>
-              <a:t>The default language for data, AI, biology, physics, and more.</a:t>
-            </a:r>
-            <a:endParaRPr lang="en-US" sz="1600" dirty="0"/>
-          </a:p>
-        </p:txBody>
-      </p:sp>
-      <p:sp>
-        <p:nvSpPr>
-          <p:cNvPr id="10" name="Shape 8"/>
-          <p:cNvSpPr/>
-          <p:nvPr/>
-        </p:nvSpPr>
-        <p:spPr>
-          <a:xfrm>
-            <a:off x="8046720" y="2286000"/>
-            <a:ext cx="3383280" cy="2331720"/>
-          </a:xfrm>
-          <a:prstGeom prst="rect">
-            <a:avLst/>
-          </a:prstGeom>
-          <a:solidFill>
-            <a:srgbClr val="840028"/>
-          </a:solidFill>
-          <a:ln w="12700">
-            <a:solidFill>
-              <a:srgbClr val="840028"/>
-            </a:solidFill>
-            <a:prstDash val="solid"/>
-          </a:ln>
-        </p:spPr>
-      </p:sp>
-      <p:sp>
-        <p:nvSpPr>
-          <p:cNvPr id="11" name="Text 9"/>
-          <p:cNvSpPr/>
-          <p:nvPr/>
-        </p:nvSpPr>
-        <p:spPr>
-          <a:xfrm>
-            <a:off x="8321040" y="2514600"/>
-            <a:ext cx="2834640" cy="868680"/>
-          </a:xfrm>
-          <a:prstGeom prst="rect">
-            <a:avLst/>
-          </a:prstGeom>
-          <a:noFill/>
-          <a:ln/>
-        </p:spPr>
-        <p:txBody>
-          <a:bodyPr wrap="square" lIns="0" tIns="0" rIns="0" bIns="0" rtlCol="0" anchor="b"/>
+              <a:t>An interactive session: grab a node and work on it live.</a:t>
+            </a:r>
+            <a:endParaRPr lang="en-US" sz="1350" dirty="0"/>
+          </a:p>
+        </p:txBody>
+      </p:sp>
+      <p:sp>
+        <p:nvSpPr>
+          <p:cNvPr id="18" name="Shape 16"/>
+          <p:cNvSpPr/>
+          <p:nvPr/>
+        </p:nvSpPr>
+        <p:spPr>
+          <a:xfrm>
+            <a:off x="4434840" y="3886200"/>
+            <a:ext cx="3566160" cy="1325880"/>
+          </a:xfrm>
+          <a:prstGeom prst="rect">
+            <a:avLst/>
+          </a:prstGeom>
+          <a:solidFill>
+            <a:srgbClr val="EFEDEA"/>
+          </a:solidFill>
+          <a:ln w="12700">
+            <a:solidFill>
+              <a:srgbClr val="EFEDEA"/>
+            </a:solidFill>
+            <a:prstDash val="solid"/>
+          </a:ln>
+        </p:spPr>
+      </p:sp>
+      <p:sp>
+        <p:nvSpPr>
+          <p:cNvPr id="19" name="Text 17"/>
+          <p:cNvSpPr/>
+          <p:nvPr/>
+        </p:nvSpPr>
+        <p:spPr>
+          <a:xfrm>
+            <a:off x="4663440" y="4023360"/>
+            <a:ext cx="3108960" cy="411480"/>
+          </a:xfrm>
+          <a:prstGeom prst="rect">
+            <a:avLst/>
+          </a:prstGeom>
+          <a:noFill/>
+          <a:ln/>
+        </p:spPr>
+        <p:txBody>
+          <a:bodyPr wrap="square" lIns="0" tIns="0" rIns="0" bIns="0" rtlCol="0" anchor="ctr"/>
           <a:lstStyle/>
           <a:p>
             <a:pPr indent="0" marL="0">
               <a:buNone/>
             </a:pPr>
             <a:r>
-              <a:rPr lang="en-US" sz="2200" b="1" dirty="0">
-                <a:solidFill>
-                  <a:srgbClr val="C1A231"/>
+              <a:rPr lang="en-US" sz="1700" b="1" dirty="0">
+                <a:solidFill>
+                  <a:srgbClr val="840028"/>
                 </a:solidFill>
                 <a:latin typeface="Arial" pitchFamily="34" charset="0"/>
                 <a:ea typeface="Arial" pitchFamily="34" charset="-122"/>
                 <a:cs typeface="Arial" pitchFamily="34" charset="-120"/>
               </a:rPr>
-              <a:t>Powerful</a:t>
-            </a:r>
-            <a:endParaRPr lang="en-US" sz="2200" dirty="0"/>
-          </a:p>
-        </p:txBody>
-      </p:sp>
-      <p:sp>
-        <p:nvSpPr>
-          <p:cNvPr id="12" name="Text 10"/>
-          <p:cNvSpPr/>
-          <p:nvPr/>
-        </p:nvSpPr>
-        <p:spPr>
-          <a:xfrm>
-            <a:off x="8321040" y="3474720"/>
-            <a:ext cx="2834640" cy="1005840"/>
+              <a:t>reservation</a:t>
+            </a:r>
+            <a:endParaRPr lang="en-US" sz="1700" dirty="0"/>
+          </a:p>
+        </p:txBody>
+      </p:sp>
+      <p:sp>
+        <p:nvSpPr>
+          <p:cNvPr id="20" name="Text 18"/>
+          <p:cNvSpPr/>
+          <p:nvPr/>
+        </p:nvSpPr>
+        <p:spPr>
+          <a:xfrm>
+            <a:off x="4663440" y="4434840"/>
+            <a:ext cx="3108960" cy="731520"/>
           </a:xfrm>
           <a:prstGeom prst="rect">
             <a:avLst/>
@@ -4987,30 +7904,55 @@
               <a:buNone/>
             </a:pPr>
             <a:r>
-              <a:rPr lang="en-US" sz="1600" dirty="0">
-                <a:solidFill>
-                  <a:srgbClr val="FFFFFF"/>
+              <a:rPr lang="en-US" sz="1350" dirty="0">
+                <a:solidFill>
+                  <a:srgbClr val="1A1A1A"/>
                 </a:solidFill>
                 <a:latin typeface="Calibri" pitchFamily="34" charset="0"/>
                 <a:ea typeface="Calibri" pitchFamily="34" charset="-122"/>
                 <a:cs typeface="Calibri" pitchFamily="34" charset="-120"/>
               </a:rPr>
-              <a:t>The same language runs on your laptop and on Frontera.</a:t>
-            </a:r>
-            <a:endParaRPr lang="en-US" sz="1600" dirty="0"/>
-          </a:p>
-        </p:txBody>
-      </p:sp>
-      <p:sp>
-        <p:nvSpPr>
-          <p:cNvPr id="13" name="Text 11"/>
-          <p:cNvSpPr/>
-          <p:nvPr/>
-        </p:nvSpPr>
-        <p:spPr>
-          <a:xfrm>
-            <a:off x="640080" y="5257800"/>
-            <a:ext cx="10972800" cy="640080"/>
+              <a:t>Nodes set aside in advance. We're using one today: Morehouse.</a:t>
+            </a:r>
+            <a:endParaRPr lang="en-US" sz="1350" dirty="0"/>
+          </a:p>
+        </p:txBody>
+      </p:sp>
+      <p:sp>
+        <p:nvSpPr>
+          <p:cNvPr id="21" name="Shape 19"/>
+          <p:cNvSpPr/>
+          <p:nvPr/>
+        </p:nvSpPr>
+        <p:spPr>
+          <a:xfrm>
+            <a:off x="8229600" y="3886200"/>
+            <a:ext cx="3566160" cy="1325880"/>
+          </a:xfrm>
+          <a:prstGeom prst="rect">
+            <a:avLst/>
+          </a:prstGeom>
+          <a:solidFill>
+            <a:srgbClr val="EFEDEA"/>
+          </a:solidFill>
+          <a:ln w="12700">
+            <a:solidFill>
+              <a:srgbClr val="EFEDEA"/>
+            </a:solidFill>
+            <a:prstDash val="solid"/>
+          </a:ln>
+        </p:spPr>
+      </p:sp>
+      <p:sp>
+        <p:nvSpPr>
+          <p:cNvPr id="22" name="Text 20"/>
+          <p:cNvSpPr/>
+          <p:nvPr/>
+        </p:nvSpPr>
+        <p:spPr>
+          <a:xfrm>
+            <a:off x="8458200" y="4023360"/>
+            <a:ext cx="3108960" cy="411480"/>
           </a:xfrm>
           <a:prstGeom prst="rect">
             <a:avLst/>
@@ -5022,27 +7964,105 @@
           <a:bodyPr wrap="square" lIns="0" tIns="0" rIns="0" bIns="0" rtlCol="0" anchor="ctr"/>
           <a:lstStyle/>
           <a:p>
-            <a:pPr algn="ctr" indent="0" marL="0">
-              <a:buNone/>
-            </a:pPr>
-            <a:r>
-              <a:rPr lang="en-US" sz="2400" b="1" dirty="0">
+            <a:pPr indent="0" marL="0">
+              <a:buNone/>
+            </a:pPr>
+            <a:r>
+              <a:rPr lang="en-US" sz="1700" b="1" dirty="0">
                 <a:solidFill>
                   <a:srgbClr val="840028"/>
                 </a:solidFill>
-                <a:latin typeface="Courier New" pitchFamily="34" charset="0"/>
-                <a:ea typeface="Courier New" pitchFamily="34" charset="-122"/>
-                <a:cs typeface="Courier New" pitchFamily="34" charset="-120"/>
-              </a:rPr>
-              <a:t>print("Hello, Frontera")</a:t>
-            </a:r>
-            <a:endParaRPr lang="en-US" sz="2400" dirty="0"/>
-          </a:p>
-        </p:txBody>
-      </p:sp>
-      <p:sp>
-        <p:nvSpPr>
-          <p:cNvPr id="14" name="Text 12"/>
+                <a:latin typeface="Arial" pitchFamily="34" charset="0"/>
+                <a:ea typeface="Arial" pitchFamily="34" charset="-122"/>
+                <a:cs typeface="Arial" pitchFamily="34" charset="-120"/>
+              </a:rPr>
+              <a:t>submit a job</a:t>
+            </a:r>
+            <a:endParaRPr lang="en-US" sz="1700" dirty="0"/>
+          </a:p>
+        </p:txBody>
+      </p:sp>
+      <p:sp>
+        <p:nvSpPr>
+          <p:cNvPr id="23" name="Text 21"/>
+          <p:cNvSpPr/>
+          <p:nvPr/>
+        </p:nvSpPr>
+        <p:spPr>
+          <a:xfrm>
+            <a:off x="8458200" y="4434840"/>
+            <a:ext cx="3108960" cy="731520"/>
+          </a:xfrm>
+          <a:prstGeom prst="rect">
+            <a:avLst/>
+          </a:prstGeom>
+          <a:noFill/>
+          <a:ln/>
+        </p:spPr>
+        <p:txBody>
+          <a:bodyPr wrap="square" lIns="0" tIns="0" rIns="0" bIns="0" rtlCol="0" anchor="t"/>
+          <a:lstStyle/>
+          <a:p>
+            <a:pPr indent="0" marL="0">
+              <a:buNone/>
+            </a:pPr>
+            <a:r>
+              <a:rPr lang="en-US" sz="1350" dirty="0">
+                <a:solidFill>
+                  <a:srgbClr val="1A1A1A"/>
+                </a:solidFill>
+                <a:latin typeface="Calibri" pitchFamily="34" charset="0"/>
+                <a:ea typeface="Calibri" pitchFamily="34" charset="-122"/>
+                <a:cs typeface="Calibri" pitchFamily="34" charset="-120"/>
+              </a:rPr>
+              <a:t>Put a request in the queue; the scheduler runs it when nodes are free.</a:t>
+            </a:r>
+            <a:endParaRPr lang="en-US" sz="1350" dirty="0"/>
+          </a:p>
+        </p:txBody>
+      </p:sp>
+      <p:sp>
+        <p:nvSpPr>
+          <p:cNvPr id="24" name="Text 22"/>
+          <p:cNvSpPr/>
+          <p:nvPr/>
+        </p:nvSpPr>
+        <p:spPr>
+          <a:xfrm>
+            <a:off x="640080" y="5440680"/>
+            <a:ext cx="11155680" cy="548640"/>
+          </a:xfrm>
+          <a:prstGeom prst="rect">
+            <a:avLst/>
+          </a:prstGeom>
+          <a:noFill/>
+          <a:ln/>
+        </p:spPr>
+        <p:txBody>
+          <a:bodyPr wrap="square" lIns="0" tIns="0" rIns="0" bIns="0" rtlCol="0" anchor="ctr"/>
+          <a:lstStyle/>
+          <a:p>
+            <a:pPr indent="0" marL="0">
+              <a:buNone/>
+            </a:pPr>
+            <a:r>
+              <a:rPr lang="en-US" sz="1500" i="1" dirty="0">
+                <a:solidFill>
+                  <a:srgbClr val="6E6E70"/>
+                </a:solidFill>
+                <a:latin typeface="Calibri" pitchFamily="34" charset="0"/>
+                <a:ea typeface="Calibri" pitchFamily="34" charset="-122"/>
+                <a:cs typeface="Calibri" pitchFamily="34" charset="-120"/>
+              </a:rPr>
+              <a:t>A job = “run this program, on this many nodes, for this long.”  Today, TAP used our reservation to get you a node right away.</a:t>
+            </a:r>
+            <a:endParaRPr lang="en-US" sz="1500" dirty="0"/>
+          </a:p>
+        </p:txBody>
+      </p:sp>
+      <p:sp>
+        <p:nvSpPr>
+          <p:cNvPr id="25" name="Text 23"/>
           <p:cNvSpPr/>
           <p:nvPr/>
         </p:nvSpPr>
@@ -5144,7 +8164,7 @@
                 <a:ea typeface="Arial" pitchFamily="34" charset="-122"/>
                 <a:cs typeface="Arial" pitchFamily="34" charset="-120"/>
               </a:rPr>
-              <a:t>THE NEXT HOUR</a:t>
+              <a:t>REAL SCIENCE</a:t>
             </a:r>
             <a:endParaRPr lang="en-US" sz="1300" dirty="0"/>
           </a:p>
@@ -5183,7 +8203,7 @@
                 <a:ea typeface="Arial" pitchFamily="34" charset="-122"/>
                 <a:cs typeface="Arial" pitchFamily="34" charset="-120"/>
               </a:rPr>
-              <a:t>What you'll do today</a:t>
+              <a:t>What researchers actually run on it</a:t>
             </a:r>
             <a:endParaRPr lang="en-US" sz="3200" dirty="0"/>
           </a:p>
@@ -5198,17 +8218,17 @@
         <p:spPr>
           <a:xfrm>
             <a:off x="640080" y="2286000"/>
-            <a:ext cx="640080" cy="640080"/>
+            <a:ext cx="548640" cy="548640"/>
           </a:xfrm>
           <a:prstGeom prst="ellipse">
             <a:avLst/>
           </a:prstGeom>
           <a:solidFill>
-            <a:srgbClr val="C1A231"/>
-          </a:solidFill>
-          <a:ln w="12700">
-            <a:solidFill>
-              <a:srgbClr val="C1A231"/>
+            <a:srgbClr val="840028"/>
+          </a:solidFill>
+          <a:ln w="12700">
+            <a:solidFill>
+              <a:srgbClr val="840028"/>
             </a:solidFill>
             <a:prstDash val="solid"/>
           </a:ln>
@@ -5223,7 +8243,7 @@
         <p:spPr>
           <a:xfrm>
             <a:off x="640080" y="2286000"/>
-            <a:ext cx="640080" cy="640080"/>
+            <a:ext cx="548640" cy="548640"/>
           </a:xfrm>
           <a:prstGeom prst="rect">
             <a:avLst/>
@@ -5239,9 +8259,9 @@
               <a:buNone/>
             </a:pPr>
             <a:r>
-              <a:rPr lang="en-US" sz="2600" b="1" dirty="0">
-                <a:solidFill>
-                  <a:srgbClr val="840028"/>
+              <a:rPr lang="en-US" sz="2200" b="1" dirty="0">
+                <a:solidFill>
+                  <a:srgbClr val="C1A231"/>
                 </a:solidFill>
                 <a:latin typeface="Arial" pitchFamily="34" charset="0"/>
                 <a:ea typeface="Arial" pitchFamily="34" charset="-122"/>
@@ -5249,7 +8269,7 @@
               </a:rPr>
               <a:t>1</a:t>
             </a:r>
-            <a:endParaRPr lang="en-US" sz="2600" dirty="0"/>
+            <a:endParaRPr lang="en-US" sz="2200" dirty="0"/>
           </a:p>
         </p:txBody>
       </p:sp>
@@ -5261,8 +8281,8 @@
         </p:nvSpPr>
         <p:spPr>
           <a:xfrm>
-            <a:off x="1554480" y="2267712"/>
-            <a:ext cx="4754880" cy="640080"/>
+            <a:off x="1417320" y="2240280"/>
+            <a:ext cx="4572000" cy="457200"/>
           </a:xfrm>
           <a:prstGeom prst="rect">
             <a:avLst/>
@@ -5278,7 +8298,7 @@
               <a:buNone/>
             </a:pPr>
             <a:r>
-              <a:rPr lang="en-US" sz="2100" b="1" dirty="0">
+              <a:rPr lang="en-US" sz="2000" b="1" dirty="0">
                 <a:solidFill>
                   <a:srgbClr val="1A1A1A"/>
                 </a:solidFill>
@@ -5286,9 +8306,9 @@
                 <a:ea typeface="Arial" pitchFamily="34" charset="-122"/>
                 <a:cs typeface="Arial" pitchFamily="34" charset="-120"/>
               </a:rPr>
-              <a:t>Prove where you are</a:t>
-            </a:r>
-            <a:endParaRPr lang="en-US" sz="2100" dirty="0"/>
+              <a:t>Hurricanes and weather</a:t>
+            </a:r>
+            <a:endParaRPr lang="en-US" sz="2000" dirty="0"/>
           </a:p>
         </p:txBody>
       </p:sp>
@@ -5300,24 +8320,24 @@
         </p:nvSpPr>
         <p:spPr>
           <a:xfrm>
-            <a:off x="6675120" y="2286000"/>
-            <a:ext cx="4846320" cy="640080"/>
-          </a:xfrm>
-          <a:prstGeom prst="rect">
-            <a:avLst/>
-          </a:prstGeom>
-          <a:noFill/>
-          <a:ln/>
-        </p:spPr>
-        <p:txBody>
-          <a:bodyPr wrap="square" lIns="0" tIns="0" rIns="0" bIns="0" rtlCol="0" anchor="ctr"/>
+            <a:off x="1417320" y="2724912"/>
+            <a:ext cx="4617720" cy="1188720"/>
+          </a:xfrm>
+          <a:prstGeom prst="rect">
+            <a:avLst/>
+          </a:prstGeom>
+          <a:noFill/>
+          <a:ln/>
+        </p:spPr>
+        <p:txBody>
+          <a:bodyPr wrap="square" lIns="0" tIns="0" rIns="0" bIns="0" rtlCol="0" anchor="t"/>
           <a:lstStyle/>
           <a:p>
             <a:pPr indent="0" marL="0">
               <a:buNone/>
             </a:pPr>
             <a:r>
-              <a:rPr lang="en-US" sz="1600" dirty="0">
+              <a:rPr lang="en-US" sz="1500" dirty="0">
                 <a:solidFill>
                   <a:srgbClr val="6E6E70"/>
                 </a:solidFill>
@@ -5325,9 +8345,9 @@
                 <a:ea typeface="Calibri" pitchFamily="34" charset="-122"/>
                 <a:cs typeface="Calibri" pitchFamily="34" charset="-120"/>
               </a:rPr>
-              <a:t>Run a line of code and see the supercomputer answer back.</a:t>
-            </a:r>
-            <a:endParaRPr lang="en-US" sz="1600" dirty="0"/>
+              <a:t>Storm-surge and weather models that simulate how hurricanes form and move.</a:t>
+            </a:r>
+            <a:endParaRPr lang="en-US" sz="1500" dirty="0"/>
           </a:p>
         </p:txBody>
       </p:sp>
@@ -5339,18 +8359,18 @@
         </p:nvSpPr>
         <p:spPr>
           <a:xfrm>
-            <a:off x="640080" y="3337560"/>
-            <a:ext cx="640080" cy="640080"/>
+            <a:off x="6217920" y="2286000"/>
+            <a:ext cx="548640" cy="548640"/>
           </a:xfrm>
           <a:prstGeom prst="ellipse">
             <a:avLst/>
           </a:prstGeom>
           <a:solidFill>
-            <a:srgbClr val="C1A231"/>
-          </a:solidFill>
-          <a:ln w="12700">
-            <a:solidFill>
-              <a:srgbClr val="C1A231"/>
+            <a:srgbClr val="840028"/>
+          </a:solidFill>
+          <a:ln w="12700">
+            <a:solidFill>
+              <a:srgbClr val="840028"/>
             </a:solidFill>
             <a:prstDash val="solid"/>
           </a:ln>
@@ -5364,8 +8384,8 @@
         </p:nvSpPr>
         <p:spPr>
           <a:xfrm>
-            <a:off x="640080" y="3337560"/>
-            <a:ext cx="640080" cy="640080"/>
+            <a:off x="6217920" y="2286000"/>
+            <a:ext cx="548640" cy="548640"/>
           </a:xfrm>
           <a:prstGeom prst="rect">
             <a:avLst/>
@@ -5381,9 +8401,9 @@
               <a:buNone/>
             </a:pPr>
             <a:r>
-              <a:rPr lang="en-US" sz="2600" b="1" dirty="0">
-                <a:solidFill>
-                  <a:srgbClr val="840028"/>
+              <a:rPr lang="en-US" sz="2200" b="1" dirty="0">
+                <a:solidFill>
+                  <a:srgbClr val="C1A231"/>
                 </a:solidFill>
                 <a:latin typeface="Arial" pitchFamily="34" charset="0"/>
                 <a:ea typeface="Arial" pitchFamily="34" charset="-122"/>
@@ -5391,7 +8411,7 @@
               </a:rPr>
               <a:t>2</a:t>
             </a:r>
-            <a:endParaRPr lang="en-US" sz="2600" dirty="0"/>
+            <a:endParaRPr lang="en-US" sz="2200" dirty="0"/>
           </a:p>
         </p:txBody>
       </p:sp>
@@ -5403,8 +8423,8 @@
         </p:nvSpPr>
         <p:spPr>
           <a:xfrm>
-            <a:off x="1554480" y="3319272"/>
-            <a:ext cx="4754880" cy="640080"/>
+            <a:off x="6995160" y="2240280"/>
+            <a:ext cx="4572000" cy="457200"/>
           </a:xfrm>
           <a:prstGeom prst="rect">
             <a:avLst/>
@@ -5420,7 +8440,7 @@
               <a:buNone/>
             </a:pPr>
             <a:r>
-              <a:rPr lang="en-US" sz="2100" b="1" dirty="0">
+              <a:rPr lang="en-US" sz="2000" b="1" dirty="0">
                 <a:solidFill>
                   <a:srgbClr val="1A1A1A"/>
                 </a:solidFill>
@@ -5428,9 +8448,9 @@
                 <a:ea typeface="Arial" pitchFamily="34" charset="-122"/>
                 <a:cs typeface="Arial" pitchFamily="34" charset="-120"/>
               </a:rPr>
-              <a:t>Learn core Python</a:t>
-            </a:r>
-            <a:endParaRPr lang="en-US" sz="2100" dirty="0"/>
+              <a:t>Fighting disease</a:t>
+            </a:r>
+            <a:endParaRPr lang="en-US" sz="2000" dirty="0"/>
           </a:p>
         </p:txBody>
       </p:sp>
@@ -5442,24 +8462,24 @@
         </p:nvSpPr>
         <p:spPr>
           <a:xfrm>
-            <a:off x="6675120" y="3337560"/>
-            <a:ext cx="4846320" cy="640080"/>
-          </a:xfrm>
-          <a:prstGeom prst="rect">
-            <a:avLst/>
-          </a:prstGeom>
-          <a:noFill/>
-          <a:ln/>
-        </p:spPr>
-        <p:txBody>
-          <a:bodyPr wrap="square" lIns="0" tIns="0" rIns="0" bIns="0" rtlCol="0" anchor="ctr"/>
+            <a:off x="6995160" y="2724912"/>
+            <a:ext cx="4617720" cy="1188720"/>
+          </a:xfrm>
+          <a:prstGeom prst="rect">
+            <a:avLst/>
+          </a:prstGeom>
+          <a:noFill/>
+          <a:ln/>
+        </p:spPr>
+        <p:txBody>
+          <a:bodyPr wrap="square" lIns="0" tIns="0" rIns="0" bIns="0" rtlCol="0" anchor="t"/>
           <a:lstStyle/>
           <a:p>
             <a:pPr indent="0" marL="0">
               <a:buNone/>
             </a:pPr>
             <a:r>
-              <a:rPr lang="en-US" sz="1600" dirty="0">
+              <a:rPr lang="en-US" sz="1500" dirty="0">
                 <a:solidFill>
                   <a:srgbClr val="6E6E70"/>
                 </a:solidFill>
@@ -5467,9 +8487,9 @@
                 <a:ea typeface="Calibri" pitchFamily="34" charset="-122"/>
                 <a:cs typeface="Calibri" pitchFamily="34" charset="-120"/>
               </a:rPr>
-              <a:t>Variables, math, text, lists, loops, decisions, and functions.</a:t>
-            </a:r>
-            <a:endParaRPr lang="en-US" sz="1600" dirty="0"/>
+              <a:t>Simulating how proteins fold and how drug and vaccine molecules fit together.</a:t>
+            </a:r>
+            <a:endParaRPr lang="en-US" sz="1500" dirty="0"/>
           </a:p>
         </p:txBody>
       </p:sp>
@@ -5481,18 +8501,18 @@
         </p:nvSpPr>
         <p:spPr>
           <a:xfrm>
-            <a:off x="640080" y="4389120"/>
-            <a:ext cx="640080" cy="640080"/>
+            <a:off x="640080" y="4434840"/>
+            <a:ext cx="548640" cy="548640"/>
           </a:xfrm>
           <a:prstGeom prst="ellipse">
             <a:avLst/>
           </a:prstGeom>
           <a:solidFill>
-            <a:srgbClr val="C1A231"/>
-          </a:solidFill>
-          <a:ln w="12700">
-            <a:solidFill>
-              <a:srgbClr val="C1A231"/>
+            <a:srgbClr val="840028"/>
+          </a:solidFill>
+          <a:ln w="12700">
+            <a:solidFill>
+              <a:srgbClr val="840028"/>
             </a:solidFill>
             <a:prstDash val="solid"/>
           </a:ln>
@@ -5506,8 +8526,8 @@
         </p:nvSpPr>
         <p:spPr>
           <a:xfrm>
-            <a:off x="640080" y="4389120"/>
-            <a:ext cx="640080" cy="640080"/>
+            <a:off x="640080" y="4434840"/>
+            <a:ext cx="548640" cy="548640"/>
           </a:xfrm>
           <a:prstGeom prst="rect">
             <a:avLst/>
@@ -5523,9 +8543,9 @@
               <a:buNone/>
             </a:pPr>
             <a:r>
-              <a:rPr lang="en-US" sz="2600" b="1" dirty="0">
-                <a:solidFill>
-                  <a:srgbClr val="840028"/>
+              <a:rPr lang="en-US" sz="2200" b="1" dirty="0">
+                <a:solidFill>
+                  <a:srgbClr val="C1A231"/>
                 </a:solidFill>
                 <a:latin typeface="Arial" pitchFamily="34" charset="0"/>
                 <a:ea typeface="Arial" pitchFamily="34" charset="-122"/>
@@ -5533,7 +8553,7 @@
               </a:rPr>
               <a:t>3</a:t>
             </a:r>
-            <a:endParaRPr lang="en-US" sz="2600" dirty="0"/>
+            <a:endParaRPr lang="en-US" sz="2200" dirty="0"/>
           </a:p>
         </p:txBody>
       </p:sp>
@@ -5545,8 +8565,8 @@
         </p:nvSpPr>
         <p:spPr>
           <a:xfrm>
-            <a:off x="1554480" y="4370832"/>
-            <a:ext cx="4754880" cy="640080"/>
+            <a:off x="1417320" y="4389120"/>
+            <a:ext cx="4572000" cy="457200"/>
           </a:xfrm>
           <a:prstGeom prst="rect">
             <a:avLst/>
@@ -5562,7 +8582,7 @@
               <a:buNone/>
             </a:pPr>
             <a:r>
-              <a:rPr lang="en-US" sz="2100" b="1" dirty="0">
+              <a:rPr lang="en-US" sz="2000" b="1" dirty="0">
                 <a:solidFill>
                   <a:srgbClr val="1A1A1A"/>
                 </a:solidFill>
@@ -5570,9 +8590,9 @@
                 <a:ea typeface="Arial" pitchFamily="34" charset="-122"/>
                 <a:cs typeface="Arial" pitchFamily="34" charset="-120"/>
               </a:rPr>
-              <a:t>Use many cores at once</a:t>
-            </a:r>
-            <a:endParaRPr lang="en-US" sz="2100" dirty="0"/>
+              <a:t>Studying black holes</a:t>
+            </a:r>
+            <a:endParaRPr lang="en-US" sz="2000" dirty="0"/>
           </a:p>
         </p:txBody>
       </p:sp>
@@ -5584,24 +8604,24 @@
         </p:nvSpPr>
         <p:spPr>
           <a:xfrm>
-            <a:off x="6675120" y="4389120"/>
-            <a:ext cx="4846320" cy="640080"/>
-          </a:xfrm>
-          <a:prstGeom prst="rect">
-            <a:avLst/>
-          </a:prstGeom>
-          <a:noFill/>
-          <a:ln/>
-        </p:spPr>
-        <p:txBody>
-          <a:bodyPr wrap="square" lIns="0" tIns="0" rIns="0" bIns="0" rtlCol="0" anchor="ctr"/>
+            <a:off x="1417320" y="4873752"/>
+            <a:ext cx="4617720" cy="1188720"/>
+          </a:xfrm>
+          <a:prstGeom prst="rect">
+            <a:avLst/>
+          </a:prstGeom>
+          <a:noFill/>
+          <a:ln/>
+        </p:spPr>
+        <p:txBody>
+          <a:bodyPr wrap="square" lIns="0" tIns="0" rIns="0" bIns="0" rtlCol="0" anchor="t"/>
           <a:lstStyle/>
           <a:p>
             <a:pPr indent="0" marL="0">
               <a:buNone/>
             </a:pPr>
             <a:r>
-              <a:rPr lang="en-US" sz="1600" dirty="0">
+              <a:rPr lang="en-US" sz="1500" dirty="0">
                 <a:solidFill>
                   <a:srgbClr val="6E6E70"/>
                 </a:solidFill>
@@ -5609,9 +8629,9 @@
                 <a:ea typeface="Calibri" pitchFamily="34" charset="-122"/>
                 <a:cs typeface="Calibri" pitchFamily="34" charset="-120"/>
               </a:rPr>
-              <a:t>Run a task the slow way, then the fast way, and time the difference.</a:t>
-            </a:r>
-            <a:endParaRPr lang="en-US" sz="1600" dirty="0"/>
+              <a:t>Modeling colliding black holes and the gravitational waves they send across the universe.</a:t>
+            </a:r>
+            <a:endParaRPr lang="en-US" sz="1500" dirty="0"/>
           </a:p>
         </p:txBody>
       </p:sp>
@@ -5623,18 +8643,18 @@
         </p:nvSpPr>
         <p:spPr>
           <a:xfrm>
-            <a:off x="640080" y="5440680"/>
-            <a:ext cx="640080" cy="640080"/>
+            <a:off x="6217920" y="4434840"/>
+            <a:ext cx="548640" cy="548640"/>
           </a:xfrm>
           <a:prstGeom prst="ellipse">
             <a:avLst/>
           </a:prstGeom>
           <a:solidFill>
-            <a:srgbClr val="C1A231"/>
-          </a:solidFill>
-          <a:ln w="12700">
-            <a:solidFill>
-              <a:srgbClr val="C1A231"/>
+            <a:srgbClr val="840028"/>
+          </a:solidFill>
+          <a:ln w="12700">
+            <a:solidFill>
+              <a:srgbClr val="840028"/>
             </a:solidFill>
             <a:prstDash val="solid"/>
           </a:ln>
@@ -5648,8 +8668,8 @@
         </p:nvSpPr>
         <p:spPr>
           <a:xfrm>
-            <a:off x="640080" y="5440680"/>
-            <a:ext cx="640080" cy="640080"/>
+            <a:off x="6217920" y="4434840"/>
+            <a:ext cx="548640" cy="548640"/>
           </a:xfrm>
           <a:prstGeom prst="rect">
             <a:avLst/>
@@ -5665,9 +8685,9 @@
               <a:buNone/>
             </a:pPr>
             <a:r>
-              <a:rPr lang="en-US" sz="2600" b="1" dirty="0">
-                <a:solidFill>
-                  <a:srgbClr val="840028"/>
+              <a:rPr lang="en-US" sz="2200" b="1" dirty="0">
+                <a:solidFill>
+                  <a:srgbClr val="C1A231"/>
                 </a:solidFill>
                 <a:latin typeface="Arial" pitchFamily="34" charset="0"/>
                 <a:ea typeface="Arial" pitchFamily="34" charset="-122"/>
@@ -5675,7 +8695,7 @@
               </a:rPr>
               <a:t>4</a:t>
             </a:r>
-            <a:endParaRPr lang="en-US" sz="2600" dirty="0"/>
+            <a:endParaRPr lang="en-US" sz="2200" dirty="0"/>
           </a:p>
         </p:txBody>
       </p:sp>
@@ -5687,8 +8707,8 @@
         </p:nvSpPr>
         <p:spPr>
           <a:xfrm>
-            <a:off x="1554480" y="5422392"/>
-            <a:ext cx="4754880" cy="640080"/>
+            <a:off x="6995160" y="4389120"/>
+            <a:ext cx="4572000" cy="457200"/>
           </a:xfrm>
           <a:prstGeom prst="rect">
             <a:avLst/>
@@ -5704,7 +8724,7 @@
               <a:buNone/>
             </a:pPr>
             <a:r>
-              <a:rPr lang="en-US" sz="2100" b="1" dirty="0">
+              <a:rPr lang="en-US" sz="2000" b="1" dirty="0">
                 <a:solidFill>
                   <a:srgbClr val="1A1A1A"/>
                 </a:solidFill>
@@ -5712,9 +8732,9 @@
                 <a:ea typeface="Arial" pitchFamily="34" charset="-122"/>
                 <a:cs typeface="Arial" pitchFamily="34" charset="-120"/>
               </a:rPr>
-              <a:t>Meet the ideas of HPC</a:t>
-            </a:r>
-            <a:endParaRPr lang="en-US" sz="2100" dirty="0"/>
+              <a:t>Mapping the cosmos</a:t>
+            </a:r>
+            <a:endParaRPr lang="en-US" sz="2000" dirty="0"/>
           </a:p>
         </p:txBody>
       </p:sp>
@@ -5726,24 +8746,24 @@
         </p:nvSpPr>
         <p:spPr>
           <a:xfrm>
-            <a:off x="6675120" y="5440680"/>
-            <a:ext cx="4846320" cy="640080"/>
-          </a:xfrm>
-          <a:prstGeom prst="rect">
-            <a:avLst/>
-          </a:prstGeom>
-          <a:noFill/>
-          <a:ln/>
-        </p:spPr>
-        <p:txBody>
-          <a:bodyPr wrap="square" lIns="0" tIns="0" rIns="0" bIns="0" rtlCol="0" anchor="ctr"/>
+            <a:off x="6995160" y="4873752"/>
+            <a:ext cx="4617720" cy="1188720"/>
+          </a:xfrm>
+          <a:prstGeom prst="rect">
+            <a:avLst/>
+          </a:prstGeom>
+          <a:noFill/>
+          <a:ln/>
+        </p:spPr>
+        <p:txBody>
+          <a:bodyPr wrap="square" lIns="0" tIns="0" rIns="0" bIns="0" rtlCol="0" anchor="t"/>
           <a:lstStyle/>
           <a:p>
             <a:pPr indent="0" marL="0">
               <a:buNone/>
             </a:pPr>
             <a:r>
-              <a:rPr lang="en-US" sz="1600" dirty="0">
+              <a:rPr lang="en-US" sz="1500" dirty="0">
                 <a:solidFill>
                   <a:srgbClr val="6E6E70"/>
                 </a:solidFill>
@@ -5751,9 +8771,9 @@
                 <a:ea typeface="Calibri" pitchFamily="34" charset="-122"/>
                 <a:cs typeface="Calibri" pitchFamily="34" charset="-120"/>
               </a:rPr>
-              <a:t>Nodes, files, and how big jobs get scheduled.</a:t>
-            </a:r>
-            <a:endParaRPr lang="en-US" sz="1600" dirty="0"/>
+              <a:t>Astrophysics simulations of how galaxies and the early universe formed.</a:t>
+            </a:r>
+            <a:endParaRPr lang="en-US" sz="1500" dirty="0"/>
           </a:p>
         </p:txBody>
       </p:sp>
@@ -5810,7 +8830,7 @@
     <p:bg>
       <p:bgPr>
         <a:solidFill>
-          <a:srgbClr val="840028"/>
+          <a:srgbClr val="FFFFFF"/>
         </a:solidFill>
       </p:bgPr>
     </p:bg>
@@ -5861,7 +8881,7 @@
                 <a:ea typeface="Arial" pitchFamily="34" charset="-122"/>
                 <a:cs typeface="Arial" pitchFamily="34" charset="-120"/>
               </a:rPr>
-              <a:t>HOW THIS WORKS</a:t>
+              <a:t>THE BIG IDEA</a:t>
             </a:r>
             <a:endParaRPr lang="en-US" sz="1300" dirty="0"/>
           </a:p>
@@ -5875,8 +8895,8 @@
         </p:nvSpPr>
         <p:spPr>
           <a:xfrm>
-            <a:off x="640080" y="1463040"/>
-            <a:ext cx="10972800" cy="1645920"/>
+            <a:off x="640080" y="868680"/>
+            <a:ext cx="10972800" cy="822960"/>
           </a:xfrm>
           <a:prstGeom prst="rect">
             <a:avLst/>
@@ -5889,56 +8909,97 @@
           <a:lstStyle/>
           <a:p>
             <a:pPr indent="0" marL="0">
-              <a:lnSpc>
-                <a:spcPts val="4600"/>
-              </a:lnSpc>
-              <a:buNone/>
-            </a:pPr>
-            <a:r>
-              <a:rPr lang="en-US" sz="4000" b="1" dirty="0">
-                <a:solidFill>
-                  <a:srgbClr val="FFFFFF"/>
+              <a:buNone/>
+            </a:pPr>
+            <a:r>
+              <a:rPr lang="en-US" sz="3200" b="1" dirty="0">
+                <a:solidFill>
+                  <a:srgbClr val="840028"/>
                 </a:solidFill>
                 <a:latin typeface="Arial" pitchFamily="34" charset="0"/>
                 <a:ea typeface="Arial" pitchFamily="34" charset="-122"/>
                 <a:cs typeface="Arial" pitchFamily="34" charset="-120"/>
               </a:rPr>
-              <a:t>You won't watch a demo.</a:t>
-            </a:r>
-            <a:endParaRPr lang="en-US" sz="4000" dirty="0"/>
-          </a:p>
-          <a:p>
-            <a:pPr indent="0" marL="0">
-              <a:lnSpc>
-                <a:spcPts val="4600"/>
-              </a:lnSpc>
-              <a:buNone/>
-            </a:pPr>
-            <a:r>
-              <a:rPr lang="en-US" sz="4000" b="1" dirty="0">
-                <a:solidFill>
-                  <a:srgbClr val="FFFFFF"/>
+              <a:t>Many workers, at the same time</a:t>
+            </a:r>
+            <a:endParaRPr lang="en-US" sz="3200" dirty="0"/>
+          </a:p>
+        </p:txBody>
+      </p:sp>
+      <p:sp>
+        <p:nvSpPr>
+          <p:cNvPr id="4" name="Text 2"/>
+          <p:cNvSpPr/>
+          <p:nvPr/>
+        </p:nvSpPr>
+        <p:spPr>
+          <a:xfrm>
+            <a:off x="822960" y="2103120"/>
+            <a:ext cx="3200400" cy="365760"/>
+          </a:xfrm>
+          <a:prstGeom prst="rect">
+            <a:avLst/>
+          </a:prstGeom>
+          <a:noFill/>
+          <a:ln/>
+        </p:spPr>
+        <p:txBody>
+          <a:bodyPr wrap="square" lIns="0" tIns="0" rIns="0" bIns="0" rtlCol="0" anchor="ctr"/>
+          <a:lstStyle/>
+          <a:p>
+            <a:pPr algn="ctr" indent="0" marL="0">
+              <a:buNone/>
+            </a:pPr>
+            <a:r>
+              <a:rPr lang="en-US" sz="1800" b="1" dirty="0">
+                <a:solidFill>
+                  <a:srgbClr val="6E6E70"/>
                 </a:solidFill>
                 <a:latin typeface="Arial" pitchFamily="34" charset="0"/>
                 <a:ea typeface="Arial" pitchFamily="34" charset="-122"/>
                 <a:cs typeface="Arial" pitchFamily="34" charset="-120"/>
               </a:rPr>
-              <a:t>You'll be on the machine.</a:t>
-            </a:r>
-            <a:endParaRPr lang="en-US" sz="4000" dirty="0"/>
-          </a:p>
-        </p:txBody>
-      </p:sp>
-      <p:sp>
-        <p:nvSpPr>
-          <p:cNvPr id="4" name="Text 2"/>
-          <p:cNvSpPr/>
-          <p:nvPr/>
-        </p:nvSpPr>
-        <p:spPr>
-          <a:xfrm>
-            <a:off x="640080" y="3383280"/>
-            <a:ext cx="10515600" cy="1005840"/>
+              <a:t>One core</a:t>
+            </a:r>
+            <a:endParaRPr lang="en-US" sz="1800" dirty="0"/>
+          </a:p>
+        </p:txBody>
+      </p:sp>
+      <p:sp>
+        <p:nvSpPr>
+          <p:cNvPr id="5" name="Shape 3"/>
+          <p:cNvSpPr/>
+          <p:nvPr/>
+        </p:nvSpPr>
+        <p:spPr>
+          <a:xfrm>
+            <a:off x="1828800" y="2651760"/>
+            <a:ext cx="1280160" cy="1280160"/>
+          </a:xfrm>
+          <a:prstGeom prst="ellipse">
+            <a:avLst/>
+          </a:prstGeom>
+          <a:solidFill>
+            <a:srgbClr val="6E6E70"/>
+          </a:solidFill>
+          <a:ln w="12700">
+            <a:solidFill>
+              <a:srgbClr val="6E6E70"/>
+            </a:solidFill>
+            <a:prstDash val="solid"/>
+          </a:ln>
+        </p:spPr>
+      </p:sp>
+      <p:sp>
+        <p:nvSpPr>
+          <p:cNvPr id="6" name="Text 4"/>
+          <p:cNvSpPr/>
+          <p:nvPr/>
+        </p:nvSpPr>
+        <p:spPr>
+          <a:xfrm>
+            <a:off x="822960" y="4114800"/>
+            <a:ext cx="3291840" cy="822960"/>
           </a:xfrm>
           <a:prstGeom prst="rect">
             <a:avLst/>
@@ -5950,76 +9011,51 @@
           <a:bodyPr wrap="square" lIns="0" tIns="0" rIns="0" bIns="0" rtlCol="0" anchor="ctr"/>
           <a:lstStyle/>
           <a:p>
-            <a:pPr indent="0" marL="0">
-              <a:buNone/>
-            </a:pPr>
-            <a:r>
-              <a:rPr lang="en-US" sz="2000" dirty="0">
-                <a:solidFill>
-                  <a:srgbClr val="F0E4E8"/>
+            <a:pPr algn="ctr" indent="0" marL="0">
+              <a:buNone/>
+            </a:pPr>
+            <a:r>
+              <a:rPr lang="en-US" sz="1500" dirty="0">
+                <a:solidFill>
+                  <a:srgbClr val="1A1A1A"/>
                 </a:solidFill>
                 <a:latin typeface="Calibri" pitchFamily="34" charset="0"/>
                 <a:ea typeface="Calibri" pitchFamily="34" charset="-122"/>
                 <a:cs typeface="Calibri" pitchFamily="34" charset="-120"/>
               </a:rPr>
-              <a:t>We use the TACC Analysis Portal (TAP) to open a Jupyter notebook</a:t>
-            </a:r>
-            <a:endParaRPr lang="en-US" sz="2000" dirty="0"/>
-          </a:p>
-          <a:p>
-            <a:pPr indent="0" marL="0">
-              <a:buNone/>
-            </a:pPr>
-            <a:r>
-              <a:rPr lang="en-US" sz="2000" dirty="0">
-                <a:solidFill>
-                  <a:srgbClr val="F0E4E8"/>
+              <a:t>does the work</a:t>
+            </a:r>
+            <a:endParaRPr lang="en-US" sz="1500" dirty="0"/>
+          </a:p>
+          <a:p>
+            <a:pPr algn="ctr" indent="0" marL="0">
+              <a:buNone/>
+            </a:pPr>
+            <a:r>
+              <a:rPr lang="en-US" sz="1500" dirty="0">
+                <a:solidFill>
+                  <a:srgbClr val="1A1A1A"/>
                 </a:solidFill>
                 <a:latin typeface="Calibri" pitchFamily="34" charset="0"/>
                 <a:ea typeface="Calibri" pitchFamily="34" charset="-122"/>
                 <a:cs typeface="Calibri" pitchFamily="34" charset="-120"/>
               </a:rPr>
-              <a:t>directly on a Frontera compute node, right in your web browser.</a:t>
-            </a:r>
-            <a:endParaRPr lang="en-US" sz="2000" dirty="0"/>
-          </a:p>
-        </p:txBody>
-      </p:sp>
-      <p:sp>
-        <p:nvSpPr>
-          <p:cNvPr id="5" name="Shape 3"/>
-          <p:cNvSpPr/>
-          <p:nvPr/>
-        </p:nvSpPr>
-        <p:spPr>
-          <a:xfrm>
-            <a:off x="640080" y="4663440"/>
-            <a:ext cx="10881360" cy="1280160"/>
-          </a:xfrm>
-          <a:prstGeom prst="rect">
-            <a:avLst/>
-          </a:prstGeom>
-          <a:solidFill>
-            <a:srgbClr val="5A001C"/>
-          </a:solidFill>
-          <a:ln w="19050">
-            <a:solidFill>
-              <a:srgbClr val="C1A231"/>
-            </a:solidFill>
-            <a:prstDash val="solid"/>
-          </a:ln>
-        </p:spPr>
-      </p:sp>
-      <p:sp>
-        <p:nvSpPr>
-          <p:cNvPr id="6" name="Text 4"/>
-          <p:cNvSpPr/>
-          <p:nvPr/>
-        </p:nvSpPr>
-        <p:spPr>
-          <a:xfrm>
-            <a:off x="960120" y="4800600"/>
-            <a:ext cx="10241280" cy="1005840"/>
+              <a:t>one piece at a time</a:t>
+            </a:r>
+            <a:endParaRPr lang="en-US" sz="1500" dirty="0"/>
+          </a:p>
+        </p:txBody>
+      </p:sp>
+      <p:sp>
+        <p:nvSpPr>
+          <p:cNvPr id="7" name="Text 5"/>
+          <p:cNvSpPr/>
+          <p:nvPr/>
+        </p:nvSpPr>
+        <p:spPr>
+          <a:xfrm>
+            <a:off x="4297680" y="2926080"/>
+            <a:ext cx="914400" cy="731520"/>
           </a:xfrm>
           <a:prstGeom prst="rect">
             <a:avLst/>
@@ -6031,27 +9067,744 @@
           <a:bodyPr wrap="square" lIns="0" tIns="0" rIns="0" bIns="0" rtlCol="0" anchor="ctr"/>
           <a:lstStyle/>
           <a:p>
-            <a:pPr indent="0" marL="0">
-              <a:buNone/>
-            </a:pPr>
-            <a:r>
-              <a:rPr lang="en-US" sz="1800" i="1" dirty="0">
+            <a:pPr algn="ctr" indent="0" marL="0">
+              <a:buNone/>
+            </a:pPr>
+            <a:r>
+              <a:rPr lang="en-US" sz="2400" b="1" dirty="0">
                 <a:solidFill>
                   <a:srgbClr val="C1A231"/>
+                </a:solidFill>
+                <a:latin typeface="Arial" pitchFamily="34" charset="0"/>
+                <a:ea typeface="Arial" pitchFamily="34" charset="-122"/>
+                <a:cs typeface="Arial" pitchFamily="34" charset="-120"/>
+              </a:rPr>
+              <a:t>vs</a:t>
+            </a:r>
+            <a:endParaRPr lang="en-US" sz="2400" dirty="0"/>
+          </a:p>
+        </p:txBody>
+      </p:sp>
+      <p:sp>
+        <p:nvSpPr>
+          <p:cNvPr id="8" name="Text 6"/>
+          <p:cNvSpPr/>
+          <p:nvPr/>
+        </p:nvSpPr>
+        <p:spPr>
+          <a:xfrm>
+            <a:off x="5669280" y="2103120"/>
+            <a:ext cx="5486400" cy="365760"/>
+          </a:xfrm>
+          <a:prstGeom prst="rect">
+            <a:avLst/>
+          </a:prstGeom>
+          <a:noFill/>
+          <a:ln/>
+        </p:spPr>
+        <p:txBody>
+          <a:bodyPr wrap="square" lIns="0" tIns="0" rIns="0" bIns="0" rtlCol="0" anchor="ctr"/>
+          <a:lstStyle/>
+          <a:p>
+            <a:pPr algn="ctr" indent="0" marL="0">
+              <a:buNone/>
+            </a:pPr>
+            <a:r>
+              <a:rPr lang="en-US" sz="1800" b="1" dirty="0">
+                <a:solidFill>
+                  <a:srgbClr val="840028"/>
+                </a:solidFill>
+                <a:latin typeface="Arial" pitchFamily="34" charset="0"/>
+                <a:ea typeface="Arial" pitchFamily="34" charset="-122"/>
+                <a:cs typeface="Arial" pitchFamily="34" charset="-120"/>
+              </a:rPr>
+              <a:t>Many cores</a:t>
+            </a:r>
+            <a:endParaRPr lang="en-US" sz="1800" dirty="0"/>
+          </a:p>
+        </p:txBody>
+      </p:sp>
+      <p:sp>
+        <p:nvSpPr>
+          <p:cNvPr id="9" name="Shape 7"/>
+          <p:cNvSpPr/>
+          <p:nvPr/>
+        </p:nvSpPr>
+        <p:spPr>
+          <a:xfrm>
+            <a:off x="5943600" y="2651760"/>
+            <a:ext cx="384048" cy="384048"/>
+          </a:xfrm>
+          <a:prstGeom prst="ellipse">
+            <a:avLst/>
+          </a:prstGeom>
+          <a:solidFill>
+            <a:srgbClr val="840028"/>
+          </a:solidFill>
+          <a:ln w="12700">
+            <a:solidFill>
+              <a:srgbClr val="840028"/>
+            </a:solidFill>
+            <a:prstDash val="solid"/>
+          </a:ln>
+        </p:spPr>
+      </p:sp>
+      <p:sp>
+        <p:nvSpPr>
+          <p:cNvPr id="10" name="Shape 8"/>
+          <p:cNvSpPr/>
+          <p:nvPr/>
+        </p:nvSpPr>
+        <p:spPr>
+          <a:xfrm>
+            <a:off x="6473952" y="2651760"/>
+            <a:ext cx="384048" cy="384048"/>
+          </a:xfrm>
+          <a:prstGeom prst="ellipse">
+            <a:avLst/>
+          </a:prstGeom>
+          <a:solidFill>
+            <a:srgbClr val="840028"/>
+          </a:solidFill>
+          <a:ln w="12700">
+            <a:solidFill>
+              <a:srgbClr val="840028"/>
+            </a:solidFill>
+            <a:prstDash val="solid"/>
+          </a:ln>
+        </p:spPr>
+      </p:sp>
+      <p:sp>
+        <p:nvSpPr>
+          <p:cNvPr id="11" name="Shape 9"/>
+          <p:cNvSpPr/>
+          <p:nvPr/>
+        </p:nvSpPr>
+        <p:spPr>
+          <a:xfrm>
+            <a:off x="7004304" y="2651760"/>
+            <a:ext cx="384048" cy="384048"/>
+          </a:xfrm>
+          <a:prstGeom prst="ellipse">
+            <a:avLst/>
+          </a:prstGeom>
+          <a:solidFill>
+            <a:srgbClr val="840028"/>
+          </a:solidFill>
+          <a:ln w="12700">
+            <a:solidFill>
+              <a:srgbClr val="840028"/>
+            </a:solidFill>
+            <a:prstDash val="solid"/>
+          </a:ln>
+        </p:spPr>
+      </p:sp>
+      <p:sp>
+        <p:nvSpPr>
+          <p:cNvPr id="12" name="Shape 10"/>
+          <p:cNvSpPr/>
+          <p:nvPr/>
+        </p:nvSpPr>
+        <p:spPr>
+          <a:xfrm>
+            <a:off x="7534656" y="2651760"/>
+            <a:ext cx="384048" cy="384048"/>
+          </a:xfrm>
+          <a:prstGeom prst="ellipse">
+            <a:avLst/>
+          </a:prstGeom>
+          <a:solidFill>
+            <a:srgbClr val="840028"/>
+          </a:solidFill>
+          <a:ln w="12700">
+            <a:solidFill>
+              <a:srgbClr val="840028"/>
+            </a:solidFill>
+            <a:prstDash val="solid"/>
+          </a:ln>
+        </p:spPr>
+      </p:sp>
+      <p:sp>
+        <p:nvSpPr>
+          <p:cNvPr id="13" name="Shape 11"/>
+          <p:cNvSpPr/>
+          <p:nvPr/>
+        </p:nvSpPr>
+        <p:spPr>
+          <a:xfrm>
+            <a:off x="8065008" y="2651760"/>
+            <a:ext cx="384048" cy="384048"/>
+          </a:xfrm>
+          <a:prstGeom prst="ellipse">
+            <a:avLst/>
+          </a:prstGeom>
+          <a:solidFill>
+            <a:srgbClr val="840028"/>
+          </a:solidFill>
+          <a:ln w="12700">
+            <a:solidFill>
+              <a:srgbClr val="840028"/>
+            </a:solidFill>
+            <a:prstDash val="solid"/>
+          </a:ln>
+        </p:spPr>
+      </p:sp>
+      <p:sp>
+        <p:nvSpPr>
+          <p:cNvPr id="14" name="Shape 12"/>
+          <p:cNvSpPr/>
+          <p:nvPr/>
+        </p:nvSpPr>
+        <p:spPr>
+          <a:xfrm>
+            <a:off x="8595360" y="2651760"/>
+            <a:ext cx="384048" cy="384048"/>
+          </a:xfrm>
+          <a:prstGeom prst="ellipse">
+            <a:avLst/>
+          </a:prstGeom>
+          <a:solidFill>
+            <a:srgbClr val="840028"/>
+          </a:solidFill>
+          <a:ln w="12700">
+            <a:solidFill>
+              <a:srgbClr val="840028"/>
+            </a:solidFill>
+            <a:prstDash val="solid"/>
+          </a:ln>
+        </p:spPr>
+      </p:sp>
+      <p:sp>
+        <p:nvSpPr>
+          <p:cNvPr id="15" name="Shape 13"/>
+          <p:cNvSpPr/>
+          <p:nvPr/>
+        </p:nvSpPr>
+        <p:spPr>
+          <a:xfrm>
+            <a:off x="5943600" y="3182112"/>
+            <a:ext cx="384048" cy="384048"/>
+          </a:xfrm>
+          <a:prstGeom prst="ellipse">
+            <a:avLst/>
+          </a:prstGeom>
+          <a:solidFill>
+            <a:srgbClr val="840028"/>
+          </a:solidFill>
+          <a:ln w="12700">
+            <a:solidFill>
+              <a:srgbClr val="840028"/>
+            </a:solidFill>
+            <a:prstDash val="solid"/>
+          </a:ln>
+        </p:spPr>
+      </p:sp>
+      <p:sp>
+        <p:nvSpPr>
+          <p:cNvPr id="16" name="Shape 14"/>
+          <p:cNvSpPr/>
+          <p:nvPr/>
+        </p:nvSpPr>
+        <p:spPr>
+          <a:xfrm>
+            <a:off x="6473952" y="3182112"/>
+            <a:ext cx="384048" cy="384048"/>
+          </a:xfrm>
+          <a:prstGeom prst="ellipse">
+            <a:avLst/>
+          </a:prstGeom>
+          <a:solidFill>
+            <a:srgbClr val="840028"/>
+          </a:solidFill>
+          <a:ln w="12700">
+            <a:solidFill>
+              <a:srgbClr val="840028"/>
+            </a:solidFill>
+            <a:prstDash val="solid"/>
+          </a:ln>
+        </p:spPr>
+      </p:sp>
+      <p:sp>
+        <p:nvSpPr>
+          <p:cNvPr id="17" name="Shape 15"/>
+          <p:cNvSpPr/>
+          <p:nvPr/>
+        </p:nvSpPr>
+        <p:spPr>
+          <a:xfrm>
+            <a:off x="7004304" y="3182112"/>
+            <a:ext cx="384048" cy="384048"/>
+          </a:xfrm>
+          <a:prstGeom prst="ellipse">
+            <a:avLst/>
+          </a:prstGeom>
+          <a:solidFill>
+            <a:srgbClr val="840028"/>
+          </a:solidFill>
+          <a:ln w="12700">
+            <a:solidFill>
+              <a:srgbClr val="840028"/>
+            </a:solidFill>
+            <a:prstDash val="solid"/>
+          </a:ln>
+        </p:spPr>
+      </p:sp>
+      <p:sp>
+        <p:nvSpPr>
+          <p:cNvPr id="18" name="Shape 16"/>
+          <p:cNvSpPr/>
+          <p:nvPr/>
+        </p:nvSpPr>
+        <p:spPr>
+          <a:xfrm>
+            <a:off x="7534656" y="3182112"/>
+            <a:ext cx="384048" cy="384048"/>
+          </a:xfrm>
+          <a:prstGeom prst="ellipse">
+            <a:avLst/>
+          </a:prstGeom>
+          <a:solidFill>
+            <a:srgbClr val="840028"/>
+          </a:solidFill>
+          <a:ln w="12700">
+            <a:solidFill>
+              <a:srgbClr val="840028"/>
+            </a:solidFill>
+            <a:prstDash val="solid"/>
+          </a:ln>
+        </p:spPr>
+      </p:sp>
+      <p:sp>
+        <p:nvSpPr>
+          <p:cNvPr id="19" name="Shape 17"/>
+          <p:cNvSpPr/>
+          <p:nvPr/>
+        </p:nvSpPr>
+        <p:spPr>
+          <a:xfrm>
+            <a:off x="8065008" y="3182112"/>
+            <a:ext cx="384048" cy="384048"/>
+          </a:xfrm>
+          <a:prstGeom prst="ellipse">
+            <a:avLst/>
+          </a:prstGeom>
+          <a:solidFill>
+            <a:srgbClr val="840028"/>
+          </a:solidFill>
+          <a:ln w="12700">
+            <a:solidFill>
+              <a:srgbClr val="840028"/>
+            </a:solidFill>
+            <a:prstDash val="solid"/>
+          </a:ln>
+        </p:spPr>
+      </p:sp>
+      <p:sp>
+        <p:nvSpPr>
+          <p:cNvPr id="20" name="Shape 18"/>
+          <p:cNvSpPr/>
+          <p:nvPr/>
+        </p:nvSpPr>
+        <p:spPr>
+          <a:xfrm>
+            <a:off x="8595360" y="3182112"/>
+            <a:ext cx="384048" cy="384048"/>
+          </a:xfrm>
+          <a:prstGeom prst="ellipse">
+            <a:avLst/>
+          </a:prstGeom>
+          <a:solidFill>
+            <a:srgbClr val="840028"/>
+          </a:solidFill>
+          <a:ln w="12700">
+            <a:solidFill>
+              <a:srgbClr val="840028"/>
+            </a:solidFill>
+            <a:prstDash val="solid"/>
+          </a:ln>
+        </p:spPr>
+      </p:sp>
+      <p:sp>
+        <p:nvSpPr>
+          <p:cNvPr id="21" name="Shape 19"/>
+          <p:cNvSpPr/>
+          <p:nvPr/>
+        </p:nvSpPr>
+        <p:spPr>
+          <a:xfrm>
+            <a:off x="5943600" y="3712464"/>
+            <a:ext cx="384048" cy="384048"/>
+          </a:xfrm>
+          <a:prstGeom prst="ellipse">
+            <a:avLst/>
+          </a:prstGeom>
+          <a:solidFill>
+            <a:srgbClr val="840028"/>
+          </a:solidFill>
+          <a:ln w="12700">
+            <a:solidFill>
+              <a:srgbClr val="840028"/>
+            </a:solidFill>
+            <a:prstDash val="solid"/>
+          </a:ln>
+        </p:spPr>
+      </p:sp>
+      <p:sp>
+        <p:nvSpPr>
+          <p:cNvPr id="22" name="Shape 20"/>
+          <p:cNvSpPr/>
+          <p:nvPr/>
+        </p:nvSpPr>
+        <p:spPr>
+          <a:xfrm>
+            <a:off x="6473952" y="3712464"/>
+            <a:ext cx="384048" cy="384048"/>
+          </a:xfrm>
+          <a:prstGeom prst="ellipse">
+            <a:avLst/>
+          </a:prstGeom>
+          <a:solidFill>
+            <a:srgbClr val="840028"/>
+          </a:solidFill>
+          <a:ln w="12700">
+            <a:solidFill>
+              <a:srgbClr val="840028"/>
+            </a:solidFill>
+            <a:prstDash val="solid"/>
+          </a:ln>
+        </p:spPr>
+      </p:sp>
+      <p:sp>
+        <p:nvSpPr>
+          <p:cNvPr id="23" name="Shape 21"/>
+          <p:cNvSpPr/>
+          <p:nvPr/>
+        </p:nvSpPr>
+        <p:spPr>
+          <a:xfrm>
+            <a:off x="7004304" y="3712464"/>
+            <a:ext cx="384048" cy="384048"/>
+          </a:xfrm>
+          <a:prstGeom prst="ellipse">
+            <a:avLst/>
+          </a:prstGeom>
+          <a:solidFill>
+            <a:srgbClr val="840028"/>
+          </a:solidFill>
+          <a:ln w="12700">
+            <a:solidFill>
+              <a:srgbClr val="840028"/>
+            </a:solidFill>
+            <a:prstDash val="solid"/>
+          </a:ln>
+        </p:spPr>
+      </p:sp>
+      <p:sp>
+        <p:nvSpPr>
+          <p:cNvPr id="24" name="Shape 22"/>
+          <p:cNvSpPr/>
+          <p:nvPr/>
+        </p:nvSpPr>
+        <p:spPr>
+          <a:xfrm>
+            <a:off x="7534656" y="3712464"/>
+            <a:ext cx="384048" cy="384048"/>
+          </a:xfrm>
+          <a:prstGeom prst="ellipse">
+            <a:avLst/>
+          </a:prstGeom>
+          <a:solidFill>
+            <a:srgbClr val="840028"/>
+          </a:solidFill>
+          <a:ln w="12700">
+            <a:solidFill>
+              <a:srgbClr val="840028"/>
+            </a:solidFill>
+            <a:prstDash val="solid"/>
+          </a:ln>
+        </p:spPr>
+      </p:sp>
+      <p:sp>
+        <p:nvSpPr>
+          <p:cNvPr id="25" name="Shape 23"/>
+          <p:cNvSpPr/>
+          <p:nvPr/>
+        </p:nvSpPr>
+        <p:spPr>
+          <a:xfrm>
+            <a:off x="8065008" y="3712464"/>
+            <a:ext cx="384048" cy="384048"/>
+          </a:xfrm>
+          <a:prstGeom prst="ellipse">
+            <a:avLst/>
+          </a:prstGeom>
+          <a:solidFill>
+            <a:srgbClr val="840028"/>
+          </a:solidFill>
+          <a:ln w="12700">
+            <a:solidFill>
+              <a:srgbClr val="840028"/>
+            </a:solidFill>
+            <a:prstDash val="solid"/>
+          </a:ln>
+        </p:spPr>
+      </p:sp>
+      <p:sp>
+        <p:nvSpPr>
+          <p:cNvPr id="26" name="Shape 24"/>
+          <p:cNvSpPr/>
+          <p:nvPr/>
+        </p:nvSpPr>
+        <p:spPr>
+          <a:xfrm>
+            <a:off x="8595360" y="3712464"/>
+            <a:ext cx="384048" cy="384048"/>
+          </a:xfrm>
+          <a:prstGeom prst="ellipse">
+            <a:avLst/>
+          </a:prstGeom>
+          <a:solidFill>
+            <a:srgbClr val="840028"/>
+          </a:solidFill>
+          <a:ln w="12700">
+            <a:solidFill>
+              <a:srgbClr val="840028"/>
+            </a:solidFill>
+            <a:prstDash val="solid"/>
+          </a:ln>
+        </p:spPr>
+      </p:sp>
+      <p:sp>
+        <p:nvSpPr>
+          <p:cNvPr id="27" name="Shape 25"/>
+          <p:cNvSpPr/>
+          <p:nvPr/>
+        </p:nvSpPr>
+        <p:spPr>
+          <a:xfrm>
+            <a:off x="5943600" y="4242816"/>
+            <a:ext cx="384048" cy="384048"/>
+          </a:xfrm>
+          <a:prstGeom prst="ellipse">
+            <a:avLst/>
+          </a:prstGeom>
+          <a:solidFill>
+            <a:srgbClr val="840028"/>
+          </a:solidFill>
+          <a:ln w="12700">
+            <a:solidFill>
+              <a:srgbClr val="840028"/>
+            </a:solidFill>
+            <a:prstDash val="solid"/>
+          </a:ln>
+        </p:spPr>
+      </p:sp>
+      <p:sp>
+        <p:nvSpPr>
+          <p:cNvPr id="28" name="Shape 26"/>
+          <p:cNvSpPr/>
+          <p:nvPr/>
+        </p:nvSpPr>
+        <p:spPr>
+          <a:xfrm>
+            <a:off x="6473952" y="4242816"/>
+            <a:ext cx="384048" cy="384048"/>
+          </a:xfrm>
+          <a:prstGeom prst="ellipse">
+            <a:avLst/>
+          </a:prstGeom>
+          <a:solidFill>
+            <a:srgbClr val="840028"/>
+          </a:solidFill>
+          <a:ln w="12700">
+            <a:solidFill>
+              <a:srgbClr val="840028"/>
+            </a:solidFill>
+            <a:prstDash val="solid"/>
+          </a:ln>
+        </p:spPr>
+      </p:sp>
+      <p:sp>
+        <p:nvSpPr>
+          <p:cNvPr id="29" name="Shape 27"/>
+          <p:cNvSpPr/>
+          <p:nvPr/>
+        </p:nvSpPr>
+        <p:spPr>
+          <a:xfrm>
+            <a:off x="7004304" y="4242816"/>
+            <a:ext cx="384048" cy="384048"/>
+          </a:xfrm>
+          <a:prstGeom prst="ellipse">
+            <a:avLst/>
+          </a:prstGeom>
+          <a:solidFill>
+            <a:srgbClr val="840028"/>
+          </a:solidFill>
+          <a:ln w="12700">
+            <a:solidFill>
+              <a:srgbClr val="840028"/>
+            </a:solidFill>
+            <a:prstDash val="solid"/>
+          </a:ln>
+        </p:spPr>
+      </p:sp>
+      <p:sp>
+        <p:nvSpPr>
+          <p:cNvPr id="30" name="Shape 28"/>
+          <p:cNvSpPr/>
+          <p:nvPr/>
+        </p:nvSpPr>
+        <p:spPr>
+          <a:xfrm>
+            <a:off x="7534656" y="4242816"/>
+            <a:ext cx="384048" cy="384048"/>
+          </a:xfrm>
+          <a:prstGeom prst="ellipse">
+            <a:avLst/>
+          </a:prstGeom>
+          <a:solidFill>
+            <a:srgbClr val="840028"/>
+          </a:solidFill>
+          <a:ln w="12700">
+            <a:solidFill>
+              <a:srgbClr val="840028"/>
+            </a:solidFill>
+            <a:prstDash val="solid"/>
+          </a:ln>
+        </p:spPr>
+      </p:sp>
+      <p:sp>
+        <p:nvSpPr>
+          <p:cNvPr id="31" name="Shape 29"/>
+          <p:cNvSpPr/>
+          <p:nvPr/>
+        </p:nvSpPr>
+        <p:spPr>
+          <a:xfrm>
+            <a:off x="8065008" y="4242816"/>
+            <a:ext cx="384048" cy="384048"/>
+          </a:xfrm>
+          <a:prstGeom prst="ellipse">
+            <a:avLst/>
+          </a:prstGeom>
+          <a:solidFill>
+            <a:srgbClr val="840028"/>
+          </a:solidFill>
+          <a:ln w="12700">
+            <a:solidFill>
+              <a:srgbClr val="840028"/>
+            </a:solidFill>
+            <a:prstDash val="solid"/>
+          </a:ln>
+        </p:spPr>
+      </p:sp>
+      <p:sp>
+        <p:nvSpPr>
+          <p:cNvPr id="32" name="Shape 30"/>
+          <p:cNvSpPr/>
+          <p:nvPr/>
+        </p:nvSpPr>
+        <p:spPr>
+          <a:xfrm>
+            <a:off x="8595360" y="4242816"/>
+            <a:ext cx="384048" cy="384048"/>
+          </a:xfrm>
+          <a:prstGeom prst="ellipse">
+            <a:avLst/>
+          </a:prstGeom>
+          <a:solidFill>
+            <a:srgbClr val="840028"/>
+          </a:solidFill>
+          <a:ln w="12700">
+            <a:solidFill>
+              <a:srgbClr val="840028"/>
+            </a:solidFill>
+            <a:prstDash val="solid"/>
+          </a:ln>
+        </p:spPr>
+      </p:sp>
+      <p:sp>
+        <p:nvSpPr>
+          <p:cNvPr id="33" name="Text 31"/>
+          <p:cNvSpPr/>
+          <p:nvPr/>
+        </p:nvSpPr>
+        <p:spPr>
+          <a:xfrm>
+            <a:off x="5669280" y="4800600"/>
+            <a:ext cx="5486400" cy="548640"/>
+          </a:xfrm>
+          <a:prstGeom prst="rect">
+            <a:avLst/>
+          </a:prstGeom>
+          <a:noFill/>
+          <a:ln/>
+        </p:spPr>
+        <p:txBody>
+          <a:bodyPr wrap="square" lIns="0" tIns="0" rIns="0" bIns="0" rtlCol="0" anchor="ctr"/>
+          <a:lstStyle/>
+          <a:p>
+            <a:pPr algn="ctr" indent="0" marL="0">
+              <a:buNone/>
+            </a:pPr>
+            <a:r>
+              <a:rPr lang="en-US" sz="1500" dirty="0">
+                <a:solidFill>
+                  <a:srgbClr val="1A1A1A"/>
                 </a:solidFill>
                 <a:latin typeface="Calibri" pitchFamily="34" charset="0"/>
                 <a:ea typeface="Calibri" pitchFamily="34" charset="-122"/>
                 <a:cs typeface="Calibri" pitchFamily="34" charset="-120"/>
               </a:rPr>
-              <a:t>The notebook that opens is a real job running on Frontera. When it prints the computer's name, that machine is physically in Austin, Texas, and you're using it.</a:t>
-            </a:r>
-            <a:endParaRPr lang="en-US" sz="1800" dirty="0"/>
-          </a:p>
-        </p:txBody>
-      </p:sp>
-      <p:sp>
-        <p:nvSpPr>
-          <p:cNvPr id="7" name="Text 5"/>
+              <a:t>split the work and finish together, far faster</a:t>
+            </a:r>
+            <a:endParaRPr lang="en-US" sz="1500" dirty="0"/>
+          </a:p>
+        </p:txBody>
+      </p:sp>
+      <p:sp>
+        <p:nvSpPr>
+          <p:cNvPr id="34" name="Text 32"/>
+          <p:cNvSpPr/>
+          <p:nvPr/>
+        </p:nvSpPr>
+        <p:spPr>
+          <a:xfrm>
+            <a:off x="640080" y="5806440"/>
+            <a:ext cx="10972800" cy="548640"/>
+          </a:xfrm>
+          <a:prstGeom prst="rect">
+            <a:avLst/>
+          </a:prstGeom>
+          <a:noFill/>
+          <a:ln/>
+        </p:spPr>
+        <p:txBody>
+          <a:bodyPr wrap="square" lIns="0" tIns="0" rIns="0" bIns="0" rtlCol="0" anchor="ctr"/>
+          <a:lstStyle/>
+          <a:p>
+            <a:pPr indent="0" marL="0">
+              <a:buNone/>
+            </a:pPr>
+            <a:r>
+              <a:rPr lang="en-US" sz="1700" i="1" dirty="0">
+                <a:solidFill>
+                  <a:srgbClr val="6E6E70"/>
+                </a:solidFill>
+                <a:latin typeface="Calibri" pitchFamily="34" charset="0"/>
+                <a:ea typeface="Calibri" pitchFamily="34" charset="-122"/>
+                <a:cs typeface="Calibri" pitchFamily="34" charset="-120"/>
+              </a:rPr>
+              <a:t>That's high-performance computing (HPC). You'll feel the speed difference yourself in a few minutes.</a:t>
+            </a:r>
+            <a:endParaRPr lang="en-US" sz="1700" dirty="0"/>
+          </a:p>
+        </p:txBody>
+      </p:sp>
+      <p:sp>
+        <p:nvSpPr>
+          <p:cNvPr id="35" name="Text 33"/>
           <p:cNvSpPr/>
           <p:nvPr/>
         </p:nvSpPr>
@@ -6153,7 +9906,7 @@
                 <a:ea typeface="Arial" pitchFamily="34" charset="-122"/>
                 <a:cs typeface="Arial" pitchFamily="34" charset="-120"/>
               </a:rPr>
-              <a:t>GROUND RULES</a:t>
+              <a:t>THE LANGUAGE</a:t>
             </a:r>
             <a:endParaRPr lang="en-US" sz="1300" dirty="0"/>
           </a:p>
@@ -6192,7 +9945,7 @@
                 <a:ea typeface="Arial" pitchFamily="34" charset="-122"/>
                 <a:cs typeface="Arial" pitchFamily="34" charset="-120"/>
               </a:rPr>
-              <a:t>Running the notebook</a:t>
+              <a:t>Why Python?</a:t>
             </a:r>
             <a:endParaRPr lang="en-US" sz="3200" dirty="0"/>
           </a:p>
@@ -6207,17 +9960,15 @@
         <p:spPr>
           <a:xfrm>
             <a:off x="640080" y="2286000"/>
-            <a:ext cx="4754880" cy="1463040"/>
-          </a:xfrm>
-          <a:prstGeom prst="roundRect">
-            <a:avLst>
-              <a:gd name="adj" fmla="val 7500"/>
-            </a:avLst>
-          </a:prstGeom>
-          <a:solidFill>
-            <a:srgbClr val="EFEDEA"/>
-          </a:solidFill>
-          <a:ln w="19050">
+            <a:ext cx="3383280" cy="2331720"/>
+          </a:xfrm>
+          <a:prstGeom prst="rect">
+            <a:avLst/>
+          </a:prstGeom>
+          <a:solidFill>
+            <a:srgbClr val="840028"/>
+          </a:solidFill>
+          <a:ln w="12700">
             <a:solidFill>
               <a:srgbClr val="840028"/>
             </a:solidFill>
@@ -6233,34 +9984,34 @@
         </p:nvSpPr>
         <p:spPr>
           <a:xfrm>
-            <a:off x="640080" y="2286000"/>
-            <a:ext cx="4754880" cy="1463040"/>
-          </a:xfrm>
-          <a:prstGeom prst="rect">
-            <a:avLst/>
-          </a:prstGeom>
-          <a:noFill/>
-          <a:ln/>
-        </p:spPr>
-        <p:txBody>
-          <a:bodyPr wrap="square" lIns="0" tIns="0" rIns="0" bIns="0" rtlCol="0" anchor="ctr"/>
-          <a:lstStyle/>
-          <a:p>
-            <a:pPr algn="ctr" indent="0" marL="0">
-              <a:buNone/>
-            </a:pPr>
-            <a:r>
-              <a:rPr lang="en-US" sz="3400" b="1" dirty="0">
-                <a:solidFill>
-                  <a:srgbClr val="840028"/>
+            <a:off x="914400" y="2514600"/>
+            <a:ext cx="2834640" cy="868680"/>
+          </a:xfrm>
+          <a:prstGeom prst="rect">
+            <a:avLst/>
+          </a:prstGeom>
+          <a:noFill/>
+          <a:ln/>
+        </p:spPr>
+        <p:txBody>
+          <a:bodyPr wrap="square" lIns="0" tIns="0" rIns="0" bIns="0" rtlCol="0" anchor="b"/>
+          <a:lstStyle/>
+          <a:p>
+            <a:pPr indent="0" marL="0">
+              <a:buNone/>
+            </a:pPr>
+            <a:r>
+              <a:rPr lang="en-US" sz="2200" b="1" dirty="0">
+                <a:solidFill>
+                  <a:srgbClr val="C1A231"/>
                 </a:solidFill>
                 <a:latin typeface="Arial" pitchFamily="34" charset="0"/>
                 <a:ea typeface="Arial" pitchFamily="34" charset="-122"/>
                 <a:cs typeface="Arial" pitchFamily="34" charset="-120"/>
               </a:rPr>
-              <a:t>Shift + Enter</a:t>
-            </a:r>
-            <a:endParaRPr lang="en-US" sz="3400" dirty="0"/>
+              <a:t>Readable</a:t>
+            </a:r>
+            <a:endParaRPr lang="en-US" sz="2200" dirty="0"/>
           </a:p>
         </p:txBody>
       </p:sp>
@@ -6272,32 +10023,32 @@
         </p:nvSpPr>
         <p:spPr>
           <a:xfrm>
-            <a:off x="640080" y="3840480"/>
-            <a:ext cx="4754880" cy="457200"/>
-          </a:xfrm>
-          <a:prstGeom prst="rect">
-            <a:avLst/>
-          </a:prstGeom>
-          <a:noFill/>
-          <a:ln/>
-        </p:spPr>
-        <p:txBody>
-          <a:bodyPr wrap="square" lIns="0" tIns="0" rIns="0" bIns="0" rtlCol="0" anchor="ctr"/>
-          <a:lstStyle/>
-          <a:p>
-            <a:pPr algn="ctr" indent="0" marL="0">
+            <a:off x="914400" y="3474720"/>
+            <a:ext cx="2834640" cy="1005840"/>
+          </a:xfrm>
+          <a:prstGeom prst="rect">
+            <a:avLst/>
+          </a:prstGeom>
+          <a:noFill/>
+          <a:ln/>
+        </p:spPr>
+        <p:txBody>
+          <a:bodyPr wrap="square" lIns="0" tIns="0" rIns="0" bIns="0" rtlCol="0" anchor="t"/>
+          <a:lstStyle/>
+          <a:p>
+            <a:pPr indent="0" marL="0">
               <a:buNone/>
             </a:pPr>
             <a:r>
               <a:rPr lang="en-US" sz="1600" dirty="0">
                 <a:solidFill>
-                  <a:srgbClr val="6E6E70"/>
+                  <a:srgbClr val="FFFFFF"/>
                 </a:solidFill>
                 <a:latin typeface="Calibri" pitchFamily="34" charset="0"/>
                 <a:ea typeface="Calibri" pitchFamily="34" charset="-122"/>
                 <a:cs typeface="Calibri" pitchFamily="34" charset="-120"/>
               </a:rPr>
-              <a:t>runs the cell you're in</a:t>
+              <a:t>It looks almost like plain English, so you can learn it fast.</a:t>
             </a:r>
             <a:endParaRPr lang="en-US" sz="1600" dirty="0"/>
           </a:p>
@@ -6305,120 +10056,220 @@
       </p:sp>
       <p:sp>
         <p:nvSpPr>
-          <p:cNvPr id="7" name="Text 5"/>
-          <p:cNvSpPr/>
-          <p:nvPr/>
-        </p:nvSpPr>
-        <p:spPr>
-          <a:xfrm>
-            <a:off x="5852160" y="2286000"/>
-            <a:ext cx="5669280" cy="2377440"/>
-          </a:xfrm>
-          <a:prstGeom prst="rect">
-            <a:avLst/>
-          </a:prstGeom>
-          <a:noFill/>
-          <a:ln/>
-        </p:spPr>
-        <p:txBody>
-          <a:bodyPr wrap="square" lIns="0" tIns="0" rIns="0" bIns="0" rtlCol="0" anchor="ctr"/>
-          <a:lstStyle/>
-          <a:p>
-            <a:pPr marL="342900" indent="-342900">
-              <a:spcAft>
-                <a:spcPts val="1000"/>
-              </a:spcAft>
-              <a:buSzPct val="100000"/>
-              <a:buChar char="•"/>
-            </a:pPr>
-            <a:r>
-              <a:rPr lang="en-US" sz="1800" dirty="0">
-                <a:solidFill>
-                  <a:srgbClr val="1A1A1A"/>
+          <p:cNvPr id="7" name="Shape 5"/>
+          <p:cNvSpPr/>
+          <p:nvPr/>
+        </p:nvSpPr>
+        <p:spPr>
+          <a:xfrm>
+            <a:off x="4343400" y="2286000"/>
+            <a:ext cx="3383280" cy="2331720"/>
+          </a:xfrm>
+          <a:prstGeom prst="rect">
+            <a:avLst/>
+          </a:prstGeom>
+          <a:solidFill>
+            <a:srgbClr val="840028"/>
+          </a:solidFill>
+          <a:ln w="12700">
+            <a:solidFill>
+              <a:srgbClr val="840028"/>
+            </a:solidFill>
+            <a:prstDash val="solid"/>
+          </a:ln>
+        </p:spPr>
+      </p:sp>
+      <p:sp>
+        <p:nvSpPr>
+          <p:cNvPr id="8" name="Text 6"/>
+          <p:cNvSpPr/>
+          <p:nvPr/>
+        </p:nvSpPr>
+        <p:spPr>
+          <a:xfrm>
+            <a:off x="4617720" y="2514600"/>
+            <a:ext cx="2834640" cy="868680"/>
+          </a:xfrm>
+          <a:prstGeom prst="rect">
+            <a:avLst/>
+          </a:prstGeom>
+          <a:noFill/>
+          <a:ln/>
+        </p:spPr>
+        <p:txBody>
+          <a:bodyPr wrap="square" lIns="0" tIns="0" rIns="0" bIns="0" rtlCol="0" anchor="b"/>
+          <a:lstStyle/>
+          <a:p>
+            <a:pPr indent="0" marL="0">
+              <a:buNone/>
+            </a:pPr>
+            <a:r>
+              <a:rPr lang="en-US" sz="2200" b="1" dirty="0">
+                <a:solidFill>
+                  <a:srgbClr val="C1A231"/>
+                </a:solidFill>
+                <a:latin typeface="Arial" pitchFamily="34" charset="0"/>
+                <a:ea typeface="Arial" pitchFamily="34" charset="-122"/>
+                <a:cs typeface="Arial" pitchFamily="34" charset="-120"/>
+              </a:rPr>
+              <a:t>Everywhere in science</a:t>
+            </a:r>
+            <a:endParaRPr lang="en-US" sz="2200" dirty="0"/>
+          </a:p>
+        </p:txBody>
+      </p:sp>
+      <p:sp>
+        <p:nvSpPr>
+          <p:cNvPr id="9" name="Text 7"/>
+          <p:cNvSpPr/>
+          <p:nvPr/>
+        </p:nvSpPr>
+        <p:spPr>
+          <a:xfrm>
+            <a:off x="4617720" y="3474720"/>
+            <a:ext cx="2834640" cy="1005840"/>
+          </a:xfrm>
+          <a:prstGeom prst="rect">
+            <a:avLst/>
+          </a:prstGeom>
+          <a:noFill/>
+          <a:ln/>
+        </p:spPr>
+        <p:txBody>
+          <a:bodyPr wrap="square" lIns="0" tIns="0" rIns="0" bIns="0" rtlCol="0" anchor="t"/>
+          <a:lstStyle/>
+          <a:p>
+            <a:pPr indent="0" marL="0">
+              <a:buNone/>
+            </a:pPr>
+            <a:r>
+              <a:rPr lang="en-US" sz="1600" dirty="0">
+                <a:solidFill>
+                  <a:srgbClr val="FFFFFF"/>
                 </a:solidFill>
                 <a:latin typeface="Calibri" pitchFamily="34" charset="0"/>
                 <a:ea typeface="Calibri" pitchFamily="34" charset="-122"/>
                 <a:cs typeface="Calibri" pitchFamily="34" charset="-120"/>
               </a:rPr>
-              <a:t>Run the cells in order, top to bottom.</a:t>
-            </a:r>
-            <a:endParaRPr lang="en-US" sz="1800" dirty="0"/>
-          </a:p>
-          <a:p>
-            <a:pPr marL="342900" indent="-342900">
-              <a:spcAft>
-                <a:spcPts val="1000"/>
-              </a:spcAft>
-              <a:buSzPct val="100000"/>
-              <a:buChar char="•"/>
-            </a:pPr>
-            <a:r>
-              <a:rPr lang="en-US" sz="1800" dirty="0">
-                <a:solidFill>
-                  <a:srgbClr val="1A1A1A"/>
+              <a:t>The default language for data, AI, biology, physics, and more.</a:t>
+            </a:r>
+            <a:endParaRPr lang="en-US" sz="1600" dirty="0"/>
+          </a:p>
+        </p:txBody>
+      </p:sp>
+      <p:sp>
+        <p:nvSpPr>
+          <p:cNvPr id="10" name="Shape 8"/>
+          <p:cNvSpPr/>
+          <p:nvPr/>
+        </p:nvSpPr>
+        <p:spPr>
+          <a:xfrm>
+            <a:off x="8046720" y="2286000"/>
+            <a:ext cx="3383280" cy="2331720"/>
+          </a:xfrm>
+          <a:prstGeom prst="rect">
+            <a:avLst/>
+          </a:prstGeom>
+          <a:solidFill>
+            <a:srgbClr val="840028"/>
+          </a:solidFill>
+          <a:ln w="12700">
+            <a:solidFill>
+              <a:srgbClr val="840028"/>
+            </a:solidFill>
+            <a:prstDash val="solid"/>
+          </a:ln>
+        </p:spPr>
+      </p:sp>
+      <p:sp>
+        <p:nvSpPr>
+          <p:cNvPr id="11" name="Text 9"/>
+          <p:cNvSpPr/>
+          <p:nvPr/>
+        </p:nvSpPr>
+        <p:spPr>
+          <a:xfrm>
+            <a:off x="8321040" y="2514600"/>
+            <a:ext cx="2834640" cy="868680"/>
+          </a:xfrm>
+          <a:prstGeom prst="rect">
+            <a:avLst/>
+          </a:prstGeom>
+          <a:noFill/>
+          <a:ln/>
+        </p:spPr>
+        <p:txBody>
+          <a:bodyPr wrap="square" lIns="0" tIns="0" rIns="0" bIns="0" rtlCol="0" anchor="b"/>
+          <a:lstStyle/>
+          <a:p>
+            <a:pPr indent="0" marL="0">
+              <a:buNone/>
+            </a:pPr>
+            <a:r>
+              <a:rPr lang="en-US" sz="2200" b="1" dirty="0">
+                <a:solidFill>
+                  <a:srgbClr val="C1A231"/>
+                </a:solidFill>
+                <a:latin typeface="Arial" pitchFamily="34" charset="0"/>
+                <a:ea typeface="Arial" pitchFamily="34" charset="-122"/>
+                <a:cs typeface="Arial" pitchFamily="34" charset="-120"/>
+              </a:rPr>
+              <a:t>Powerful</a:t>
+            </a:r>
+            <a:endParaRPr lang="en-US" sz="2200" dirty="0"/>
+          </a:p>
+        </p:txBody>
+      </p:sp>
+      <p:sp>
+        <p:nvSpPr>
+          <p:cNvPr id="12" name="Text 10"/>
+          <p:cNvSpPr/>
+          <p:nvPr/>
+        </p:nvSpPr>
+        <p:spPr>
+          <a:xfrm>
+            <a:off x="8321040" y="3474720"/>
+            <a:ext cx="2834640" cy="1005840"/>
+          </a:xfrm>
+          <a:prstGeom prst="rect">
+            <a:avLst/>
+          </a:prstGeom>
+          <a:noFill/>
+          <a:ln/>
+        </p:spPr>
+        <p:txBody>
+          <a:bodyPr wrap="square" lIns="0" tIns="0" rIns="0" bIns="0" rtlCol="0" anchor="t"/>
+          <a:lstStyle/>
+          <a:p>
+            <a:pPr indent="0" marL="0">
+              <a:buNone/>
+            </a:pPr>
+            <a:r>
+              <a:rPr lang="en-US" sz="1600" dirty="0">
+                <a:solidFill>
+                  <a:srgbClr val="FFFFFF"/>
                 </a:solidFill>
                 <a:latin typeface="Calibri" pitchFamily="34" charset="0"/>
                 <a:ea typeface="Calibri" pitchFamily="34" charset="-122"/>
                 <a:cs typeface="Calibri" pitchFamily="34" charset="-120"/>
               </a:rPr>
-              <a:t>Change the values. Make them yours.</a:t>
-            </a:r>
-            <a:endParaRPr lang="en-US" sz="1800" dirty="0"/>
-          </a:p>
-          <a:p>
-            <a:pPr marL="342900" indent="-342900">
-              <a:spcAft>
-                <a:spcPts val="1000"/>
-              </a:spcAft>
-              <a:buSzPct val="100000"/>
-              <a:buChar char="•"/>
-            </a:pPr>
-            <a:r>
-              <a:rPr lang="en-US" sz="1800" dirty="0">
-                <a:solidFill>
-                  <a:srgbClr val="1A1A1A"/>
-                </a:solidFill>
-                <a:latin typeface="Calibri" pitchFamily="34" charset="0"/>
-                <a:ea typeface="Calibri" pitchFamily="34" charset="-122"/>
-                <a:cs typeface="Calibri" pitchFamily="34" charset="-120"/>
-              </a:rPr>
-              <a:t>If something breaks, just re-run it. Nothing you do can harm the computer.</a:t>
-            </a:r>
-            <a:endParaRPr lang="en-US" sz="1800" dirty="0"/>
-          </a:p>
-          <a:p>
-            <a:pPr marL="342900" indent="-342900">
-              <a:spcAft>
-                <a:spcPts val="1000"/>
-              </a:spcAft>
-              <a:buSzPct val="100000"/>
-              <a:buChar char="•"/>
-            </a:pPr>
-            <a:r>
-              <a:rPr lang="en-US" sz="1800" dirty="0">
-                <a:solidFill>
-                  <a:srgbClr val="1A1A1A"/>
-                </a:solidFill>
-                <a:latin typeface="Calibri" pitchFamily="34" charset="0"/>
-                <a:ea typeface="Calibri" pitchFamily="34" charset="-122"/>
-                <a:cs typeface="Calibri" pitchFamily="34" charset="-120"/>
-              </a:rPr>
-              <a:t>Ask questions the moment you're stuck.</a:t>
-            </a:r>
-            <a:endParaRPr lang="en-US" sz="1800" dirty="0"/>
-          </a:p>
-        </p:txBody>
-      </p:sp>
-      <p:sp>
-        <p:nvSpPr>
-          <p:cNvPr id="8" name="Text 6"/>
-          <p:cNvSpPr/>
-          <p:nvPr/>
-        </p:nvSpPr>
-        <p:spPr>
-          <a:xfrm>
-            <a:off x="640080" y="5120640"/>
-            <a:ext cx="10972800" cy="548640"/>
+              <a:t>The same language runs on your laptop and on Frontera.</a:t>
+            </a:r>
+            <a:endParaRPr lang="en-US" sz="1600" dirty="0"/>
+          </a:p>
+        </p:txBody>
+      </p:sp>
+      <p:sp>
+        <p:nvSpPr>
+          <p:cNvPr id="13" name="Text 11"/>
+          <p:cNvSpPr/>
+          <p:nvPr/>
+        </p:nvSpPr>
+        <p:spPr>
+          <a:xfrm>
+            <a:off x="640080" y="5257800"/>
+            <a:ext cx="10972800" cy="640080"/>
           </a:xfrm>
           <a:prstGeom prst="rect">
             <a:avLst/>
@@ -6430,27 +10281,27 @@
           <a:bodyPr wrap="square" lIns="0" tIns="0" rIns="0" bIns="0" rtlCol="0" anchor="ctr"/>
           <a:lstStyle/>
           <a:p>
-            <a:pPr indent="0" marL="0">
-              <a:buNone/>
-            </a:pPr>
-            <a:r>
-              <a:rPr lang="en-US" sz="1800" i="1" dirty="0">
+            <a:pPr algn="ctr" indent="0" marL="0">
+              <a:buNone/>
+            </a:pPr>
+            <a:r>
+              <a:rPr lang="en-US" sz="2400" b="1" dirty="0">
                 <a:solidFill>
                   <a:srgbClr val="840028"/>
                 </a:solidFill>
-                <a:latin typeface="Calibri" pitchFamily="34" charset="0"/>
-                <a:ea typeface="Calibri" pitchFamily="34" charset="-122"/>
-                <a:cs typeface="Calibri" pitchFamily="34" charset="-120"/>
-              </a:rPr>
-              <a:t>Breaking things and fixing them is how you learn to code.</a:t>
-            </a:r>
-            <a:endParaRPr lang="en-US" sz="1800" dirty="0"/>
-          </a:p>
-        </p:txBody>
-      </p:sp>
-      <p:sp>
-        <p:nvSpPr>
-          <p:cNvPr id="9" name="Text 7"/>
+                <a:latin typeface="Courier New" pitchFamily="34" charset="0"/>
+                <a:ea typeface="Courier New" pitchFamily="34" charset="-122"/>
+                <a:cs typeface="Courier New" pitchFamily="34" charset="-120"/>
+              </a:rPr>
+              <a:t>print("Hello, Frontera")</a:t>
+            </a:r>
+            <a:endParaRPr lang="en-US" sz="2400" dirty="0"/>
+          </a:p>
+        </p:txBody>
+      </p:sp>
+      <p:sp>
+        <p:nvSpPr>
+          <p:cNvPr id="14" name="Text 12"/>
           <p:cNvSpPr/>
           <p:nvPr/>
         </p:nvSpPr>

--- a/slides/pfx-hpc-slides.pptx
+++ b/slides/pfx-hpc-slides.pptx
@@ -18,9 +18,10 @@
     <p:sldId id="266" r:id="rId12"/>
     <p:sldId id="267" r:id="rId13"/>
     <p:sldId id="268" r:id="rId14"/>
+    <p:sldId id="269" r:id="rId15"/>
   </p:sldIdLst>
   <p:notesMasterIdLst>
-    <p:notesMasterId r:id="rId15"/>
+    <p:notesMasterId r:id="rId16"/>
   </p:notesMasterIdLst>
   <p:sldSz cx="12191695" cy="6858000"/>
   <p:notesSz cx="6858000" cy="12191695"/>
@@ -778,7 +779,7 @@
           <a:p>
             <a:r>
               <a:rPr lang="en-US" dirty="0"/>
-              <a:t>Lower the stakes. The biggest blocker for beginners is fear of breaking something. Say explicitly: you can't.</a:t>
+              <a:t>Land the belonging message, then switch to the browser and open TAP together. This is the transition into the notebook.</a:t>
             </a:r>
             <a:endParaRPr lang="en-US" dirty="0"/>
           </a:p>
@@ -866,7 +867,7 @@
           <a:p>
             <a:r>
               <a:rPr lang="en-US" dirty="0"/>
-              <a:t>Land the belonging message, then switch to the browser and open TAP together. This is the transition into the notebook.</a:t>
+              <a:t>We used Frontera because I expected about 250 people and needed to reserve at least 250 nodes; Frontera has the capacity for a group that size. But you're not limited to it. Reach for Vista when your work needs GPUs, that's the AI and machine-learning machine. Stampede3 is a strong general-purpose CPU system.</a:t>
             </a:r>
             <a:endParaRPr lang="en-US" dirty="0"/>
           </a:p>
@@ -890,6 +891,94 @@
             <a:fld id="{F7021451-1387-4CA6-816F-3879F97B5CBC}" type="slidenum">
               <a:rPr lang="en-US"/>
               <a:t>13</a:t>
+            </a:fld>
+            <a:endParaRPr lang="en-US"/>
+          </a:p>
+        </p:txBody>
+      </p:sp>
+    </p:spTree>
+    <p:extLst>
+      <p:ext uri="{BB962C8B-B14F-4D97-AF65-F5344CB8AC3E}">
+        <p14:creationId xmlns:p14="http://schemas.microsoft.com/office/powerpoint/2010/main" val="1024086991"/>
+      </p:ext>
+    </p:extLst>
+  </p:cSld>
+  <p:clrMapOvr>
+    <a:masterClrMapping/>
+  </p:clrMapOvr>
+</p:notes>
+</file>
+
+<file path=ppt/notesSlides/notesSlide14.xml><?xml version="1.0" encoding="utf-8"?>
+<p:notes xmlns:a="http://schemas.openxmlformats.org/drawingml/2006/main" xmlns:r="http://schemas.openxmlformats.org/officeDocument/2006/relationships" xmlns:p="http://schemas.openxmlformats.org/presentationml/2006/main">
+  <p:cSld>
+    <p:spTree>
+      <p:nvGrpSpPr>
+        <p:cNvPr id="1" name=""/>
+        <p:cNvGrpSpPr/>
+        <p:nvPr/>
+      </p:nvGrpSpPr>
+      <p:grpSpPr>
+        <a:xfrm>
+          <a:off x="0" y="0"/>
+          <a:ext cx="0" cy="0"/>
+          <a:chOff x="0" y="0"/>
+          <a:chExt cx="0" cy="0"/>
+        </a:xfrm>
+      </p:grpSpPr>
+      <p:sp>
+        <p:nvSpPr>
+          <p:cNvPr id="2" name="Slide Image Placeholder 1"/>
+          <p:cNvSpPr>
+            <a:spLocks noGrp="1" noRot="1" noChangeAspect="1"/>
+          </p:cNvSpPr>
+          <p:nvPr>
+            <p:ph type="sldImg"/>
+          </p:nvPr>
+        </p:nvSpPr>
+        <p:spPr/>
+      </p:sp>
+      <p:sp>
+        <p:nvSpPr>
+          <p:cNvPr id="3" name="Notes Placeholder 2"/>
+          <p:cNvSpPr>
+            <a:spLocks noGrp="1"/>
+          </p:cNvSpPr>
+          <p:nvPr>
+            <p:ph type="body" idx="1"/>
+          </p:nvPr>
+        </p:nvSpPr>
+        <p:spPr/>
+        <p:txBody>
+          <a:bodyPr/>
+          <a:lstStyle/>
+          <a:p>
+            <a:r>
+              <a:rPr lang="en-US" dirty="0"/>
+              <a:t>Close it out. They now have real access to three national systems.</a:t>
+            </a:r>
+            <a:endParaRPr lang="en-US" dirty="0"/>
+          </a:p>
+        </p:txBody>
+      </p:sp>
+      <p:sp>
+        <p:nvSpPr>
+          <p:cNvPr id="4" name="Slide Number Placeholder 3"/>
+          <p:cNvSpPr>
+            <a:spLocks noGrp="1"/>
+          </p:cNvSpPr>
+          <p:nvPr>
+            <p:ph type="sldNum" sz="quarter" idx="10"/>
+          </p:nvPr>
+        </p:nvSpPr>
+        <p:spPr/>
+        <p:txBody>
+          <a:bodyPr/>
+          <a:lstStyle/>
+          <a:p>
+            <a:fld id="{F7021451-1387-4CA6-816F-3879F97B5CBC}" type="slidenum">
+              <a:rPr lang="en-US"/>
+              <a:t>14</a:t>
             </a:fld>
             <a:endParaRPr lang="en-US"/>
           </a:p>
@@ -1570,7 +1659,7 @@
           <a:p>
             <a:r>
               <a:rPr lang="en-US" dirty="0"/>
-              <a:t>End on the code line: that's the first thing they'll actually run. Say it out loud as a promise, not a warning.</a:t>
+              <a:t>The point isn't to teach Python today. It's that Python is the on-ramp: the same language scales all the way up to a supercomputer.</a:t>
             </a:r>
             <a:endParaRPr lang="en-US" dirty="0"/>
           </a:p>
@@ -2282,7 +2371,7 @@
         </p:nvSpPr>
         <p:spPr>
           <a:xfrm>
-            <a:off x="640080" y="2286000"/>
+            <a:off x="640080" y="2560320"/>
             <a:ext cx="640080" cy="640080"/>
           </a:xfrm>
           <a:prstGeom prst="ellipse">
@@ -2307,7 +2396,7 @@
         </p:nvSpPr>
         <p:spPr>
           <a:xfrm>
-            <a:off x="640080" y="2286000"/>
+            <a:off x="640080" y="2560320"/>
             <a:ext cx="640080" cy="640080"/>
           </a:xfrm>
           <a:prstGeom prst="rect">
@@ -2346,7 +2435,7 @@
         </p:nvSpPr>
         <p:spPr>
           <a:xfrm>
-            <a:off x="1554480" y="2267712"/>
+            <a:off x="1554480" y="2542032"/>
             <a:ext cx="4754880" cy="640080"/>
           </a:xfrm>
           <a:prstGeom prst="rect">
@@ -2371,7 +2460,7 @@
                 <a:ea typeface="Arial" pitchFamily="34" charset="-122"/>
                 <a:cs typeface="Arial" pitchFamily="34" charset="-120"/>
               </a:rPr>
-              <a:t>Prove where you are</a:t>
+              <a:t>See where you are</a:t>
             </a:r>
             <a:endParaRPr lang="en-US" sz="2100" dirty="0"/>
           </a:p>
@@ -2385,7 +2474,7 @@
         </p:nvSpPr>
         <p:spPr>
           <a:xfrm>
-            <a:off x="6675120" y="2286000"/>
+            <a:off x="6675120" y="2560320"/>
             <a:ext cx="4846320" cy="640080"/>
           </a:xfrm>
           <a:prstGeom prst="rect">
@@ -2410,7 +2499,7 @@
                 <a:ea typeface="Calibri" pitchFamily="34" charset="-122"/>
                 <a:cs typeface="Calibri" pitchFamily="34" charset="-120"/>
               </a:rPr>
-              <a:t>Run a line of code and see the supercomputer answer back.</a:t>
+              <a:t>Run a cell and watch the supercomputer answer back.</a:t>
             </a:r>
             <a:endParaRPr lang="en-US" sz="1600" dirty="0"/>
           </a:p>
@@ -2424,7 +2513,7 @@
         </p:nvSpPr>
         <p:spPr>
           <a:xfrm>
-            <a:off x="640080" y="3337560"/>
+            <a:off x="640080" y="3794760"/>
             <a:ext cx="640080" cy="640080"/>
           </a:xfrm>
           <a:prstGeom prst="ellipse">
@@ -2449,7 +2538,7 @@
         </p:nvSpPr>
         <p:spPr>
           <a:xfrm>
-            <a:off x="640080" y="3337560"/>
+            <a:off x="640080" y="3794760"/>
             <a:ext cx="640080" cy="640080"/>
           </a:xfrm>
           <a:prstGeom prst="rect">
@@ -2488,7 +2577,7 @@
         </p:nvSpPr>
         <p:spPr>
           <a:xfrm>
-            <a:off x="1554480" y="3319272"/>
+            <a:off x="1554480" y="3776472"/>
             <a:ext cx="4754880" cy="640080"/>
           </a:xfrm>
           <a:prstGeom prst="rect">
@@ -2513,7 +2602,7 @@
                 <a:ea typeface="Arial" pitchFamily="34" charset="-122"/>
                 <a:cs typeface="Arial" pitchFamily="34" charset="-120"/>
               </a:rPr>
-              <a:t>Learn core Python</a:t>
+              <a:t>Put many cores to work</a:t>
             </a:r>
             <a:endParaRPr lang="en-US" sz="2100" dirty="0"/>
           </a:p>
@@ -2527,7 +2616,7 @@
         </p:nvSpPr>
         <p:spPr>
           <a:xfrm>
-            <a:off x="6675120" y="3337560"/>
+            <a:off x="6675120" y="3794760"/>
             <a:ext cx="4846320" cy="640080"/>
           </a:xfrm>
           <a:prstGeom prst="rect">
@@ -2552,7 +2641,7 @@
                 <a:ea typeface="Calibri" pitchFamily="34" charset="-122"/>
                 <a:cs typeface="Calibri" pitchFamily="34" charset="-120"/>
               </a:rPr>
-              <a:t>Variables, math, text, lists, loops, decisions, and functions.</a:t>
+              <a:t>Analyze data and run models the slow way, then across all 56 cores.</a:t>
             </a:r>
             <a:endParaRPr lang="en-US" sz="1600" dirty="0"/>
           </a:p>
@@ -2566,7 +2655,7 @@
         </p:nvSpPr>
         <p:spPr>
           <a:xfrm>
-            <a:off x="640080" y="4389120"/>
+            <a:off x="640080" y="5029200"/>
             <a:ext cx="640080" cy="640080"/>
           </a:xfrm>
           <a:prstGeom prst="ellipse">
@@ -2591,7 +2680,7 @@
         </p:nvSpPr>
         <p:spPr>
           <a:xfrm>
-            <a:off x="640080" y="4389120"/>
+            <a:off x="640080" y="5029200"/>
             <a:ext cx="640080" cy="640080"/>
           </a:xfrm>
           <a:prstGeom prst="rect">
@@ -2630,7 +2719,7 @@
         </p:nvSpPr>
         <p:spPr>
           <a:xfrm>
-            <a:off x="1554480" y="4370832"/>
+            <a:off x="1554480" y="5010912"/>
             <a:ext cx="4754880" cy="640080"/>
           </a:xfrm>
           <a:prstGeom prst="rect">
@@ -2655,7 +2744,7 @@
                 <a:ea typeface="Arial" pitchFamily="34" charset="-122"/>
                 <a:cs typeface="Arial" pitchFamily="34" charset="-120"/>
               </a:rPr>
-              <a:t>Use many cores at once</a:t>
+              <a:t>Meet the ideas of HPC</a:t>
             </a:r>
             <a:endParaRPr lang="en-US" sz="2100" dirty="0"/>
           </a:p>
@@ -2669,7 +2758,7 @@
         </p:nvSpPr>
         <p:spPr>
           <a:xfrm>
-            <a:off x="6675120" y="4389120"/>
+            <a:off x="6675120" y="5029200"/>
             <a:ext cx="4846320" cy="640080"/>
           </a:xfrm>
           <a:prstGeom prst="rect">
@@ -2694,7 +2783,7 @@
                 <a:ea typeface="Calibri" pitchFamily="34" charset="-122"/>
                 <a:cs typeface="Calibri" pitchFamily="34" charset="-120"/>
               </a:rPr>
-              <a:t>Run a task the slow way, then the fast way, and time the difference.</a:t>
+              <a:t>Nodes, jobs, and the scale that makes it powerful.</a:t>
             </a:r>
             <a:endParaRPr lang="en-US" sz="1600" dirty="0"/>
           </a:p>
@@ -2702,149 +2791,7 @@
       </p:sp>
       <p:sp>
         <p:nvSpPr>
-          <p:cNvPr id="16" name="Shape 14"/>
-          <p:cNvSpPr/>
-          <p:nvPr/>
-        </p:nvSpPr>
-        <p:spPr>
-          <a:xfrm>
-            <a:off x="640080" y="5440680"/>
-            <a:ext cx="640080" cy="640080"/>
-          </a:xfrm>
-          <a:prstGeom prst="ellipse">
-            <a:avLst/>
-          </a:prstGeom>
-          <a:solidFill>
-            <a:srgbClr val="C1A231"/>
-          </a:solidFill>
-          <a:ln w="12700">
-            <a:solidFill>
-              <a:srgbClr val="C1A231"/>
-            </a:solidFill>
-            <a:prstDash val="solid"/>
-          </a:ln>
-        </p:spPr>
-      </p:sp>
-      <p:sp>
-        <p:nvSpPr>
-          <p:cNvPr id="17" name="Text 15"/>
-          <p:cNvSpPr/>
-          <p:nvPr/>
-        </p:nvSpPr>
-        <p:spPr>
-          <a:xfrm>
-            <a:off x="640080" y="5440680"/>
-            <a:ext cx="640080" cy="640080"/>
-          </a:xfrm>
-          <a:prstGeom prst="rect">
-            <a:avLst/>
-          </a:prstGeom>
-          <a:noFill/>
-          <a:ln/>
-        </p:spPr>
-        <p:txBody>
-          <a:bodyPr wrap="square" lIns="0" tIns="0" rIns="0" bIns="0" rtlCol="0" anchor="ctr"/>
-          <a:lstStyle/>
-          <a:p>
-            <a:pPr algn="ctr" indent="0" marL="0">
-              <a:buNone/>
-            </a:pPr>
-            <a:r>
-              <a:rPr lang="en-US" sz="2600" b="1" dirty="0">
-                <a:solidFill>
-                  <a:srgbClr val="840028"/>
-                </a:solidFill>
-                <a:latin typeface="Arial" pitchFamily="34" charset="0"/>
-                <a:ea typeface="Arial" pitchFamily="34" charset="-122"/>
-                <a:cs typeface="Arial" pitchFamily="34" charset="-120"/>
-              </a:rPr>
-              <a:t>4</a:t>
-            </a:r>
-            <a:endParaRPr lang="en-US" sz="2600" dirty="0"/>
-          </a:p>
-        </p:txBody>
-      </p:sp>
-      <p:sp>
-        <p:nvSpPr>
-          <p:cNvPr id="18" name="Text 16"/>
-          <p:cNvSpPr/>
-          <p:nvPr/>
-        </p:nvSpPr>
-        <p:spPr>
-          <a:xfrm>
-            <a:off x="1554480" y="5422392"/>
-            <a:ext cx="4754880" cy="640080"/>
-          </a:xfrm>
-          <a:prstGeom prst="rect">
-            <a:avLst/>
-          </a:prstGeom>
-          <a:noFill/>
-          <a:ln/>
-        </p:spPr>
-        <p:txBody>
-          <a:bodyPr wrap="square" lIns="0" tIns="0" rIns="0" bIns="0" rtlCol="0" anchor="ctr"/>
-          <a:lstStyle/>
-          <a:p>
-            <a:pPr indent="0" marL="0">
-              <a:buNone/>
-            </a:pPr>
-            <a:r>
-              <a:rPr lang="en-US" sz="2100" b="1" dirty="0">
-                <a:solidFill>
-                  <a:srgbClr val="1A1A1A"/>
-                </a:solidFill>
-                <a:latin typeface="Arial" pitchFamily="34" charset="0"/>
-                <a:ea typeface="Arial" pitchFamily="34" charset="-122"/>
-                <a:cs typeface="Arial" pitchFamily="34" charset="-120"/>
-              </a:rPr>
-              <a:t>Meet the ideas of HPC</a:t>
-            </a:r>
-            <a:endParaRPr lang="en-US" sz="2100" dirty="0"/>
-          </a:p>
-        </p:txBody>
-      </p:sp>
-      <p:sp>
-        <p:nvSpPr>
-          <p:cNvPr id="19" name="Text 17"/>
-          <p:cNvSpPr/>
-          <p:nvPr/>
-        </p:nvSpPr>
-        <p:spPr>
-          <a:xfrm>
-            <a:off x="6675120" y="5440680"/>
-            <a:ext cx="4846320" cy="640080"/>
-          </a:xfrm>
-          <a:prstGeom prst="rect">
-            <a:avLst/>
-          </a:prstGeom>
-          <a:noFill/>
-          <a:ln/>
-        </p:spPr>
-        <p:txBody>
-          <a:bodyPr wrap="square" lIns="0" tIns="0" rIns="0" bIns="0" rtlCol="0" anchor="ctr"/>
-          <a:lstStyle/>
-          <a:p>
-            <a:pPr indent="0" marL="0">
-              <a:buNone/>
-            </a:pPr>
-            <a:r>
-              <a:rPr lang="en-US" sz="1600" dirty="0">
-                <a:solidFill>
-                  <a:srgbClr val="6E6E70"/>
-                </a:solidFill>
-                <a:latin typeface="Calibri" pitchFamily="34" charset="0"/>
-                <a:ea typeface="Calibri" pitchFamily="34" charset="-122"/>
-                <a:cs typeface="Calibri" pitchFamily="34" charset="-120"/>
-              </a:rPr>
-              <a:t>Nodes, files, and how big jobs get scheduled.</a:t>
-            </a:r>
-            <a:endParaRPr lang="en-US" sz="1600" dirty="0"/>
-          </a:p>
-        </p:txBody>
-      </p:sp>
-      <p:sp>
-        <p:nvSpPr>
-          <p:cNvPr id="20" name="Text 18"/>
+          <p:cNvPr id="16" name="Text 14"/>
           <p:cNvSpPr/>
           <p:nvPr/>
         </p:nvSpPr>
@@ -3187,6 +3134,180 @@
     <p:bg>
       <p:bgPr>
         <a:solidFill>
+          <a:srgbClr val="840028"/>
+        </a:solidFill>
+      </p:bgPr>
+    </p:bg>
+    <p:spTree>
+      <p:nvGrpSpPr>
+        <p:cNvPr id="1" name=""/>
+        <p:cNvGrpSpPr/>
+        <p:nvPr/>
+      </p:nvGrpSpPr>
+      <p:grpSpPr>
+        <a:xfrm>
+          <a:off x="0" y="0"/>
+          <a:ext cx="0" cy="0"/>
+          <a:chOff x="0" y="0"/>
+          <a:chExt cx="0" cy="0"/>
+        </a:xfrm>
+      </p:grpSpPr>
+      <p:sp>
+        <p:nvSpPr>
+          <p:cNvPr id="2" name="Shape 0"/>
+          <p:cNvSpPr/>
+          <p:nvPr/>
+        </p:nvSpPr>
+        <p:spPr>
+          <a:xfrm>
+            <a:off x="640080" y="640080"/>
+            <a:ext cx="502920" cy="502920"/>
+          </a:xfrm>
+          <a:prstGeom prst="ellipse">
+            <a:avLst/>
+          </a:prstGeom>
+          <a:ln w="38100">
+            <a:solidFill>
+              <a:srgbClr val="C1A231"/>
+            </a:solidFill>
+            <a:prstDash val="solid"/>
+          </a:ln>
+        </p:spPr>
+      </p:sp>
+      <p:sp>
+        <p:nvSpPr>
+          <p:cNvPr id="3" name="Text 1"/>
+          <p:cNvSpPr/>
+          <p:nvPr/>
+        </p:nvSpPr>
+        <p:spPr>
+          <a:xfrm>
+            <a:off x="640080" y="2011680"/>
+            <a:ext cx="10972800" cy="1645920"/>
+          </a:xfrm>
+          <a:prstGeom prst="rect">
+            <a:avLst/>
+          </a:prstGeom>
+          <a:noFill/>
+          <a:ln/>
+        </p:spPr>
+        <p:txBody>
+          <a:bodyPr wrap="square" lIns="0" tIns="0" rIns="0" bIns="0" rtlCol="0" anchor="ctr"/>
+          <a:lstStyle/>
+          <a:p>
+            <a:pPr indent="0" marL="0">
+              <a:lnSpc>
+                <a:spcPts val="5000"/>
+              </a:lnSpc>
+              <a:buNone/>
+            </a:pPr>
+            <a:r>
+              <a:rPr lang="en-US" sz="4400" b="1" dirty="0">
+                <a:solidFill>
+                  <a:srgbClr val="FFFFFF"/>
+                </a:solidFill>
+                <a:latin typeface="Arial" pitchFamily="34" charset="0"/>
+                <a:ea typeface="Arial" pitchFamily="34" charset="-122"/>
+                <a:cs typeface="Arial" pitchFamily="34" charset="-120"/>
+              </a:rPr>
+              <a:t>Let's get you on the supercomputer.</a:t>
+            </a:r>
+            <a:endParaRPr lang="en-US" sz="4400" dirty="0"/>
+          </a:p>
+        </p:txBody>
+      </p:sp>
+      <p:sp>
+        <p:nvSpPr>
+          <p:cNvPr id="4" name="Text 2"/>
+          <p:cNvSpPr/>
+          <p:nvPr/>
+        </p:nvSpPr>
+        <p:spPr>
+          <a:xfrm>
+            <a:off x="640080" y="3749040"/>
+            <a:ext cx="10515600" cy="1188720"/>
+          </a:xfrm>
+          <a:prstGeom prst="rect">
+            <a:avLst/>
+          </a:prstGeom>
+          <a:noFill/>
+          <a:ln/>
+        </p:spPr>
+        <p:txBody>
+          <a:bodyPr wrap="square" lIns="0" tIns="0" rIns="0" bIns="0" rtlCol="0" anchor="ctr"/>
+          <a:lstStyle/>
+          <a:p>
+            <a:pPr indent="0" marL="0">
+              <a:buNone/>
+            </a:pPr>
+            <a:r>
+              <a:rPr lang="en-US" sz="2000" i="1" dirty="0">
+                <a:solidFill>
+                  <a:srgbClr val="C1A231"/>
+                </a:solidFill>
+                <a:latin typeface="Calibri" pitchFamily="34" charset="0"/>
+                <a:ea typeface="Calibri" pitchFamily="34" charset="-122"/>
+                <a:cs typeface="Calibri" pitchFamily="34" charset="-120"/>
+              </a:rPr>
+              <a:t>What you're about to do, running code across many cores on Frontera, is the same kind of work computational scientists do. You belong in that room.</a:t>
+            </a:r>
+            <a:endParaRPr lang="en-US" sz="2000" dirty="0"/>
+          </a:p>
+        </p:txBody>
+      </p:sp>
+      <p:sp>
+        <p:nvSpPr>
+          <p:cNvPr id="5" name="Text 3"/>
+          <p:cNvSpPr/>
+          <p:nvPr/>
+        </p:nvSpPr>
+        <p:spPr>
+          <a:xfrm>
+            <a:off x="640080" y="5943600"/>
+            <a:ext cx="10972800" cy="365760"/>
+          </a:xfrm>
+          <a:prstGeom prst="rect">
+            <a:avLst/>
+          </a:prstGeom>
+          <a:noFill/>
+          <a:ln/>
+        </p:spPr>
+        <p:txBody>
+          <a:bodyPr wrap="square" lIns="0" tIns="0" rIns="0" bIns="0" rtlCol="0" anchor="ctr"/>
+          <a:lstStyle/>
+          <a:p>
+            <a:pPr indent="0" marL="0">
+              <a:buNone/>
+            </a:pPr>
+            <a:r>
+              <a:rPr lang="en-US" sz="1500" dirty="0">
+                <a:solidFill>
+                  <a:srgbClr val="E9D9DE"/>
+                </a:solidFill>
+                <a:latin typeface="Calibri" pitchFamily="34" charset="0"/>
+                <a:ea typeface="Calibri" pitchFamily="34" charset="-122"/>
+                <a:cs typeface="Calibri" pitchFamily="34" charset="-120"/>
+              </a:rPr>
+              <a:t>Setup, notebook, and slides:  ashleyscruse.github.io/pfx-hpc</a:t>
+            </a:r>
+            <a:endParaRPr lang="en-US" sz="1500" dirty="0"/>
+          </a:p>
+        </p:txBody>
+      </p:sp>
+    </p:spTree>
+  </p:cSld>
+  <p:clrMapOvr>
+    <a:masterClrMapping/>
+  </p:clrMapOvr>
+</p:sld>
+</file>
+
+<file path=ppt/slides/slide13.xml><?xml version="1.0" encoding="utf-8"?>
+<p:sld xmlns:a="http://schemas.openxmlformats.org/drawingml/2006/main" xmlns:r="http://schemas.openxmlformats.org/officeDocument/2006/relationships" xmlns:p="http://schemas.openxmlformats.org/presentationml/2006/main">
+  <p:cSld name="Slide 13">
+    <p:bg>
+      <p:bgPr>
+        <a:solidFill>
           <a:srgbClr val="FFFFFF"/>
         </a:solidFill>
       </p:bgPr>
@@ -3238,7 +3359,7 @@
                 <a:ea typeface="Arial" pitchFamily="34" charset="-122"/>
                 <a:cs typeface="Arial" pitchFamily="34" charset="-120"/>
               </a:rPr>
-              <a:t>GROUND RULES</a:t>
+              <a:t>WHAT'S NEXT</a:t>
             </a:r>
             <a:endParaRPr lang="en-US" sz="1300" dirty="0"/>
           </a:p>
@@ -3277,7 +3398,7 @@
                 <a:ea typeface="Arial" pitchFamily="34" charset="-122"/>
                 <a:cs typeface="Arial" pitchFamily="34" charset="-120"/>
               </a:rPr>
-              <a:t>Running the notebook</a:t>
+              <a:t>You have more than Frontera</a:t>
             </a:r>
             <a:endParaRPr lang="en-US" sz="3200" dirty="0"/>
           </a:p>
@@ -3285,41 +3406,78 @@
       </p:sp>
       <p:sp>
         <p:nvSpPr>
-          <p:cNvPr id="4" name="Shape 2"/>
-          <p:cNvSpPr/>
-          <p:nvPr/>
-        </p:nvSpPr>
-        <p:spPr>
-          <a:xfrm>
-            <a:off x="640080" y="2286000"/>
-            <a:ext cx="4754880" cy="1463040"/>
-          </a:xfrm>
-          <a:prstGeom prst="roundRect">
-            <a:avLst>
-              <a:gd name="adj" fmla="val 7500"/>
-            </a:avLst>
+          <p:cNvPr id="4" name="Text 2"/>
+          <p:cNvSpPr/>
+          <p:nvPr/>
+        </p:nvSpPr>
+        <p:spPr>
+          <a:xfrm>
+            <a:off x="640080" y="1645920"/>
+            <a:ext cx="10972800" cy="548640"/>
+          </a:xfrm>
+          <a:prstGeom prst="rect">
+            <a:avLst/>
+          </a:prstGeom>
+          <a:noFill/>
+          <a:ln/>
+        </p:spPr>
+        <p:txBody>
+          <a:bodyPr wrap="square" lIns="0" tIns="0" rIns="0" bIns="0" rtlCol="0" anchor="ctr"/>
+          <a:lstStyle/>
+          <a:p>
+            <a:pPr indent="0" marL="0">
+              <a:buNone/>
+            </a:pPr>
+            <a:r>
+              <a:rPr lang="en-US" sz="1600" dirty="0">
+                <a:solidFill>
+                  <a:srgbClr val="6E6E70"/>
+                </a:solidFill>
+                <a:latin typeface="Calibri" pitchFamily="34" charset="0"/>
+                <a:ea typeface="Calibri" pitchFamily="34" charset="-122"/>
+                <a:cs typeface="Calibri" pitchFamily="34" charset="-120"/>
+              </a:rPr>
+              <a:t>Joining the Morehouse allocation gives you three TACC supercomputers with one login. Different machines are built for different jobs.</a:t>
+            </a:r>
+            <a:endParaRPr lang="en-US" sz="1600" dirty="0"/>
+          </a:p>
+        </p:txBody>
+      </p:sp>
+      <p:sp>
+        <p:nvSpPr>
+          <p:cNvPr id="5" name="Shape 3"/>
+          <p:cNvSpPr/>
+          <p:nvPr/>
+        </p:nvSpPr>
+        <p:spPr>
+          <a:xfrm>
+            <a:off x="640080" y="2377440"/>
+            <a:ext cx="3611880" cy="3246120"/>
+          </a:xfrm>
+          <a:prstGeom prst="rect">
+            <a:avLst/>
           </a:prstGeom>
           <a:solidFill>
             <a:srgbClr val="EFEDEA"/>
           </a:solidFill>
-          <a:ln w="19050">
-            <a:solidFill>
-              <a:srgbClr val="840028"/>
-            </a:solidFill>
-            <a:prstDash val="solid"/>
-          </a:ln>
-        </p:spPr>
-      </p:sp>
-      <p:sp>
-        <p:nvSpPr>
-          <p:cNvPr id="5" name="Text 3"/>
-          <p:cNvSpPr/>
-          <p:nvPr/>
-        </p:nvSpPr>
-        <p:spPr>
-          <a:xfrm>
-            <a:off x="640080" y="2286000"/>
-            <a:ext cx="4754880" cy="1463040"/>
+          <a:ln w="12700">
+            <a:solidFill>
+              <a:srgbClr val="EFEDEA"/>
+            </a:solidFill>
+            <a:prstDash val="solid"/>
+          </a:ln>
+        </p:spPr>
+      </p:sp>
+      <p:sp>
+        <p:nvSpPr>
+          <p:cNvPr id="6" name="Text 4"/>
+          <p:cNvSpPr/>
+          <p:nvPr/>
+        </p:nvSpPr>
+        <p:spPr>
+          <a:xfrm>
+            <a:off x="868680" y="2560320"/>
+            <a:ext cx="3154680" cy="457200"/>
           </a:xfrm>
           <a:prstGeom prst="rect">
             <a:avLst/>
@@ -3331,11 +3489,11 @@
           <a:bodyPr wrap="square" lIns="0" tIns="0" rIns="0" bIns="0" rtlCol="0" anchor="ctr"/>
           <a:lstStyle/>
           <a:p>
-            <a:pPr algn="ctr" indent="0" marL="0">
-              <a:buNone/>
-            </a:pPr>
-            <a:r>
-              <a:rPr lang="en-US" sz="3400" b="1" dirty="0">
+            <a:pPr indent="0" marL="0">
+              <a:buNone/>
+            </a:pPr>
+            <a:r>
+              <a:rPr lang="en-US" sz="2200" b="1" dirty="0">
                 <a:solidFill>
                   <a:srgbClr val="840028"/>
                 </a:solidFill>
@@ -3343,81 +3501,55 @@
                 <a:ea typeface="Arial" pitchFamily="34" charset="-122"/>
                 <a:cs typeface="Arial" pitchFamily="34" charset="-120"/>
               </a:rPr>
-              <a:t>Shift + Enter</a:t>
-            </a:r>
-            <a:endParaRPr lang="en-US" sz="3400" dirty="0"/>
-          </a:p>
-        </p:txBody>
-      </p:sp>
-      <p:sp>
-        <p:nvSpPr>
-          <p:cNvPr id="6" name="Text 4"/>
-          <p:cNvSpPr/>
-          <p:nvPr/>
-        </p:nvSpPr>
-        <p:spPr>
-          <a:xfrm>
-            <a:off x="640080" y="3840480"/>
-            <a:ext cx="4754880" cy="457200"/>
-          </a:xfrm>
-          <a:prstGeom prst="rect">
-            <a:avLst/>
-          </a:prstGeom>
-          <a:noFill/>
-          <a:ln/>
-        </p:spPr>
-        <p:txBody>
-          <a:bodyPr wrap="square" lIns="0" tIns="0" rIns="0" bIns="0" rtlCol="0" anchor="ctr"/>
-          <a:lstStyle/>
-          <a:p>
-            <a:pPr algn="ctr" indent="0" marL="0">
-              <a:buNone/>
-            </a:pPr>
-            <a:r>
-              <a:rPr lang="en-US" sz="1600" dirty="0">
-                <a:solidFill>
-                  <a:srgbClr val="6E6E70"/>
+              <a:t>Frontera</a:t>
+            </a:r>
+            <a:endParaRPr lang="en-US" sz="2200" dirty="0"/>
+          </a:p>
+        </p:txBody>
+      </p:sp>
+      <p:sp>
+        <p:nvSpPr>
+          <p:cNvPr id="7" name="Text 5"/>
+          <p:cNvSpPr/>
+          <p:nvPr/>
+        </p:nvSpPr>
+        <p:spPr>
+          <a:xfrm>
+            <a:off x="868680" y="3127248"/>
+            <a:ext cx="3154680" cy="868680"/>
+          </a:xfrm>
+          <a:prstGeom prst="rect">
+            <a:avLst/>
+          </a:prstGeom>
+          <a:noFill/>
+          <a:ln/>
+        </p:spPr>
+        <p:txBody>
+          <a:bodyPr wrap="square" lIns="0" tIns="0" rIns="0" bIns="0" rtlCol="0" anchor="t"/>
+          <a:lstStyle/>
+          <a:p>
+            <a:pPr indent="0" marL="0">
+              <a:buNone/>
+            </a:pPr>
+            <a:r>
+              <a:rPr lang="en-US" sz="1450" dirty="0">
+                <a:solidFill>
+                  <a:srgbClr val="1A1A1A"/>
                 </a:solidFill>
                 <a:latin typeface="Calibri" pitchFamily="34" charset="0"/>
                 <a:ea typeface="Calibri" pitchFamily="34" charset="-122"/>
                 <a:cs typeface="Calibri" pitchFamily="34" charset="-120"/>
               </a:rPr>
-              <a:t>runs the cell you're in</a:t>
-            </a:r>
-            <a:endParaRPr lang="en-US" sz="1600" dirty="0"/>
-          </a:p>
-        </p:txBody>
-      </p:sp>
-      <p:sp>
-        <p:nvSpPr>
-          <p:cNvPr id="7" name="Text 5"/>
-          <p:cNvSpPr/>
-          <p:nvPr/>
-        </p:nvSpPr>
-        <p:spPr>
-          <a:xfrm>
-            <a:off x="5852160" y="2286000"/>
-            <a:ext cx="5669280" cy="2377440"/>
-          </a:xfrm>
-          <a:prstGeom prst="rect">
-            <a:avLst/>
-          </a:prstGeom>
-          <a:noFill/>
-          <a:ln/>
-        </p:spPr>
-        <p:txBody>
-          <a:bodyPr wrap="square" lIns="0" tIns="0" rIns="0" bIns="0" rtlCol="0" anchor="ctr"/>
-          <a:lstStyle/>
-          <a:p>
-            <a:pPr marL="342900" indent="-342900">
-              <a:spcAft>
-                <a:spcPts val="1000"/>
-              </a:spcAft>
-              <a:buSzPct val="100000"/>
-              <a:buChar char="•"/>
-            </a:pPr>
-            <a:r>
-              <a:rPr lang="en-US" sz="1800" dirty="0">
+              <a:t>8,368 CPU nodes</a:t>
+            </a:r>
+            <a:endParaRPr lang="en-US" sz="1450" dirty="0"/>
+          </a:p>
+          <a:p>
+            <a:pPr indent="0" marL="0">
+              <a:buNone/>
+            </a:pPr>
+            <a:r>
+              <a:rPr lang="en-US" sz="1450" dirty="0">
                 <a:solidFill>
                   <a:srgbClr val="1A1A1A"/>
                 </a:solidFill>
@@ -3425,20 +3557,77 @@
                 <a:ea typeface="Calibri" pitchFamily="34" charset="-122"/>
                 <a:cs typeface="Calibri" pitchFamily="34" charset="-120"/>
               </a:rPr>
-              <a:t>Run the cells in order, top to bottom.</a:t>
-            </a:r>
-            <a:endParaRPr lang="en-US" sz="1800" dirty="0"/>
-          </a:p>
-          <a:p>
-            <a:pPr marL="342900" indent="-342900">
-              <a:spcAft>
-                <a:spcPts val="1000"/>
-              </a:spcAft>
-              <a:buSzPct val="100000"/>
-              <a:buChar char="•"/>
-            </a:pPr>
-            <a:r>
-              <a:rPr lang="en-US" sz="1800" dirty="0">
+              <a:t>56 cores each</a:t>
+            </a:r>
+            <a:endParaRPr lang="en-US" sz="1450" dirty="0"/>
+          </a:p>
+        </p:txBody>
+      </p:sp>
+      <p:sp>
+        <p:nvSpPr>
+          <p:cNvPr id="8" name="Text 6"/>
+          <p:cNvSpPr/>
+          <p:nvPr/>
+        </p:nvSpPr>
+        <p:spPr>
+          <a:xfrm>
+            <a:off x="868680" y="4114800"/>
+            <a:ext cx="3154680" cy="274320"/>
+          </a:xfrm>
+          <a:prstGeom prst="rect">
+            <a:avLst/>
+          </a:prstGeom>
+          <a:noFill/>
+          <a:ln/>
+        </p:spPr>
+        <p:txBody>
+          <a:bodyPr wrap="square" lIns="0" tIns="0" rIns="0" bIns="0" rtlCol="0" anchor="ctr"/>
+          <a:lstStyle/>
+          <a:p>
+            <a:pPr indent="0" marL="0">
+              <a:buNone/>
+            </a:pPr>
+            <a:r>
+              <a:rPr lang="en-US" sz="1200" b="1" spc="200" kern="0" dirty="0">
+                <a:solidFill>
+                  <a:srgbClr val="840028"/>
+                </a:solidFill>
+                <a:latin typeface="Arial" pitchFamily="34" charset="0"/>
+                <a:ea typeface="Arial" pitchFamily="34" charset="-122"/>
+                <a:cs typeface="Arial" pitchFamily="34" charset="-120"/>
+              </a:rPr>
+              <a:t>BEST FOR</a:t>
+            </a:r>
+            <a:endParaRPr lang="en-US" sz="1200" dirty="0"/>
+          </a:p>
+        </p:txBody>
+      </p:sp>
+      <p:sp>
+        <p:nvSpPr>
+          <p:cNvPr id="9" name="Text 7"/>
+          <p:cNvSpPr/>
+          <p:nvPr/>
+        </p:nvSpPr>
+        <p:spPr>
+          <a:xfrm>
+            <a:off x="868680" y="4407408"/>
+            <a:ext cx="3154680" cy="1051560"/>
+          </a:xfrm>
+          <a:prstGeom prst="rect">
+            <a:avLst/>
+          </a:prstGeom>
+          <a:noFill/>
+          <a:ln/>
+        </p:spPr>
+        <p:txBody>
+          <a:bodyPr wrap="square" lIns="0" tIns="0" rIns="0" bIns="0" rtlCol="0" anchor="t"/>
+          <a:lstStyle/>
+          <a:p>
+            <a:pPr indent="0" marL="0">
+              <a:buNone/>
+            </a:pPr>
+            <a:r>
+              <a:rPr lang="en-US" sz="1400" dirty="0">
                 <a:solidFill>
                   <a:srgbClr val="1A1A1A"/>
                 </a:solidFill>
@@ -3446,20 +3635,102 @@
                 <a:ea typeface="Calibri" pitchFamily="34" charset="-122"/>
                 <a:cs typeface="Calibri" pitchFamily="34" charset="-120"/>
               </a:rPr>
-              <a:t>Change the values. Make them yours.</a:t>
-            </a:r>
-            <a:endParaRPr lang="en-US" sz="1800" dirty="0"/>
-          </a:p>
-          <a:p>
-            <a:pPr marL="342900" indent="-342900">
-              <a:spcAft>
-                <a:spcPts val="1000"/>
-              </a:spcAft>
-              <a:buSzPct val="100000"/>
-              <a:buChar char="•"/>
-            </a:pPr>
-            <a:r>
-              <a:rPr lang="en-US" sz="1800" dirty="0">
+              <a:t>Very large CPU jobs and big groups. It's why we used it today.</a:t>
+            </a:r>
+            <a:endParaRPr lang="en-US" sz="1400" dirty="0"/>
+          </a:p>
+        </p:txBody>
+      </p:sp>
+      <p:sp>
+        <p:nvSpPr>
+          <p:cNvPr id="10" name="Shape 8"/>
+          <p:cNvSpPr/>
+          <p:nvPr/>
+        </p:nvSpPr>
+        <p:spPr>
+          <a:xfrm>
+            <a:off x="4480560" y="2377440"/>
+            <a:ext cx="3611880" cy="3246120"/>
+          </a:xfrm>
+          <a:prstGeom prst="rect">
+            <a:avLst/>
+          </a:prstGeom>
+          <a:solidFill>
+            <a:srgbClr val="EFEDEA"/>
+          </a:solidFill>
+          <a:ln w="12700">
+            <a:solidFill>
+              <a:srgbClr val="EFEDEA"/>
+            </a:solidFill>
+            <a:prstDash val="solid"/>
+          </a:ln>
+        </p:spPr>
+      </p:sp>
+      <p:sp>
+        <p:nvSpPr>
+          <p:cNvPr id="11" name="Text 9"/>
+          <p:cNvSpPr/>
+          <p:nvPr/>
+        </p:nvSpPr>
+        <p:spPr>
+          <a:xfrm>
+            <a:off x="4709160" y="2560320"/>
+            <a:ext cx="3154680" cy="457200"/>
+          </a:xfrm>
+          <a:prstGeom prst="rect">
+            <a:avLst/>
+          </a:prstGeom>
+          <a:noFill/>
+          <a:ln/>
+        </p:spPr>
+        <p:txBody>
+          <a:bodyPr wrap="square" lIns="0" tIns="0" rIns="0" bIns="0" rtlCol="0" anchor="ctr"/>
+          <a:lstStyle/>
+          <a:p>
+            <a:pPr indent="0" marL="0">
+              <a:buNone/>
+            </a:pPr>
+            <a:r>
+              <a:rPr lang="en-US" sz="2200" b="1" dirty="0">
+                <a:solidFill>
+                  <a:srgbClr val="840028"/>
+                </a:solidFill>
+                <a:latin typeface="Arial" pitchFamily="34" charset="0"/>
+                <a:ea typeface="Arial" pitchFamily="34" charset="-122"/>
+                <a:cs typeface="Arial" pitchFamily="34" charset="-120"/>
+              </a:rPr>
+              <a:t>Stampede3</a:t>
+            </a:r>
+            <a:endParaRPr lang="en-US" sz="2200" dirty="0"/>
+          </a:p>
+        </p:txBody>
+      </p:sp>
+      <p:sp>
+        <p:nvSpPr>
+          <p:cNvPr id="12" name="Text 10"/>
+          <p:cNvSpPr/>
+          <p:nvPr/>
+        </p:nvSpPr>
+        <p:spPr>
+          <a:xfrm>
+            <a:off x="4709160" y="3127248"/>
+            <a:ext cx="3154680" cy="868680"/>
+          </a:xfrm>
+          <a:prstGeom prst="rect">
+            <a:avLst/>
+          </a:prstGeom>
+          <a:noFill/>
+          <a:ln/>
+        </p:spPr>
+        <p:txBody>
+          <a:bodyPr wrap="square" lIns="0" tIns="0" rIns="0" bIns="0" rtlCol="0" anchor="t"/>
+          <a:lstStyle/>
+          <a:p>
+            <a:pPr indent="0" marL="0">
+              <a:buNone/>
+            </a:pPr>
+            <a:r>
+              <a:rPr lang="en-US" sz="1450" dirty="0">
                 <a:solidFill>
                   <a:srgbClr val="1A1A1A"/>
                 </a:solidFill>
@@ -3467,20 +3738,16 @@
                 <a:ea typeface="Calibri" pitchFamily="34" charset="-122"/>
                 <a:cs typeface="Calibri" pitchFamily="34" charset="-120"/>
               </a:rPr>
-              <a:t>If something breaks, just re-run it. Nothing you do can harm the computer.</a:t>
-            </a:r>
-            <a:endParaRPr lang="en-US" sz="1800" dirty="0"/>
-          </a:p>
-          <a:p>
-            <a:pPr marL="342900" indent="-342900">
-              <a:spcAft>
-                <a:spcPts val="1000"/>
-              </a:spcAft>
-              <a:buSzPct val="100000"/>
-              <a:buChar char="•"/>
-            </a:pPr>
-            <a:r>
-              <a:rPr lang="en-US" sz="1800" dirty="0">
+              <a:t>~1,900 nodes</a:t>
+            </a:r>
+            <a:endParaRPr lang="en-US" sz="1450" dirty="0"/>
+          </a:p>
+          <a:p>
+            <a:pPr indent="0" marL="0">
+              <a:buNone/>
+            </a:pPr>
+            <a:r>
+              <a:rPr lang="en-US" sz="1450" dirty="0">
                 <a:solidFill>
                   <a:srgbClr val="1A1A1A"/>
                 </a:solidFill>
@@ -3488,22 +3755,22 @@
                 <a:ea typeface="Calibri" pitchFamily="34" charset="-122"/>
                 <a:cs typeface="Calibri" pitchFamily="34" charset="-120"/>
               </a:rPr>
-              <a:t>Ask questions the moment you're stuck.</a:t>
-            </a:r>
-            <a:endParaRPr lang="en-US" sz="1800" dirty="0"/>
-          </a:p>
-        </p:txBody>
-      </p:sp>
-      <p:sp>
-        <p:nvSpPr>
-          <p:cNvPr id="8" name="Text 6"/>
-          <p:cNvSpPr/>
-          <p:nvPr/>
-        </p:nvSpPr>
-        <p:spPr>
-          <a:xfrm>
-            <a:off x="640080" y="5120640"/>
-            <a:ext cx="10972800" cy="548640"/>
+              <a:t>Intel CPUs + some GPUs</a:t>
+            </a:r>
+            <a:endParaRPr lang="en-US" sz="1450" dirty="0"/>
+          </a:p>
+        </p:txBody>
+      </p:sp>
+      <p:sp>
+        <p:nvSpPr>
+          <p:cNvPr id="13" name="Text 11"/>
+          <p:cNvSpPr/>
+          <p:nvPr/>
+        </p:nvSpPr>
+        <p:spPr>
+          <a:xfrm>
+            <a:off x="4709160" y="4114800"/>
+            <a:ext cx="3154680" cy="274320"/>
           </a:xfrm>
           <a:prstGeom prst="rect">
             <a:avLst/>
@@ -3519,30 +3786,94 @@
               <a:buNone/>
             </a:pPr>
             <a:r>
-              <a:rPr lang="en-US" sz="1800" i="1" dirty="0">
+              <a:rPr lang="en-US" sz="1200" b="1" spc="200" kern="0" dirty="0">
                 <a:solidFill>
                   <a:srgbClr val="840028"/>
+                </a:solidFill>
+                <a:latin typeface="Arial" pitchFamily="34" charset="0"/>
+                <a:ea typeface="Arial" pitchFamily="34" charset="-122"/>
+                <a:cs typeface="Arial" pitchFamily="34" charset="-120"/>
+              </a:rPr>
+              <a:t>BEST FOR</a:t>
+            </a:r>
+            <a:endParaRPr lang="en-US" sz="1200" dirty="0"/>
+          </a:p>
+        </p:txBody>
+      </p:sp>
+      <p:sp>
+        <p:nvSpPr>
+          <p:cNvPr id="14" name="Text 12"/>
+          <p:cNvSpPr/>
+          <p:nvPr/>
+        </p:nvSpPr>
+        <p:spPr>
+          <a:xfrm>
+            <a:off x="4709160" y="4407408"/>
+            <a:ext cx="3154680" cy="1051560"/>
+          </a:xfrm>
+          <a:prstGeom prst="rect">
+            <a:avLst/>
+          </a:prstGeom>
+          <a:noFill/>
+          <a:ln/>
+        </p:spPr>
+        <p:txBody>
+          <a:bodyPr wrap="square" lIns="0" tIns="0" rIns="0" bIns="0" rtlCol="0" anchor="t"/>
+          <a:lstStyle/>
+          <a:p>
+            <a:pPr indent="0" marL="0">
+              <a:buNone/>
+            </a:pPr>
+            <a:r>
+              <a:rPr lang="en-US" sz="1400" dirty="0">
+                <a:solidFill>
+                  <a:srgbClr val="1A1A1A"/>
                 </a:solidFill>
                 <a:latin typeface="Calibri" pitchFamily="34" charset="0"/>
                 <a:ea typeface="Calibri" pitchFamily="34" charset="-122"/>
                 <a:cs typeface="Calibri" pitchFamily="34" charset="-120"/>
               </a:rPr>
-              <a:t>Breaking things and fixing them is how you learn to code.</a:t>
-            </a:r>
-            <a:endParaRPr lang="en-US" sz="1800" dirty="0"/>
-          </a:p>
-        </p:txBody>
-      </p:sp>
-      <p:sp>
-        <p:nvSpPr>
-          <p:cNvPr id="9" name="Text 7"/>
-          <p:cNvSpPr/>
-          <p:nvPr/>
-        </p:nvSpPr>
-        <p:spPr>
-          <a:xfrm>
-            <a:off x="11185855" y="6217920"/>
-            <a:ext cx="548640" cy="365760"/>
+              <a:t>General-purpose simulation and data work on CPUs.</a:t>
+            </a:r>
+            <a:endParaRPr lang="en-US" sz="1400" dirty="0"/>
+          </a:p>
+        </p:txBody>
+      </p:sp>
+      <p:sp>
+        <p:nvSpPr>
+          <p:cNvPr id="15" name="Shape 13"/>
+          <p:cNvSpPr/>
+          <p:nvPr/>
+        </p:nvSpPr>
+        <p:spPr>
+          <a:xfrm>
+            <a:off x="8321040" y="2377440"/>
+            <a:ext cx="3611880" cy="3246120"/>
+          </a:xfrm>
+          <a:prstGeom prst="rect">
+            <a:avLst/>
+          </a:prstGeom>
+          <a:solidFill>
+            <a:srgbClr val="EFEDEA"/>
+          </a:solidFill>
+          <a:ln w="12700">
+            <a:solidFill>
+              <a:srgbClr val="EFEDEA"/>
+            </a:solidFill>
+            <a:prstDash val="solid"/>
+          </a:ln>
+        </p:spPr>
+      </p:sp>
+      <p:sp>
+        <p:nvSpPr>
+          <p:cNvPr id="16" name="Text 14"/>
+          <p:cNvSpPr/>
+          <p:nvPr/>
+        </p:nvSpPr>
+        <p:spPr>
+          <a:xfrm>
+            <a:off x="8549640" y="2560320"/>
+            <a:ext cx="3154680" cy="457200"/>
           </a:xfrm>
           <a:prstGeom prst="rect">
             <a:avLst/>
@@ -3554,19 +3885,192 @@
           <a:bodyPr wrap="square" lIns="0" tIns="0" rIns="0" bIns="0" rtlCol="0" anchor="ctr"/>
           <a:lstStyle/>
           <a:p>
-            <a:pPr algn="r" indent="0" marL="0">
-              <a:buNone/>
-            </a:pPr>
-            <a:r>
-              <a:rPr lang="en-US" sz="1200" dirty="0">
-                <a:solidFill>
-                  <a:srgbClr val="6E6E70"/>
+            <a:pPr indent="0" marL="0">
+              <a:buNone/>
+            </a:pPr>
+            <a:r>
+              <a:rPr lang="en-US" sz="2200" b="1" dirty="0">
+                <a:solidFill>
+                  <a:srgbClr val="840028"/>
                 </a:solidFill>
                 <a:latin typeface="Arial" pitchFamily="34" charset="0"/>
                 <a:ea typeface="Arial" pitchFamily="34" charset="-122"/>
                 <a:cs typeface="Arial" pitchFamily="34" charset="-120"/>
               </a:rPr>
-              <a:t>12</a:t>
+              <a:t>Vista</a:t>
+            </a:r>
+            <a:endParaRPr lang="en-US" sz="2200" dirty="0"/>
+          </a:p>
+        </p:txBody>
+      </p:sp>
+      <p:sp>
+        <p:nvSpPr>
+          <p:cNvPr id="17" name="Text 15"/>
+          <p:cNvSpPr/>
+          <p:nvPr/>
+        </p:nvSpPr>
+        <p:spPr>
+          <a:xfrm>
+            <a:off x="8549640" y="3127248"/>
+            <a:ext cx="3154680" cy="868680"/>
+          </a:xfrm>
+          <a:prstGeom prst="rect">
+            <a:avLst/>
+          </a:prstGeom>
+          <a:noFill/>
+          <a:ln/>
+        </p:spPr>
+        <p:txBody>
+          <a:bodyPr wrap="square" lIns="0" tIns="0" rIns="0" bIns="0" rtlCol="0" anchor="t"/>
+          <a:lstStyle/>
+          <a:p>
+            <a:pPr indent="0" marL="0">
+              <a:buNone/>
+            </a:pPr>
+            <a:r>
+              <a:rPr lang="en-US" sz="1450" dirty="0">
+                <a:solidFill>
+                  <a:srgbClr val="1A1A1A"/>
+                </a:solidFill>
+                <a:latin typeface="Calibri" pitchFamily="34" charset="0"/>
+                <a:ea typeface="Calibri" pitchFamily="34" charset="-122"/>
+                <a:cs typeface="Calibri" pitchFamily="34" charset="-120"/>
+              </a:rPr>
+              <a:t>600 GPU nodes (Grace Hopper)</a:t>
+            </a:r>
+            <a:endParaRPr lang="en-US" sz="1450" dirty="0"/>
+          </a:p>
+          <a:p>
+            <a:pPr indent="0" marL="0">
+              <a:buNone/>
+            </a:pPr>
+            <a:r>
+              <a:rPr lang="en-US" sz="1450" dirty="0">
+                <a:solidFill>
+                  <a:srgbClr val="1A1A1A"/>
+                </a:solidFill>
+                <a:latin typeface="Calibri" pitchFamily="34" charset="0"/>
+                <a:ea typeface="Calibri" pitchFamily="34" charset="-122"/>
+                <a:cs typeface="Calibri" pitchFamily="34" charset="-120"/>
+              </a:rPr>
+              <a:t>+ 256 CPU nodes</a:t>
+            </a:r>
+            <a:endParaRPr lang="en-US" sz="1450" dirty="0"/>
+          </a:p>
+        </p:txBody>
+      </p:sp>
+      <p:sp>
+        <p:nvSpPr>
+          <p:cNvPr id="18" name="Text 16"/>
+          <p:cNvSpPr/>
+          <p:nvPr/>
+        </p:nvSpPr>
+        <p:spPr>
+          <a:xfrm>
+            <a:off x="8549640" y="4114800"/>
+            <a:ext cx="3154680" cy="274320"/>
+          </a:xfrm>
+          <a:prstGeom prst="rect">
+            <a:avLst/>
+          </a:prstGeom>
+          <a:noFill/>
+          <a:ln/>
+        </p:spPr>
+        <p:txBody>
+          <a:bodyPr wrap="square" lIns="0" tIns="0" rIns="0" bIns="0" rtlCol="0" anchor="ctr"/>
+          <a:lstStyle/>
+          <a:p>
+            <a:pPr indent="0" marL="0">
+              <a:buNone/>
+            </a:pPr>
+            <a:r>
+              <a:rPr lang="en-US" sz="1200" b="1" spc="200" kern="0" dirty="0">
+                <a:solidFill>
+                  <a:srgbClr val="840028"/>
+                </a:solidFill>
+                <a:latin typeface="Arial" pitchFamily="34" charset="0"/>
+                <a:ea typeface="Arial" pitchFamily="34" charset="-122"/>
+                <a:cs typeface="Arial" pitchFamily="34" charset="-120"/>
+              </a:rPr>
+              <a:t>BEST FOR</a:t>
+            </a:r>
+            <a:endParaRPr lang="en-US" sz="1200" dirty="0"/>
+          </a:p>
+        </p:txBody>
+      </p:sp>
+      <p:sp>
+        <p:nvSpPr>
+          <p:cNvPr id="19" name="Text 17"/>
+          <p:cNvSpPr/>
+          <p:nvPr/>
+        </p:nvSpPr>
+        <p:spPr>
+          <a:xfrm>
+            <a:off x="8549640" y="4407408"/>
+            <a:ext cx="3154680" cy="1051560"/>
+          </a:xfrm>
+          <a:prstGeom prst="rect">
+            <a:avLst/>
+          </a:prstGeom>
+          <a:noFill/>
+          <a:ln/>
+        </p:spPr>
+        <p:txBody>
+          <a:bodyPr wrap="square" lIns="0" tIns="0" rIns="0" bIns="0" rtlCol="0" anchor="t"/>
+          <a:lstStyle/>
+          <a:p>
+            <a:pPr indent="0" marL="0">
+              <a:buNone/>
+            </a:pPr>
+            <a:r>
+              <a:rPr lang="en-US" sz="1400" dirty="0">
+                <a:solidFill>
+                  <a:srgbClr val="1A1A1A"/>
+                </a:solidFill>
+                <a:latin typeface="Calibri" pitchFamily="34" charset="0"/>
+                <a:ea typeface="Calibri" pitchFamily="34" charset="-122"/>
+                <a:cs typeface="Calibri" pitchFamily="34" charset="-120"/>
+              </a:rPr>
+              <a:t>AI, machine learning, and anything that needs GPUs.</a:t>
+            </a:r>
+            <a:endParaRPr lang="en-US" sz="1400" dirty="0"/>
+          </a:p>
+        </p:txBody>
+      </p:sp>
+      <p:sp>
+        <p:nvSpPr>
+          <p:cNvPr id="20" name="Text 18"/>
+          <p:cNvSpPr/>
+          <p:nvPr/>
+        </p:nvSpPr>
+        <p:spPr>
+          <a:xfrm>
+            <a:off x="11185855" y="6217920"/>
+            <a:ext cx="548640" cy="365760"/>
+          </a:xfrm>
+          <a:prstGeom prst="rect">
+            <a:avLst/>
+          </a:prstGeom>
+          <a:noFill/>
+          <a:ln/>
+        </p:spPr>
+        <p:txBody>
+          <a:bodyPr wrap="square" lIns="0" tIns="0" rIns="0" bIns="0" rtlCol="0" anchor="ctr"/>
+          <a:lstStyle/>
+          <a:p>
+            <a:pPr algn="r" indent="0" marL="0">
+              <a:buNone/>
+            </a:pPr>
+            <a:r>
+              <a:rPr lang="en-US" sz="1200" dirty="0">
+                <a:solidFill>
+                  <a:srgbClr val="6E6E70"/>
+                </a:solidFill>
+                <a:latin typeface="Arial" pitchFamily="34" charset="0"/>
+                <a:ea typeface="Arial" pitchFamily="34" charset="-122"/>
+                <a:cs typeface="Arial" pitchFamily="34" charset="-120"/>
+              </a:rPr>
+              <a:t>13</a:t>
             </a:r>
             <a:endParaRPr lang="en-US" sz="1200" dirty="0"/>
           </a:p>
@@ -3580,9 +4084,9 @@
 </p:sld>
 </file>
 
-<file path=ppt/slides/slide13.xml><?xml version="1.0" encoding="utf-8"?>
+<file path=ppt/slides/slide14.xml><?xml version="1.0" encoding="utf-8"?>
 <p:sld xmlns:a="http://schemas.openxmlformats.org/drawingml/2006/main" xmlns:r="http://schemas.openxmlformats.org/officeDocument/2006/relationships" xmlns:p="http://schemas.openxmlformats.org/presentationml/2006/main">
-  <p:cSld name="Slide 13">
+  <p:cSld name="Slide 14">
     <p:bg>
       <p:bgPr>
         <a:solidFill>
@@ -3634,8 +4138,8 @@
         </p:nvSpPr>
         <p:spPr>
           <a:xfrm>
-            <a:off x="640080" y="2011680"/>
-            <a:ext cx="10972800" cy="1645920"/>
+            <a:off x="640080" y="2194560"/>
+            <a:ext cx="10972800" cy="1463040"/>
           </a:xfrm>
           <a:prstGeom prst="rect">
             <a:avLst/>
@@ -3662,7 +4166,7 @@
                 <a:ea typeface="Arial" pitchFamily="34" charset="-122"/>
                 <a:cs typeface="Arial" pitchFamily="34" charset="-120"/>
               </a:rPr>
-              <a:t>Let's get you on the supercomputer.</a:t>
+              <a:t>You're a supercomputer user now.</a:t>
             </a:r>
             <a:endParaRPr lang="en-US" sz="4400" dirty="0"/>
           </a:p>
@@ -3676,8 +4180,8 @@
         </p:nvSpPr>
         <p:spPr>
           <a:xfrm>
-            <a:off x="640080" y="3749040"/>
-            <a:ext cx="10515600" cy="1188720"/>
+            <a:off x="640080" y="3840480"/>
+            <a:ext cx="10515600" cy="914400"/>
           </a:xfrm>
           <a:prstGeom prst="rect">
             <a:avLst/>
@@ -3701,7 +4205,7 @@
                 <a:ea typeface="Calibri" pitchFamily="34" charset="-122"/>
                 <a:cs typeface="Calibri" pitchFamily="34" charset="-120"/>
               </a:rPr>
-              <a:t>What you're about to do, running code across many cores on Frontera, is the same kind of work computational scientists do. You belong in that room.</a:t>
+              <a:t>Frontera today. Stampede3 and Vista whenever your work is ready for them.</a:t>
             </a:r>
             <a:endParaRPr lang="en-US" sz="2000" dirty="0"/>
           </a:p>
@@ -3740,7 +4244,7 @@
                 <a:ea typeface="Calibri" pitchFamily="34" charset="-122"/>
                 <a:cs typeface="Calibri" pitchFamily="34" charset="-120"/>
               </a:rPr>
-              <a:t>Setup, notebook, and slides:  ashleyscruse.github.io/pfx-hpc</a:t>
+              <a:t>Everything from today:  ashleyscruse.github.io/pfx-hpc</a:t>
             </a:r>
             <a:endParaRPr lang="en-US" sz="1500" dirty="0"/>
           </a:p>
@@ -7912,7 +8416,7 @@
                 <a:ea typeface="Calibri" pitchFamily="34" charset="-122"/>
                 <a:cs typeface="Calibri" pitchFamily="34" charset="-120"/>
               </a:rPr>
-              <a:t>Nodes set aside in advance. We're using one today: Morehouse.</a:t>
+              <a:t>Nodes set aside in advance. We're using a reservation today.</a:t>
             </a:r>
             <a:endParaRPr lang="en-US" sz="1350" dirty="0"/>
           </a:p>
@@ -8054,7 +8558,7 @@
                 <a:ea typeface="Calibri" pitchFamily="34" charset="-122"/>
                 <a:cs typeface="Calibri" pitchFamily="34" charset="-120"/>
               </a:rPr>
-              <a:t>A job = “run this program, on this many nodes, for this long.”  Today, TAP used our reservation to get you a node right away.</a:t>
+              <a:t>A job = “run this program, on this many nodes, for this long.”  We have a reservation today, so we'll get nodes right away, no waiting in the queue.</a:t>
             </a:r>
             <a:endParaRPr lang="en-US" sz="1500" dirty="0"/>
           </a:p>
@@ -9093,8 +9597,8 @@
         </p:nvSpPr>
         <p:spPr>
           <a:xfrm>
-            <a:off x="5669280" y="2103120"/>
-            <a:ext cx="5486400" cy="365760"/>
+            <a:off x="5495544" y="2103120"/>
+            <a:ext cx="3931920" cy="365760"/>
           </a:xfrm>
           <a:prstGeom prst="rect">
             <a:avLst/>
@@ -9732,8 +10236,8 @@
         </p:nvSpPr>
         <p:spPr>
           <a:xfrm>
-            <a:off x="5669280" y="4800600"/>
-            <a:ext cx="5486400" cy="548640"/>
+            <a:off x="5495544" y="4800600"/>
+            <a:ext cx="3931920" cy="548640"/>
           </a:xfrm>
           <a:prstGeom prst="rect">
             <a:avLst/>
@@ -10285,17 +10789,17 @@
               <a:buNone/>
             </a:pPr>
             <a:r>
-              <a:rPr lang="en-US" sz="2400" b="1" dirty="0">
-                <a:solidFill>
-                  <a:srgbClr val="840028"/>
-                </a:solidFill>
-                <a:latin typeface="Courier New" pitchFamily="34" charset="0"/>
-                <a:ea typeface="Courier New" pitchFamily="34" charset="-122"/>
-                <a:cs typeface="Courier New" pitchFamily="34" charset="-120"/>
-              </a:rPr>
-              <a:t>print("Hello, Frontera")</a:t>
-            </a:r>
-            <a:endParaRPr lang="en-US" sz="2400" dirty="0"/>
+              <a:rPr lang="en-US" sz="1800" i="1" dirty="0">
+                <a:solidFill>
+                  <a:srgbClr val="6E6E70"/>
+                </a:solidFill>
+                <a:latin typeface="Calibri" pitchFamily="34" charset="0"/>
+                <a:ea typeface="Calibri" pitchFamily="34" charset="-122"/>
+                <a:cs typeface="Calibri" pitchFamily="34" charset="-120"/>
+              </a:rPr>
+              <a:t>The same Python you could learn on a laptop is what runs on Frontera.</a:t>
+            </a:r>
+            <a:endParaRPr lang="en-US" sz="1800" dirty="0"/>
           </a:p>
         </p:txBody>
       </p:sp>

--- a/slides/pfx-hpc-slides.pptx
+++ b/slides/pfx-hpc-slides.pptx
@@ -3561,6 +3561,23 @@
             </a:r>
             <a:endParaRPr lang="en-US" sz="1450" dirty="0"/>
           </a:p>
+          <a:p>
+            <a:pPr indent="0" marL="0">
+              <a:buNone/>
+            </a:pPr>
+            <a:r>
+              <a:rPr lang="en-US" sz="1450" dirty="0">
+                <a:solidFill>
+                  <a:srgbClr val="1A1A1A"/>
+                </a:solidFill>
+                <a:latin typeface="Calibri" pitchFamily="34" charset="0"/>
+                <a:ea typeface="Calibri" pitchFamily="34" charset="-122"/>
+                <a:cs typeface="Calibri" pitchFamily="34" charset="-120"/>
+              </a:rPr>
+              <a:t>(468,608 cores)</a:t>
+            </a:r>
+            <a:endParaRPr lang="en-US" sz="1450" dirty="0"/>
+          </a:p>
         </p:txBody>
       </p:sp>
       <p:sp>
@@ -3755,7 +3772,24 @@
                 <a:ea typeface="Calibri" pitchFamily="34" charset="-122"/>
                 <a:cs typeface="Calibri" pitchFamily="34" charset="-120"/>
               </a:rPr>
-              <a:t>Intel CPUs + some GPUs</a:t>
+              <a:t>48–112 cores per node</a:t>
+            </a:r>
+            <a:endParaRPr lang="en-US" sz="1450" dirty="0"/>
+          </a:p>
+          <a:p>
+            <a:pPr indent="0" marL="0">
+              <a:buNone/>
+            </a:pPr>
+            <a:r>
+              <a:rPr lang="en-US" sz="1450" dirty="0">
+                <a:solidFill>
+                  <a:srgbClr val="1A1A1A"/>
+                </a:solidFill>
+                <a:latin typeface="Calibri" pitchFamily="34" charset="0"/>
+                <a:ea typeface="Calibri" pitchFamily="34" charset="-122"/>
+                <a:cs typeface="Calibri" pitchFamily="34" charset="-120"/>
+              </a:rPr>
+              <a:t>(~100,000+ cores)</a:t>
             </a:r>
             <a:endParaRPr lang="en-US" sz="1450" dirty="0"/>
           </a:p>
@@ -3936,7 +3970,7 @@
                 <a:ea typeface="Calibri" pitchFamily="34" charset="-122"/>
                 <a:cs typeface="Calibri" pitchFamily="34" charset="-120"/>
               </a:rPr>
-              <a:t>600 GPU nodes (Grace Hopper)</a:t>
+              <a:t>600 GPU nodes: 72 cores + 1 GPU</a:t>
             </a:r>
             <a:endParaRPr lang="en-US" sz="1450" dirty="0"/>
           </a:p>
@@ -3953,7 +3987,24 @@
                 <a:ea typeface="Calibri" pitchFamily="34" charset="-122"/>
                 <a:cs typeface="Calibri" pitchFamily="34" charset="-120"/>
               </a:rPr>
-              <a:t>+ 256 CPU nodes</a:t>
+              <a:t>256 CPU nodes: 144 cores</a:t>
+            </a:r>
+            <a:endParaRPr lang="en-US" sz="1450" dirty="0"/>
+          </a:p>
+          <a:p>
+            <a:pPr indent="0" marL="0">
+              <a:buNone/>
+            </a:pPr>
+            <a:r>
+              <a:rPr lang="en-US" sz="1450" dirty="0">
+                <a:solidFill>
+                  <a:srgbClr val="1A1A1A"/>
+                </a:solidFill>
+                <a:latin typeface="Calibri" pitchFamily="34" charset="0"/>
+                <a:ea typeface="Calibri" pitchFamily="34" charset="-122"/>
+                <a:cs typeface="Calibri" pitchFamily="34" charset="-120"/>
+              </a:rPr>
+              <a:t>(~80,000 cores + 600 GPUs)</a:t>
             </a:r>
             <a:endParaRPr lang="en-US" sz="1450" dirty="0"/>
           </a:p>
